--- a/ferramentas-ia-comunicacao/stack-ia-comunicacao-vli.pptx
+++ b/ferramentas-ia-comunicacao/stack-ia-comunicacao-vli.pptx
@@ -2,17 +2,19 @@
 <file path=ppt/presentation.xml><?xml version="1.0" encoding="utf-8"?>
 <p:presentation xmlns:p="http://schemas.openxmlformats.org/presentationml/2006/main">
   <p:sldMasterIdLst>
-    <p:sldMasterId xmlns:r="http://schemas.openxmlformats.org/officeDocument/2006/relationships" id="2147483648" r:id="Rdc8b5900f1bb4831"/>
+    <p:sldMasterId xmlns:r="http://schemas.openxmlformats.org/officeDocument/2006/relationships" id="2147483648" r:id="R9470bce2fa574506"/>
   </p:sldMasterIdLst>
   <p:notesMasterIdLst>
-    <p:notesMasterId xmlns:r="http://schemas.openxmlformats.org/officeDocument/2006/relationships" r:id="R30983f45960d4d7d"/>
+    <p:notesMasterId xmlns:r="http://schemas.openxmlformats.org/officeDocument/2006/relationships" r:id="R82415e42aab54df4"/>
   </p:notesMasterIdLst>
   <p:sldIdLst>
-    <p:sldId xmlns:r="http://schemas.openxmlformats.org/officeDocument/2006/relationships" id="256" r:id="Rbc2ac7391cca47d4"/>
-    <p:sldId xmlns:r="http://schemas.openxmlformats.org/officeDocument/2006/relationships" id="257" r:id="R8fea22a2369c42df"/>
-    <p:sldId xmlns:r="http://schemas.openxmlformats.org/officeDocument/2006/relationships" id="258" r:id="Ra931cc577c224b64"/>
-    <p:sldId xmlns:r="http://schemas.openxmlformats.org/officeDocument/2006/relationships" id="259" r:id="R61bd13bf8924493e"/>
-    <p:sldId xmlns:r="http://schemas.openxmlformats.org/officeDocument/2006/relationships" id="260" r:id="R9ec56a6104884f6b"/>
+    <p:sldId xmlns:r="http://schemas.openxmlformats.org/officeDocument/2006/relationships" id="256" r:id="Rf04d8946d37a4a29"/>
+    <p:sldId xmlns:r="http://schemas.openxmlformats.org/officeDocument/2006/relationships" id="257" r:id="R6e84e5b7d972460d"/>
+    <p:sldId xmlns:r="http://schemas.openxmlformats.org/officeDocument/2006/relationships" id="258" r:id="Rf7719478bda34bfc"/>
+    <p:sldId xmlns:r="http://schemas.openxmlformats.org/officeDocument/2006/relationships" id="259" r:id="R5dbc47255e7e4f35"/>
+    <p:sldId xmlns:r="http://schemas.openxmlformats.org/officeDocument/2006/relationships" id="260" r:id="R1e2c1a1003a44480"/>
+    <p:sldId xmlns:r="http://schemas.openxmlformats.org/officeDocument/2006/relationships" id="261" r:id="Rc509836836ef4a84"/>
+    <p:sldId xmlns:r="http://schemas.openxmlformats.org/officeDocument/2006/relationships" id="262" r:id="R9256f98686f641dc"/>
   </p:sldIdLst>
   <p:sldSz cx="12192000" cy="6858000"/>
   <p:notesSz cx="6858000" cy="9144000"/>
@@ -606,7 +608,17 @@
           <a:lstStyle xmlns:a="http://schemas.openxmlformats.org/drawingml/2006/main"/>
           <a:p xmlns:a="http://schemas.openxmlformats.org/drawingml/2006/main">
             <a:r>
-              <a:t>[Sources] Custo de R$ 14 mil por landing page informado pelo usuário; confirmar escopo, período e volume internamente.</a:t>
+              <a:t>[Sources] Perplexity Enterprise: https://www.perplexity.ai/enterprise</a:t>
+            </a:r>
+          </a:p>
+          <a:p xmlns:a="http://schemas.openxmlformats.org/drawingml/2006/main">
+            <a:r>
+              <a:t>[Sources] ElevenLabs dubbing: https://elevenlabs.io/docs/overview/capabilities/dubbing</a:t>
+            </a:r>
+          </a:p>
+          <a:p xmlns:a="http://schemas.openxmlformats.org/drawingml/2006/main">
+            <a:r>
+              <a:t>[Sources] ElevenLabs enterprise security: https://elevenlabs.io/enterprise</a:t>
             </a:r>
           </a:p>
         </p:txBody>
@@ -676,17 +688,7 @@
           <a:lstStyle xmlns:a="http://schemas.openxmlformats.org/drawingml/2006/main"/>
           <a:p xmlns:a="http://schemas.openxmlformats.org/drawingml/2006/main">
             <a:r>
-              <a:t>[Sources] Adobe Firefly approach: https://www.adobe.com/ai/overview/firefly/gen-ai-approach.html</a:t>
-            </a:r>
-          </a:p>
-          <a:p xmlns:a="http://schemas.openxmlformats.org/drawingml/2006/main">
-            <a:r>
-              <a:t>[Sources] Adobe Firefly Partner Models: https://www.adobe.com/products/firefly/partner-models.html</a:t>
-            </a:r>
-          </a:p>
-          <a:p xmlns:a="http://schemas.openxmlformats.org/drawingml/2006/main">
-            <a:r>
-              <a:t>[Sources] ElevenLabs enterprise security: https://elevenlabs.io/enterprise</a:t>
+              <a:t>[Sources] Custo de R$ 14 mil por landing page informado pelo usuário; confirmar escopo, período e volume internamente.</a:t>
             </a:r>
           </a:p>
         </p:txBody>
@@ -717,6 +719,156 @@
 </file>
 
 <file path=ppt/notesSlides/notesSlide5.xml><?xml version="1.0" encoding="utf-8"?>
+<p:notes xmlns:p="http://schemas.openxmlformats.org/presentationml/2006/main">
+  <p:cSld>
+    <p:spTree>
+      <p:nvGrpSpPr>
+        <p:cNvPr id="1" name=""/>
+        <p:cNvGrpSpPr/>
+        <p:nvPr/>
+      </p:nvGrpSpPr>
+      <p:grpSpPr>
+        <a:xfrm xmlns:a="http://schemas.openxmlformats.org/drawingml/2006/main"/>
+      </p:grpSpPr>
+      <p:sp>
+        <p:nvSpPr>
+          <p:cNvPr id="2" name="Slide Image Placeholder 1"/>
+          <p:cNvSpPr>
+            <a:spLocks xmlns:a="http://schemas.openxmlformats.org/drawingml/2006/main" noGrp="1"/>
+          </p:cNvSpPr>
+          <p:nvPr>
+            <p:ph type="sldImg" idx="0"/>
+          </p:nvPr>
+        </p:nvSpPr>
+        <p:spPr/>
+      </p:sp>
+      <p:sp>
+        <p:nvSpPr>
+          <p:cNvPr id="3" name="Notes Placeholder 2"/>
+          <p:cNvSpPr>
+            <a:spLocks xmlns:a="http://schemas.openxmlformats.org/drawingml/2006/main" noGrp="1"/>
+          </p:cNvSpPr>
+          <p:nvPr>
+            <p:ph type="body" idx="1"/>
+          </p:nvPr>
+        </p:nvSpPr>
+        <p:spPr/>
+        <p:txBody>
+          <a:bodyPr xmlns:a="http://schemas.openxmlformats.org/drawingml/2006/main"/>
+          <a:lstStyle xmlns:a="http://schemas.openxmlformats.org/drawingml/2006/main"/>
+          <a:p xmlns:a="http://schemas.openxmlformats.org/drawingml/2006/main">
+            <a:r>
+              <a:t>[Sources] Flow mapping based on the tool capabilities cited in prior slides.</a:t>
+            </a:r>
+          </a:p>
+        </p:txBody>
+      </p:sp>
+      <p:sp>
+        <p:nvSpPr>
+          <p:cNvPr id="4" name="Slide Number Placeholder 3"/>
+          <p:cNvSpPr>
+            <a:spLocks xmlns:a="http://schemas.openxmlformats.org/drawingml/2006/main" noGrp="1"/>
+          </p:cNvSpPr>
+          <p:nvPr>
+            <p:ph type="sldNum" idx="5"/>
+          </p:nvPr>
+        </p:nvSpPr>
+        <p:spPr/>
+        <p:txBody>
+          <a:bodyPr xmlns:a="http://schemas.openxmlformats.org/drawingml/2006/main"/>
+          <a:lstStyle xmlns:a="http://schemas.openxmlformats.org/drawingml/2006/main"/>
+          <a:p xmlns:a="http://schemas.openxmlformats.org/drawingml/2006/main"/>
+        </p:txBody>
+      </p:sp>
+    </p:spTree>
+  </p:cSld>
+  <p:clrMapOvr>
+    <a:masterClrMapping xmlns:a="http://schemas.openxmlformats.org/drawingml/2006/main"/>
+  </p:clrMapOvr>
+</p:notes>
+</file>
+
+<file path=ppt/notesSlides/notesSlide6.xml><?xml version="1.0" encoding="utf-8"?>
+<p:notes xmlns:p="http://schemas.openxmlformats.org/presentationml/2006/main">
+  <p:cSld>
+    <p:spTree>
+      <p:nvGrpSpPr>
+        <p:cNvPr id="1" name=""/>
+        <p:cNvGrpSpPr/>
+        <p:nvPr/>
+      </p:nvGrpSpPr>
+      <p:grpSpPr>
+        <a:xfrm xmlns:a="http://schemas.openxmlformats.org/drawingml/2006/main"/>
+      </p:grpSpPr>
+      <p:sp>
+        <p:nvSpPr>
+          <p:cNvPr id="2" name="Slide Image Placeholder 1"/>
+          <p:cNvSpPr>
+            <a:spLocks xmlns:a="http://schemas.openxmlformats.org/drawingml/2006/main" noGrp="1"/>
+          </p:cNvSpPr>
+          <p:nvPr>
+            <p:ph type="sldImg" idx="0"/>
+          </p:nvPr>
+        </p:nvSpPr>
+        <p:spPr/>
+      </p:sp>
+      <p:sp>
+        <p:nvSpPr>
+          <p:cNvPr id="3" name="Notes Placeholder 2"/>
+          <p:cNvSpPr>
+            <a:spLocks xmlns:a="http://schemas.openxmlformats.org/drawingml/2006/main" noGrp="1"/>
+          </p:cNvSpPr>
+          <p:nvPr>
+            <p:ph type="body" idx="1"/>
+          </p:nvPr>
+        </p:nvSpPr>
+        <p:spPr/>
+        <p:txBody>
+          <a:bodyPr xmlns:a="http://schemas.openxmlformats.org/drawingml/2006/main"/>
+          <a:lstStyle xmlns:a="http://schemas.openxmlformats.org/drawingml/2006/main"/>
+          <a:p xmlns:a="http://schemas.openxmlformats.org/drawingml/2006/main">
+            <a:r>
+              <a:t>[Sources] Adobe Firefly approach: https://www.adobe.com/ai/overview/firefly/gen-ai-approach.html</a:t>
+            </a:r>
+          </a:p>
+          <a:p xmlns:a="http://schemas.openxmlformats.org/drawingml/2006/main">
+            <a:r>
+              <a:t>[Sources] Adobe Firefly Partner Models: https://www.adobe.com/products/firefly/partner-models.html</a:t>
+            </a:r>
+          </a:p>
+          <a:p xmlns:a="http://schemas.openxmlformats.org/drawingml/2006/main">
+            <a:r>
+              <a:t>[Sources] ElevenLabs enterprise security: https://elevenlabs.io/enterprise</a:t>
+            </a:r>
+          </a:p>
+        </p:txBody>
+      </p:sp>
+      <p:sp>
+        <p:nvSpPr>
+          <p:cNvPr id="4" name="Slide Number Placeholder 3"/>
+          <p:cNvSpPr>
+            <a:spLocks xmlns:a="http://schemas.openxmlformats.org/drawingml/2006/main" noGrp="1"/>
+          </p:cNvSpPr>
+          <p:nvPr>
+            <p:ph type="sldNum" idx="5"/>
+          </p:nvPr>
+        </p:nvSpPr>
+        <p:spPr/>
+        <p:txBody>
+          <a:bodyPr xmlns:a="http://schemas.openxmlformats.org/drawingml/2006/main"/>
+          <a:lstStyle xmlns:a="http://schemas.openxmlformats.org/drawingml/2006/main"/>
+          <a:p xmlns:a="http://schemas.openxmlformats.org/drawingml/2006/main"/>
+        </p:txBody>
+      </p:sp>
+    </p:spTree>
+  </p:cSld>
+  <p:clrMapOvr>
+    <a:masterClrMapping xmlns:a="http://schemas.openxmlformats.org/drawingml/2006/main"/>
+  </p:clrMapOvr>
+</p:notes>
+</file>
+
+<file path=ppt/notesSlides/notesSlide7.xml><?xml version="1.0" encoding="utf-8"?>
 <p:notes xmlns:p="http://schemas.openxmlformats.org/presentationml/2006/main">
   <p:cSld>
     <p:spTree>
@@ -844,7 +996,7 @@
   </p:cSld>
   <p:clrMap bg1="lt1" tx1="dk1" bg2="lt2" tx2="dk2" accent1="accent1" accent2="accent2" accent3="accent3" accent4="accent4" accent5="accent5" accent6="accent6" hlink="hlink" folHlink="folHlink"/>
   <p:sldLayoutIdLst>
-    <p:sldLayoutId xmlns:r="http://schemas.openxmlformats.org/officeDocument/2006/relationships" id="2147483649" r:id="R6ec951f6e10146c7"/>
+    <p:sldLayoutId xmlns:r="http://schemas.openxmlformats.org/officeDocument/2006/relationships" id="2147483649" r:id="R920df9f1b57c4bc5"/>
   </p:sldLayoutIdLst>
   <p:txStyles>
     <p:titleStyle>
@@ -1395,7 +1547,7 @@
           <p:cNvPr id="12" name="">
             <a:extLst xmlns:a="http://schemas.openxmlformats.org/drawingml/2006/main">
               <a:ext uri="{FF2B5EF4-FFF2-40B4-BE49-F238E27FC236}">
-                <a16:creationId xmlns:a16="http://schemas.microsoft.com/office/drawing/2014/main" id="{23445CCC-1FF5-4FAB-94A3-5F2C6BD5A25B}"/>
+                <a16:creationId xmlns:a16="http://schemas.microsoft.com/office/drawing/2014/main" id="{41768E4F-4306-4ABD-8E4B-707658058F32}"/>
               </a:ext>
             </a:extLst>
           </p:cNvPr>
@@ -1426,7 +1578,7 @@
           <p:cNvPr id="2" name="">
             <a:extLst xmlns:a="http://schemas.openxmlformats.org/drawingml/2006/main">
               <a:ext uri="{FF2B5EF4-FFF2-40B4-BE49-F238E27FC236}">
-                <a16:creationId xmlns:a16="http://schemas.microsoft.com/office/drawing/2014/main" id="{8A58816F-39D8-4F75-A403-65BAF698C7AD}"/>
+                <a16:creationId xmlns:a16="http://schemas.microsoft.com/office/drawing/2014/main" id="{310D1B2B-FB1A-4E68-BAF8-8FE2638FF2F2}"/>
               </a:ext>
             </a:extLst>
           </p:cNvPr>
@@ -1457,7 +1609,7 @@
           <p:cNvPr id="3" name="">
             <a:extLst xmlns:a="http://schemas.openxmlformats.org/drawingml/2006/main">
               <a:ext uri="{FF2B5EF4-FFF2-40B4-BE49-F238E27FC236}">
-                <a16:creationId xmlns:a16="http://schemas.microsoft.com/office/drawing/2014/main" id="{C22CF20C-7DCF-4934-A309-6CC6123DB1D4}"/>
+                <a16:creationId xmlns:a16="http://schemas.microsoft.com/office/drawing/2014/main" id="{D7E5A9DC-5C64-408D-A43F-B7B09C952016}"/>
               </a:ext>
             </a:extLst>
           </p:cNvPr>
@@ -1488,7 +1640,7 @@
           <p:cNvPr id="4" name="">
             <a:extLst xmlns:a="http://schemas.openxmlformats.org/drawingml/2006/main">
               <a:ext uri="{FF2B5EF4-FFF2-40B4-BE49-F238E27FC236}">
-                <a16:creationId xmlns:a16="http://schemas.microsoft.com/office/drawing/2014/main" id="{D6E837AF-7204-45AF-A62A-CDE21ABA6FF5}"/>
+                <a16:creationId xmlns:a16="http://schemas.microsoft.com/office/drawing/2014/main" id="{B62E9FFA-CF1D-4385-BAC5-CCE6CB964F82}"/>
               </a:ext>
             </a:extLst>
           </p:cNvPr>
@@ -1519,7 +1671,7 @@
           <p:cNvPr id="5" name="">
             <a:extLst xmlns:a="http://schemas.openxmlformats.org/drawingml/2006/main">
               <a:ext uri="{FF2B5EF4-FFF2-40B4-BE49-F238E27FC236}">
-                <a16:creationId xmlns:a16="http://schemas.microsoft.com/office/drawing/2014/main" id="{C7CE09C6-4E2A-45EF-BC6E-CDE417DC514A}"/>
+                <a16:creationId xmlns:a16="http://schemas.microsoft.com/office/drawing/2014/main" id="{D14B9E4A-4E62-490A-851A-380F01D2F58F}"/>
               </a:ext>
             </a:extLst>
           </p:cNvPr>
@@ -1569,7 +1721,7 @@
           <p:cNvPr id="6" name="">
             <a:extLst xmlns:a="http://schemas.openxmlformats.org/drawingml/2006/main">
               <a:ext uri="{FF2B5EF4-FFF2-40B4-BE49-F238E27FC236}">
-                <a16:creationId xmlns:a16="http://schemas.microsoft.com/office/drawing/2014/main" id="{97A4140B-0653-4DB4-A1AE-C99870271E6E}"/>
+                <a16:creationId xmlns:a16="http://schemas.microsoft.com/office/drawing/2014/main" id="{C972C137-8034-4BF2-93F0-11C56B54DB9E}"/>
               </a:ext>
             </a:extLst>
           </p:cNvPr>
@@ -1619,7 +1771,7 @@
           <p:cNvPr id="7" name="">
             <a:extLst xmlns:a="http://schemas.openxmlformats.org/drawingml/2006/main">
               <a:ext uri="{FF2B5EF4-FFF2-40B4-BE49-F238E27FC236}">
-                <a16:creationId xmlns:a16="http://schemas.microsoft.com/office/drawing/2014/main" id="{0C23C713-99FF-466A-903E-C5A8A8C166E7}"/>
+                <a16:creationId xmlns:a16="http://schemas.microsoft.com/office/drawing/2014/main" id="{0FBFBC19-B713-4260-8774-1F7A54AEE9B6}"/>
               </a:ext>
             </a:extLst>
           </p:cNvPr>
@@ -1669,7 +1821,7 @@
           <p:cNvPr id="8" name="">
             <a:extLst xmlns:a="http://schemas.openxmlformats.org/drawingml/2006/main">
               <a:ext uri="{FF2B5EF4-FFF2-40B4-BE49-F238E27FC236}">
-                <a16:creationId xmlns:a16="http://schemas.microsoft.com/office/drawing/2014/main" id="{2807FFE1-68D6-4CD4-99A5-6BFFDEC848F5}"/>
+                <a16:creationId xmlns:a16="http://schemas.microsoft.com/office/drawing/2014/main" id="{20E280EB-6508-46B5-9444-C7152BD53476}"/>
               </a:ext>
             </a:extLst>
           </p:cNvPr>
@@ -1719,7 +1871,7 @@
           <p:cNvPr id="9" name="">
             <a:extLst xmlns:a="http://schemas.openxmlformats.org/drawingml/2006/main">
               <a:ext uri="{FF2B5EF4-FFF2-40B4-BE49-F238E27FC236}">
-                <a16:creationId xmlns:a16="http://schemas.microsoft.com/office/drawing/2014/main" id="{687714EF-84EF-46CA-B61C-0B9DFF426C29}"/>
+                <a16:creationId xmlns:a16="http://schemas.microsoft.com/office/drawing/2014/main" id="{D99140CD-DD49-4BED-9BA4-A38B50533B93}"/>
               </a:ext>
             </a:extLst>
           </p:cNvPr>
@@ -1769,7 +1921,7 @@
           <p:cNvPr id="10" name="">
             <a:extLst xmlns:a="http://schemas.openxmlformats.org/drawingml/2006/main">
               <a:ext uri="{FF2B5EF4-FFF2-40B4-BE49-F238E27FC236}">
-                <a16:creationId xmlns:a16="http://schemas.microsoft.com/office/drawing/2014/main" id="{87164055-B855-4459-8171-F0ABFC6EE688}"/>
+                <a16:creationId xmlns:a16="http://schemas.microsoft.com/office/drawing/2014/main" id="{F17EE1CB-4F33-4AB6-9897-931413375920}"/>
               </a:ext>
             </a:extLst>
           </p:cNvPr>
@@ -1819,7 +1971,7 @@
           <p:cNvPr id="11" name="">
             <a:extLst xmlns:a="http://schemas.openxmlformats.org/drawingml/2006/main">
               <a:ext uri="{FF2B5EF4-FFF2-40B4-BE49-F238E27FC236}">
-                <a16:creationId xmlns:a16="http://schemas.microsoft.com/office/drawing/2014/main" id="{01F1431B-D04A-4A69-BC74-BF6B2A19F1D1}"/>
+                <a16:creationId xmlns:a16="http://schemas.microsoft.com/office/drawing/2014/main" id="{85D5268B-D185-4C8D-8304-4C023F5C87C3}"/>
               </a:ext>
             </a:extLst>
           </p:cNvPr>
@@ -1867,7 +2019,7 @@
     </p:spTree>
     <p:extLst>
       <p:ext uri="{BB962C8B-B14F-4D97-AF65-F5344CB8AC3E}">
-        <p14:creationId xmlns:p14="http://schemas.microsoft.com/office/powerpoint/2010/main" val="725649556"/>
+        <p14:creationId xmlns:p14="http://schemas.microsoft.com/office/powerpoint/2010/main" val="2109663603"/>
       </p:ext>
     </p:extLst>
   </p:cSld>
@@ -1895,10 +2047,10 @@
       </p:grpSpPr>
       <p:sp>
         <p:nvSpPr>
-          <p:cNvPr id="21" name="">
-            <a:extLst xmlns:a="http://schemas.openxmlformats.org/drawingml/2006/main">
-              <a:ext uri="{FF2B5EF4-FFF2-40B4-BE49-F238E27FC236}">
-                <a16:creationId xmlns:a16="http://schemas.microsoft.com/office/drawing/2014/main" id="{23205A69-D472-4275-88C7-BFB0CDF1023D}"/>
+          <p:cNvPr id="32" name="">
+            <a:extLst xmlns:a="http://schemas.openxmlformats.org/drawingml/2006/main">
+              <a:ext uri="{FF2B5EF4-FFF2-40B4-BE49-F238E27FC236}">
+                <a16:creationId xmlns:a16="http://schemas.microsoft.com/office/drawing/2014/main" id="{8689A616-A0B2-4D8E-9E92-A1BBC18239EA}"/>
               </a:ext>
             </a:extLst>
           </p:cNvPr>
@@ -1938,7 +2090,7 @@
                   <a:srgbClr val="172026"/>
                 </a:solidFill>
               </a:rPr>
-              <a:t>Proposta</a:t>
+              <a:t>Núcleo recomendado</a:t>
             </a:r>
           </a:p>
         </p:txBody>
@@ -1948,7 +2100,7 @@
           <p:cNvPr id="2" name="">
             <a:extLst xmlns:a="http://schemas.openxmlformats.org/drawingml/2006/main">
               <a:ext uri="{FF2B5EF4-FFF2-40B4-BE49-F238E27FC236}">
-                <a16:creationId xmlns:a16="http://schemas.microsoft.com/office/drawing/2014/main" id="{F443B85C-5EFE-49F5-92C3-114E7306FCC8}"/>
+                <a16:creationId xmlns:a16="http://schemas.microsoft.com/office/drawing/2014/main" id="{6897877E-167A-47E5-A8CE-27A5E16F01DA}"/>
               </a:ext>
             </a:extLst>
           </p:cNvPr>
@@ -1988,7 +2140,7 @@
                   <a:srgbClr val="52606B"/>
                 </a:solidFill>
               </a:rPr>
-              <a:t>Uma arquitetura simples, com papéis claros e baixa tolerância a duplicidade.</a:t>
+              <a:t>Três plataformas resolvem a maior parte do trabalho sem duplicar licenças.</a:t>
             </a:r>
           </a:p>
         </p:txBody>
@@ -1998,7 +2150,7 @@
           <p:cNvPr id="3" name="">
             <a:extLst xmlns:a="http://schemas.openxmlformats.org/drawingml/2006/main">
               <a:ext uri="{FF2B5EF4-FFF2-40B4-BE49-F238E27FC236}">
-                <a16:creationId xmlns:a16="http://schemas.microsoft.com/office/drawing/2014/main" id="{8649574F-9FA6-4828-8501-5AB84AB92D38}"/>
+                <a16:creationId xmlns:a16="http://schemas.microsoft.com/office/drawing/2014/main" id="{2E026514-8B48-49CD-91D6-3A0CE6FFFE5E}"/>
               </a:ext>
             </a:extLst>
           </p:cNvPr>
@@ -2010,12 +2162,10 @@
         <p:spPr>
           <a:xfrm xmlns:a="http://schemas.openxmlformats.org/drawingml/2006/main">
             <a:off x="685800" y="1952625"/>
-            <a:ext cx="4953000" cy="1381125"/>
-          </a:xfrm>
-          <a:prstGeom xmlns:a="http://schemas.openxmlformats.org/drawingml/2006/main" prst="roundRect">
-            <a:avLst>
-              <a:gd name="adj" fmla="val 1379"/>
-            </a:avLst>
+            <a:ext cx="3257550" cy="3524250"/>
+          </a:xfrm>
+          <a:prstGeom xmlns:a="http://schemas.openxmlformats.org/drawingml/2006/main" prst="rect">
+            <a:avLst/>
           </a:prstGeom>
           <a:solidFill xmlns:a="http://schemas.openxmlformats.org/drawingml/2006/main">
             <a:srgbClr val="FFFFFF"/>
@@ -2033,7 +2183,7 @@
           <p:cNvPr id="4" name="">
             <a:extLst xmlns:a="http://schemas.openxmlformats.org/drawingml/2006/main">
               <a:ext uri="{FF2B5EF4-FFF2-40B4-BE49-F238E27FC236}">
-                <a16:creationId xmlns:a16="http://schemas.microsoft.com/office/drawing/2014/main" id="{730D17E2-C7CF-457B-B8D8-A7472AFD9A2F}"/>
+                <a16:creationId xmlns:a16="http://schemas.microsoft.com/office/drawing/2014/main" id="{8532A427-1DE4-4F40-B559-27E09914EB98}"/>
               </a:ext>
             </a:extLst>
           </p:cNvPr>
@@ -2045,7 +2195,7 @@
         <p:spPr>
           <a:xfrm xmlns:a="http://schemas.openxmlformats.org/drawingml/2006/main">
             <a:off x="685800" y="1952625"/>
-            <a:ext cx="66675" cy="1381125"/>
+            <a:ext cx="3257550" cy="95250"/>
           </a:xfrm>
           <a:prstGeom xmlns:a="http://schemas.openxmlformats.org/drawingml/2006/main" prst="rect">
             <a:avLst/>
@@ -2064,47 +2214,47 @@
           <p:cNvPr id="5" name="">
             <a:extLst xmlns:a="http://schemas.openxmlformats.org/drawingml/2006/main">
               <a:ext uri="{FF2B5EF4-FFF2-40B4-BE49-F238E27FC236}">
-                <a16:creationId xmlns:a16="http://schemas.microsoft.com/office/drawing/2014/main" id="{47F99C87-6686-4EC3-A662-66271AD747D7}"/>
-              </a:ext>
-            </a:extLst>
-          </p:cNvPr>
-          <p:cNvSpPr>
-            <a:spLocks xmlns:a="http://schemas.openxmlformats.org/drawingml/2006/main" noGrp="1"/>
-          </p:cNvSpPr>
-          <p:nvPr/>
-        </p:nvSpPr>
-        <p:spPr>
-          <a:xfrm xmlns:a="http://schemas.openxmlformats.org/drawingml/2006/main">
-            <a:off x="914400" y="2162175"/>
-            <a:ext cx="4514850" cy="266700"/>
-          </a:xfrm>
-          <a:prstGeom xmlns:a="http://schemas.openxmlformats.org/drawingml/2006/main" prst="rect">
-            <a:avLst/>
-          </a:prstGeom>
-          <a:noFill xmlns:a="http://schemas.openxmlformats.org/drawingml/2006/main"/>
-          <a:ln xmlns:a="http://schemas.openxmlformats.org/drawingml/2006/main" w="0">
-            <a:noFill/>
-            <a:prstDash val="solid"/>
-          </a:ln>
-        </p:spPr>
-        <p:txBody>
-          <a:bodyPr xmlns:a="http://schemas.openxmlformats.org/drawingml/2006/main"/>
-          <a:lstStyle xmlns:a="http://schemas.openxmlformats.org/drawingml/2006/main"/>
-          <a:p xmlns:a="http://schemas.openxmlformats.org/drawingml/2006/main">
-            <a:pPr algn="l">
-              <a:defRPr sz="1650" b="1">
+                <a16:creationId xmlns:a16="http://schemas.microsoft.com/office/drawing/2014/main" id="{D8934CFD-2270-4BBC-8EDF-3060552AB634}"/>
+              </a:ext>
+            </a:extLst>
+          </p:cNvPr>
+          <p:cNvSpPr>
+            <a:spLocks xmlns:a="http://schemas.openxmlformats.org/drawingml/2006/main" noGrp="1"/>
+          </p:cNvSpPr>
+          <p:nvPr/>
+        </p:nvSpPr>
+        <p:spPr>
+          <a:xfrm xmlns:a="http://schemas.openxmlformats.org/drawingml/2006/main">
+            <a:off x="933450" y="2266950"/>
+            <a:ext cx="2762250" cy="323850"/>
+          </a:xfrm>
+          <a:prstGeom xmlns:a="http://schemas.openxmlformats.org/drawingml/2006/main" prst="rect">
+            <a:avLst/>
+          </a:prstGeom>
+          <a:noFill xmlns:a="http://schemas.openxmlformats.org/drawingml/2006/main"/>
+          <a:ln xmlns:a="http://schemas.openxmlformats.org/drawingml/2006/main" w="0">
+            <a:noFill/>
+            <a:prstDash val="solid"/>
+          </a:ln>
+        </p:spPr>
+        <p:txBody>
+          <a:bodyPr xmlns:a="http://schemas.openxmlformats.org/drawingml/2006/main"/>
+          <a:lstStyle xmlns:a="http://schemas.openxmlformats.org/drawingml/2006/main"/>
+          <a:p xmlns:a="http://schemas.openxmlformats.org/drawingml/2006/main">
+            <a:pPr algn="l">
+              <a:defRPr sz="1800" b="1">
                 <a:solidFill>
                   <a:srgbClr val="172026"/>
                 </a:solidFill>
               </a:defRPr>
             </a:pPr>
             <a:r>
-              <a:rPr sz="1650" b="1">
+              <a:rPr sz="1800" b="1">
                 <a:solidFill>
                   <a:srgbClr val="172026"/>
                 </a:solidFill>
               </a:rPr>
-              <a:t>Microsoft 365 Copilot</a:t>
+              <a:t>Microsoft</a:t>
             </a:r>
           </a:p>
         </p:txBody>
@@ -2114,47 +2264,47 @@
           <p:cNvPr id="6" name="">
             <a:extLst xmlns:a="http://schemas.openxmlformats.org/drawingml/2006/main">
               <a:ext uri="{FF2B5EF4-FFF2-40B4-BE49-F238E27FC236}">
-                <a16:creationId xmlns:a16="http://schemas.microsoft.com/office/drawing/2014/main" id="{B88F1EEB-CE11-47C3-A4E8-5921EF4C9091}"/>
-              </a:ext>
-            </a:extLst>
-          </p:cNvPr>
-          <p:cNvSpPr>
-            <a:spLocks xmlns:a="http://schemas.openxmlformats.org/drawingml/2006/main" noGrp="1"/>
-          </p:cNvSpPr>
-          <p:nvPr/>
-        </p:nvSpPr>
-        <p:spPr>
-          <a:xfrm xmlns:a="http://schemas.openxmlformats.org/drawingml/2006/main">
-            <a:off x="914400" y="2562225"/>
-            <a:ext cx="4514850" cy="600075"/>
-          </a:xfrm>
-          <a:prstGeom xmlns:a="http://schemas.openxmlformats.org/drawingml/2006/main" prst="rect">
-            <a:avLst/>
-          </a:prstGeom>
-          <a:noFill xmlns:a="http://schemas.openxmlformats.org/drawingml/2006/main"/>
-          <a:ln xmlns:a="http://schemas.openxmlformats.org/drawingml/2006/main" w="0">
-            <a:noFill/>
-            <a:prstDash val="solid"/>
-          </a:ln>
-        </p:spPr>
-        <p:txBody>
-          <a:bodyPr xmlns:a="http://schemas.openxmlformats.org/drawingml/2006/main"/>
-          <a:lstStyle xmlns:a="http://schemas.openxmlformats.org/drawingml/2006/main"/>
-          <a:p xmlns:a="http://schemas.openxmlformats.org/drawingml/2006/main">
-            <a:pPr algn="l">
-              <a:defRPr sz="1275" b="0">
-                <a:solidFill>
-                  <a:srgbClr val="52606B"/>
-                </a:solidFill>
-              </a:defRPr>
-            </a:pPr>
-            <a:r>
-              <a:rPr sz="1275" b="0">
-                <a:solidFill>
-                  <a:srgbClr val="52606B"/>
-                </a:solidFill>
-              </a:rPr>
-              <a:t>Camada corporativa: reuniões, e-mails, documentos, SharePoint, busca interna e automações.</a:t>
+                <a16:creationId xmlns:a16="http://schemas.microsoft.com/office/drawing/2014/main" id="{43DBFA82-5787-4AA3-B57E-702D084C44FC}"/>
+              </a:ext>
+            </a:extLst>
+          </p:cNvPr>
+          <p:cNvSpPr>
+            <a:spLocks xmlns:a="http://schemas.openxmlformats.org/drawingml/2006/main" noGrp="1"/>
+          </p:cNvSpPr>
+          <p:nvPr/>
+        </p:nvSpPr>
+        <p:spPr>
+          <a:xfrm xmlns:a="http://schemas.openxmlformats.org/drawingml/2006/main">
+            <a:off x="933450" y="2857500"/>
+            <a:ext cx="762000" cy="209550"/>
+          </a:xfrm>
+          <a:prstGeom xmlns:a="http://schemas.openxmlformats.org/drawingml/2006/main" prst="rect">
+            <a:avLst/>
+          </a:prstGeom>
+          <a:noFill xmlns:a="http://schemas.openxmlformats.org/drawingml/2006/main"/>
+          <a:ln xmlns:a="http://schemas.openxmlformats.org/drawingml/2006/main" w="0">
+            <a:noFill/>
+            <a:prstDash val="solid"/>
+          </a:ln>
+        </p:spPr>
+        <p:txBody>
+          <a:bodyPr xmlns:a="http://schemas.openxmlformats.org/drawingml/2006/main"/>
+          <a:lstStyle xmlns:a="http://schemas.openxmlformats.org/drawingml/2006/main"/>
+          <a:p xmlns:a="http://schemas.openxmlformats.org/drawingml/2006/main">
+            <a:pPr algn="l">
+              <a:defRPr sz="1125" b="1">
+                <a:solidFill>
+                  <a:srgbClr val="073F63"/>
+                </a:solidFill>
+              </a:defRPr>
+            </a:pPr>
+            <a:r>
+              <a:rPr sz="1125" b="1">
+                <a:solidFill>
+                  <a:srgbClr val="073F63"/>
+                </a:solidFill>
+              </a:rPr>
+              <a:t>Faz</a:t>
             </a:r>
           </a:p>
         </p:txBody>
@@ -2164,24 +2314,272 @@
           <p:cNvPr id="7" name="">
             <a:extLst xmlns:a="http://schemas.openxmlformats.org/drawingml/2006/main">
               <a:ext uri="{FF2B5EF4-FFF2-40B4-BE49-F238E27FC236}">
-                <a16:creationId xmlns:a16="http://schemas.microsoft.com/office/drawing/2014/main" id="{77491035-D634-489F-BE2C-4AA732322734}"/>
-              </a:ext>
-            </a:extLst>
-          </p:cNvPr>
-          <p:cNvSpPr>
-            <a:spLocks xmlns:a="http://schemas.openxmlformats.org/drawingml/2006/main" noGrp="1"/>
-          </p:cNvSpPr>
-          <p:nvPr/>
-        </p:nvSpPr>
-        <p:spPr>
-          <a:xfrm xmlns:a="http://schemas.openxmlformats.org/drawingml/2006/main">
-            <a:off x="6553200" y="1952625"/>
-            <a:ext cx="4953000" cy="1381125"/>
-          </a:xfrm>
-          <a:prstGeom xmlns:a="http://schemas.openxmlformats.org/drawingml/2006/main" prst="roundRect">
-            <a:avLst>
-              <a:gd name="adj" fmla="val 1379"/>
-            </a:avLst>
+                <a16:creationId xmlns:a16="http://schemas.microsoft.com/office/drawing/2014/main" id="{12681AEC-4FAC-40FF-91F7-D7945F476DA4}"/>
+              </a:ext>
+            </a:extLst>
+          </p:cNvPr>
+          <p:cNvSpPr>
+            <a:spLocks xmlns:a="http://schemas.openxmlformats.org/drawingml/2006/main" noGrp="1"/>
+          </p:cNvSpPr>
+          <p:nvPr/>
+        </p:nvSpPr>
+        <p:spPr>
+          <a:xfrm xmlns:a="http://schemas.openxmlformats.org/drawingml/2006/main">
+            <a:off x="1714500" y="2819400"/>
+            <a:ext cx="1905000" cy="457200"/>
+          </a:xfrm>
+          <a:prstGeom xmlns:a="http://schemas.openxmlformats.org/drawingml/2006/main" prst="rect">
+            <a:avLst/>
+          </a:prstGeom>
+          <a:noFill xmlns:a="http://schemas.openxmlformats.org/drawingml/2006/main"/>
+          <a:ln xmlns:a="http://schemas.openxmlformats.org/drawingml/2006/main" w="0">
+            <a:noFill/>
+            <a:prstDash val="solid"/>
+          </a:ln>
+        </p:spPr>
+        <p:txBody>
+          <a:bodyPr xmlns:a="http://schemas.openxmlformats.org/drawingml/2006/main"/>
+          <a:lstStyle xmlns:a="http://schemas.openxmlformats.org/drawingml/2006/main"/>
+          <a:p xmlns:a="http://schemas.openxmlformats.org/drawingml/2006/main">
+            <a:pPr algn="l">
+              <a:defRPr sz="1200" b="0">
+                <a:solidFill>
+                  <a:srgbClr val="52606B"/>
+                </a:solidFill>
+              </a:defRPr>
+            </a:pPr>
+            <a:r>
+              <a:rPr sz="1200" b="0">
+                <a:solidFill>
+                  <a:srgbClr val="52606B"/>
+                </a:solidFill>
+              </a:rPr>
+              <a:t>produz e organiza trabalho no 365</a:t>
+            </a:r>
+          </a:p>
+        </p:txBody>
+      </p:sp>
+      <p:sp>
+        <p:nvSpPr>
+          <p:cNvPr id="8" name="">
+            <a:extLst xmlns:a="http://schemas.openxmlformats.org/drawingml/2006/main">
+              <a:ext uri="{FF2B5EF4-FFF2-40B4-BE49-F238E27FC236}">
+                <a16:creationId xmlns:a16="http://schemas.microsoft.com/office/drawing/2014/main" id="{A9309090-3721-48EC-9B55-71A4DF192D97}"/>
+              </a:ext>
+            </a:extLst>
+          </p:cNvPr>
+          <p:cNvSpPr>
+            <a:spLocks xmlns:a="http://schemas.openxmlformats.org/drawingml/2006/main" noGrp="1"/>
+          </p:cNvSpPr>
+          <p:nvPr/>
+        </p:nvSpPr>
+        <p:spPr>
+          <a:xfrm xmlns:a="http://schemas.openxmlformats.org/drawingml/2006/main">
+            <a:off x="933450" y="3524250"/>
+            <a:ext cx="762000" cy="209550"/>
+          </a:xfrm>
+          <a:prstGeom xmlns:a="http://schemas.openxmlformats.org/drawingml/2006/main" prst="rect">
+            <a:avLst/>
+          </a:prstGeom>
+          <a:noFill xmlns:a="http://schemas.openxmlformats.org/drawingml/2006/main"/>
+          <a:ln xmlns:a="http://schemas.openxmlformats.org/drawingml/2006/main" w="0">
+            <a:noFill/>
+            <a:prstDash val="solid"/>
+          </a:ln>
+        </p:spPr>
+        <p:txBody>
+          <a:bodyPr xmlns:a="http://schemas.openxmlformats.org/drawingml/2006/main"/>
+          <a:lstStyle xmlns:a="http://schemas.openxmlformats.org/drawingml/2006/main"/>
+          <a:p xmlns:a="http://schemas.openxmlformats.org/drawingml/2006/main">
+            <a:pPr algn="l">
+              <a:defRPr sz="1125" b="1">
+                <a:solidFill>
+                  <a:srgbClr val="073F63"/>
+                </a:solidFill>
+              </a:defRPr>
+            </a:pPr>
+            <a:r>
+              <a:rPr sz="1125" b="1">
+                <a:solidFill>
+                  <a:srgbClr val="073F63"/>
+                </a:solidFill>
+              </a:rPr>
+              <a:t>Resolve</a:t>
+            </a:r>
+          </a:p>
+        </p:txBody>
+      </p:sp>
+      <p:sp>
+        <p:nvSpPr>
+          <p:cNvPr id="9" name="">
+            <a:extLst xmlns:a="http://schemas.openxmlformats.org/drawingml/2006/main">
+              <a:ext uri="{FF2B5EF4-FFF2-40B4-BE49-F238E27FC236}">
+                <a16:creationId xmlns:a16="http://schemas.microsoft.com/office/drawing/2014/main" id="{3C445EBA-1F35-4C25-9228-E9FEB7232471}"/>
+              </a:ext>
+            </a:extLst>
+          </p:cNvPr>
+          <p:cNvSpPr>
+            <a:spLocks xmlns:a="http://schemas.openxmlformats.org/drawingml/2006/main" noGrp="1"/>
+          </p:cNvSpPr>
+          <p:nvPr/>
+        </p:nvSpPr>
+        <p:spPr>
+          <a:xfrm xmlns:a="http://schemas.openxmlformats.org/drawingml/2006/main">
+            <a:off x="1714500" y="3486150"/>
+            <a:ext cx="1905000" cy="476250"/>
+          </a:xfrm>
+          <a:prstGeom xmlns:a="http://schemas.openxmlformats.org/drawingml/2006/main" prst="rect">
+            <a:avLst/>
+          </a:prstGeom>
+          <a:noFill xmlns:a="http://schemas.openxmlformats.org/drawingml/2006/main"/>
+          <a:ln xmlns:a="http://schemas.openxmlformats.org/drawingml/2006/main" w="0">
+            <a:noFill/>
+            <a:prstDash val="solid"/>
+          </a:ln>
+        </p:spPr>
+        <p:txBody>
+          <a:bodyPr xmlns:a="http://schemas.openxmlformats.org/drawingml/2006/main"/>
+          <a:lstStyle xmlns:a="http://schemas.openxmlformats.org/drawingml/2006/main"/>
+          <a:p xmlns:a="http://schemas.openxmlformats.org/drawingml/2006/main">
+            <a:pPr algn="l">
+              <a:defRPr sz="1200" b="0">
+                <a:solidFill>
+                  <a:srgbClr val="52606B"/>
+                </a:solidFill>
+              </a:defRPr>
+            </a:pPr>
+            <a:r>
+              <a:rPr sz="1200" b="0">
+                <a:solidFill>
+                  <a:srgbClr val="52606B"/>
+                </a:solidFill>
+              </a:rPr>
+              <a:t>reuniões, e-mails, documentos, busca interna e aprovações</a:t>
+            </a:r>
+          </a:p>
+        </p:txBody>
+      </p:sp>
+      <p:sp>
+        <p:nvSpPr>
+          <p:cNvPr id="10" name="">
+            <a:extLst xmlns:a="http://schemas.openxmlformats.org/drawingml/2006/main">
+              <a:ext uri="{FF2B5EF4-FFF2-40B4-BE49-F238E27FC236}">
+                <a16:creationId xmlns:a16="http://schemas.microsoft.com/office/drawing/2014/main" id="{1AF33989-96CB-4974-9CAD-CA9B282869B1}"/>
+              </a:ext>
+            </a:extLst>
+          </p:cNvPr>
+          <p:cNvSpPr>
+            <a:spLocks xmlns:a="http://schemas.openxmlformats.org/drawingml/2006/main" noGrp="1"/>
+          </p:cNvSpPr>
+          <p:nvPr/>
+        </p:nvSpPr>
+        <p:spPr>
+          <a:xfrm xmlns:a="http://schemas.openxmlformats.org/drawingml/2006/main">
+            <a:off x="933450" y="4229100"/>
+            <a:ext cx="762000" cy="209550"/>
+          </a:xfrm>
+          <a:prstGeom xmlns:a="http://schemas.openxmlformats.org/drawingml/2006/main" prst="rect">
+            <a:avLst/>
+          </a:prstGeom>
+          <a:noFill xmlns:a="http://schemas.openxmlformats.org/drawingml/2006/main"/>
+          <a:ln xmlns:a="http://schemas.openxmlformats.org/drawingml/2006/main" w="0">
+            <a:noFill/>
+            <a:prstDash val="solid"/>
+          </a:ln>
+        </p:spPr>
+        <p:txBody>
+          <a:bodyPr xmlns:a="http://schemas.openxmlformats.org/drawingml/2006/main"/>
+          <a:lstStyle xmlns:a="http://schemas.openxmlformats.org/drawingml/2006/main"/>
+          <a:p xmlns:a="http://schemas.openxmlformats.org/drawingml/2006/main">
+            <a:pPr algn="l">
+              <a:defRPr sz="1125" b="1">
+                <a:solidFill>
+                  <a:srgbClr val="073F63"/>
+                </a:solidFill>
+              </a:defRPr>
+            </a:pPr>
+            <a:r>
+              <a:rPr sz="1125" b="1">
+                <a:solidFill>
+                  <a:srgbClr val="073F63"/>
+                </a:solidFill>
+              </a:rPr>
+              <a:t>Ganho</a:t>
+            </a:r>
+          </a:p>
+        </p:txBody>
+      </p:sp>
+      <p:sp>
+        <p:nvSpPr>
+          <p:cNvPr id="11" name="">
+            <a:extLst xmlns:a="http://schemas.openxmlformats.org/drawingml/2006/main">
+              <a:ext uri="{FF2B5EF4-FFF2-40B4-BE49-F238E27FC236}">
+                <a16:creationId xmlns:a16="http://schemas.microsoft.com/office/drawing/2014/main" id="{7716EF63-758C-45A6-93BC-F7505A0F7ABC}"/>
+              </a:ext>
+            </a:extLst>
+          </p:cNvPr>
+          <p:cNvSpPr>
+            <a:spLocks xmlns:a="http://schemas.openxmlformats.org/drawingml/2006/main" noGrp="1"/>
+          </p:cNvSpPr>
+          <p:nvPr/>
+        </p:nvSpPr>
+        <p:spPr>
+          <a:xfrm xmlns:a="http://schemas.openxmlformats.org/drawingml/2006/main">
+            <a:off x="1714500" y="4191000"/>
+            <a:ext cx="1905000" cy="666750"/>
+          </a:xfrm>
+          <a:prstGeom xmlns:a="http://schemas.openxmlformats.org/drawingml/2006/main" prst="rect">
+            <a:avLst/>
+          </a:prstGeom>
+          <a:noFill xmlns:a="http://schemas.openxmlformats.org/drawingml/2006/main"/>
+          <a:ln xmlns:a="http://schemas.openxmlformats.org/drawingml/2006/main" w="0">
+            <a:noFill/>
+            <a:prstDash val="solid"/>
+          </a:ln>
+        </p:spPr>
+        <p:txBody>
+          <a:bodyPr xmlns:a="http://schemas.openxmlformats.org/drawingml/2006/main"/>
+          <a:lstStyle xmlns:a="http://schemas.openxmlformats.org/drawingml/2006/main"/>
+          <a:p xmlns:a="http://schemas.openxmlformats.org/drawingml/2006/main">
+            <a:pPr algn="l">
+              <a:defRPr sz="1200" b="0">
+                <a:solidFill>
+                  <a:srgbClr val="52606B"/>
+                </a:solidFill>
+              </a:defRPr>
+            </a:pPr>
+            <a:r>
+              <a:rPr sz="1200" b="0">
+                <a:solidFill>
+                  <a:srgbClr val="52606B"/>
+                </a:solidFill>
+              </a:rPr>
+              <a:t>governança e produtividade corporativa</a:t>
+            </a:r>
+          </a:p>
+        </p:txBody>
+      </p:sp>
+      <p:sp>
+        <p:nvSpPr>
+          <p:cNvPr id="12" name="">
+            <a:extLst xmlns:a="http://schemas.openxmlformats.org/drawingml/2006/main">
+              <a:ext uri="{FF2B5EF4-FFF2-40B4-BE49-F238E27FC236}">
+                <a16:creationId xmlns:a16="http://schemas.microsoft.com/office/drawing/2014/main" id="{D9ACAA5B-2885-45A7-97C3-5713AF232379}"/>
+              </a:ext>
+            </a:extLst>
+          </p:cNvPr>
+          <p:cNvSpPr>
+            <a:spLocks xmlns:a="http://schemas.openxmlformats.org/drawingml/2006/main" noGrp="1"/>
+          </p:cNvSpPr>
+          <p:nvPr/>
+        </p:nvSpPr>
+        <p:spPr>
+          <a:xfrm xmlns:a="http://schemas.openxmlformats.org/drawingml/2006/main">
+            <a:off x="4467225" y="1952625"/>
+            <a:ext cx="3257550" cy="3524250"/>
+          </a:xfrm>
+          <a:prstGeom xmlns:a="http://schemas.openxmlformats.org/drawingml/2006/main" prst="rect">
+            <a:avLst/>
           </a:prstGeom>
           <a:solidFill xmlns:a="http://schemas.openxmlformats.org/drawingml/2006/main">
             <a:srgbClr val="FFFFFF"/>
@@ -2196,22 +2594,22 @@
       </p:sp>
       <p:sp>
         <p:nvSpPr>
-          <p:cNvPr id="8" name="">
-            <a:extLst xmlns:a="http://schemas.openxmlformats.org/drawingml/2006/main">
-              <a:ext uri="{FF2B5EF4-FFF2-40B4-BE49-F238E27FC236}">
-                <a16:creationId xmlns:a16="http://schemas.microsoft.com/office/drawing/2014/main" id="{95AA71BC-796D-4746-A754-8069D8A1969C}"/>
-              </a:ext>
-            </a:extLst>
-          </p:cNvPr>
-          <p:cNvSpPr>
-            <a:spLocks xmlns:a="http://schemas.openxmlformats.org/drawingml/2006/main" noGrp="1"/>
-          </p:cNvSpPr>
-          <p:nvPr/>
-        </p:nvSpPr>
-        <p:spPr>
-          <a:xfrm xmlns:a="http://schemas.openxmlformats.org/drawingml/2006/main">
-            <a:off x="6553200" y="1952625"/>
-            <a:ext cx="66675" cy="1381125"/>
+          <p:cNvPr id="13" name="">
+            <a:extLst xmlns:a="http://schemas.openxmlformats.org/drawingml/2006/main">
+              <a:ext uri="{FF2B5EF4-FFF2-40B4-BE49-F238E27FC236}">
+                <a16:creationId xmlns:a16="http://schemas.microsoft.com/office/drawing/2014/main" id="{E4B6F7EC-CB6F-45D8-A0B7-0BC15E3C856F}"/>
+              </a:ext>
+            </a:extLst>
+          </p:cNvPr>
+          <p:cNvSpPr>
+            <a:spLocks xmlns:a="http://schemas.openxmlformats.org/drawingml/2006/main" noGrp="1"/>
+          </p:cNvSpPr>
+          <p:nvPr/>
+        </p:nvSpPr>
+        <p:spPr>
+          <a:xfrm xmlns:a="http://schemas.openxmlformats.org/drawingml/2006/main">
+            <a:off x="4467225" y="1952625"/>
+            <a:ext cx="3257550" cy="95250"/>
           </a:xfrm>
           <a:prstGeom xmlns:a="http://schemas.openxmlformats.org/drawingml/2006/main" prst="rect">
             <a:avLst/>
@@ -2227,127 +2625,375 @@
       </p:sp>
       <p:sp>
         <p:nvSpPr>
-          <p:cNvPr id="9" name="">
-            <a:extLst xmlns:a="http://schemas.openxmlformats.org/drawingml/2006/main">
-              <a:ext uri="{FF2B5EF4-FFF2-40B4-BE49-F238E27FC236}">
-                <a16:creationId xmlns:a16="http://schemas.microsoft.com/office/drawing/2014/main" id="{61B99332-522F-49A4-B394-C2642DBFB24E}"/>
-              </a:ext>
-            </a:extLst>
-          </p:cNvPr>
-          <p:cNvSpPr>
-            <a:spLocks xmlns:a="http://schemas.openxmlformats.org/drawingml/2006/main" noGrp="1"/>
-          </p:cNvSpPr>
-          <p:nvPr/>
-        </p:nvSpPr>
-        <p:spPr>
-          <a:xfrm xmlns:a="http://schemas.openxmlformats.org/drawingml/2006/main">
-            <a:off x="6781800" y="2162175"/>
-            <a:ext cx="4514850" cy="266700"/>
-          </a:xfrm>
-          <a:prstGeom xmlns:a="http://schemas.openxmlformats.org/drawingml/2006/main" prst="rect">
-            <a:avLst/>
-          </a:prstGeom>
-          <a:noFill xmlns:a="http://schemas.openxmlformats.org/drawingml/2006/main"/>
-          <a:ln xmlns:a="http://schemas.openxmlformats.org/drawingml/2006/main" w="0">
-            <a:noFill/>
-            <a:prstDash val="solid"/>
-          </a:ln>
-        </p:spPr>
-        <p:txBody>
-          <a:bodyPr xmlns:a="http://schemas.openxmlformats.org/drawingml/2006/main"/>
-          <a:lstStyle xmlns:a="http://schemas.openxmlformats.org/drawingml/2006/main"/>
-          <a:p xmlns:a="http://schemas.openxmlformats.org/drawingml/2006/main">
-            <a:pPr algn="l">
-              <a:defRPr sz="1650" b="1">
+          <p:cNvPr id="14" name="">
+            <a:extLst xmlns:a="http://schemas.openxmlformats.org/drawingml/2006/main">
+              <a:ext uri="{FF2B5EF4-FFF2-40B4-BE49-F238E27FC236}">
+                <a16:creationId xmlns:a16="http://schemas.microsoft.com/office/drawing/2014/main" id="{F8A5A597-72EF-41DE-BFCB-DDB6A51B66E5}"/>
+              </a:ext>
+            </a:extLst>
+          </p:cNvPr>
+          <p:cNvSpPr>
+            <a:spLocks xmlns:a="http://schemas.openxmlformats.org/drawingml/2006/main" noGrp="1"/>
+          </p:cNvSpPr>
+          <p:nvPr/>
+        </p:nvSpPr>
+        <p:spPr>
+          <a:xfrm xmlns:a="http://schemas.openxmlformats.org/drawingml/2006/main">
+            <a:off x="4714875" y="2266950"/>
+            <a:ext cx="2762250" cy="323850"/>
+          </a:xfrm>
+          <a:prstGeom xmlns:a="http://schemas.openxmlformats.org/drawingml/2006/main" prst="rect">
+            <a:avLst/>
+          </a:prstGeom>
+          <a:noFill xmlns:a="http://schemas.openxmlformats.org/drawingml/2006/main"/>
+          <a:ln xmlns:a="http://schemas.openxmlformats.org/drawingml/2006/main" w="0">
+            <a:noFill/>
+            <a:prstDash val="solid"/>
+          </a:ln>
+        </p:spPr>
+        <p:txBody>
+          <a:bodyPr xmlns:a="http://schemas.openxmlformats.org/drawingml/2006/main"/>
+          <a:lstStyle xmlns:a="http://schemas.openxmlformats.org/drawingml/2006/main"/>
+          <a:p xmlns:a="http://schemas.openxmlformats.org/drawingml/2006/main">
+            <a:pPr algn="l">
+              <a:defRPr sz="1800" b="1">
                 <a:solidFill>
                   <a:srgbClr val="172026"/>
                 </a:solidFill>
               </a:defRPr>
             </a:pPr>
             <a:r>
-              <a:rPr sz="1650" b="1">
+              <a:rPr sz="1800" b="1">
                 <a:solidFill>
                   <a:srgbClr val="172026"/>
                 </a:solidFill>
               </a:rPr>
-              <a:t>Claude Team + Claude Code</a:t>
-            </a:r>
-          </a:p>
-        </p:txBody>
-      </p:sp>
-      <p:sp>
-        <p:nvSpPr>
-          <p:cNvPr id="10" name="">
-            <a:extLst xmlns:a="http://schemas.openxmlformats.org/drawingml/2006/main">
-              <a:ext uri="{FF2B5EF4-FFF2-40B4-BE49-F238E27FC236}">
-                <a16:creationId xmlns:a16="http://schemas.microsoft.com/office/drawing/2014/main" id="{5185132F-B60D-4DB5-B95C-92B96227FF5F}"/>
-              </a:ext>
-            </a:extLst>
-          </p:cNvPr>
-          <p:cNvSpPr>
-            <a:spLocks xmlns:a="http://schemas.openxmlformats.org/drawingml/2006/main" noGrp="1"/>
-          </p:cNvSpPr>
-          <p:nvPr/>
-        </p:nvSpPr>
-        <p:spPr>
-          <a:xfrm xmlns:a="http://schemas.openxmlformats.org/drawingml/2006/main">
-            <a:off x="6781800" y="2562225"/>
-            <a:ext cx="4514850" cy="600075"/>
-          </a:xfrm>
-          <a:prstGeom xmlns:a="http://schemas.openxmlformats.org/drawingml/2006/main" prst="rect">
-            <a:avLst/>
-          </a:prstGeom>
-          <a:noFill xmlns:a="http://schemas.openxmlformats.org/drawingml/2006/main"/>
-          <a:ln xmlns:a="http://schemas.openxmlformats.org/drawingml/2006/main" w="0">
-            <a:noFill/>
-            <a:prstDash val="solid"/>
-          </a:ln>
-        </p:spPr>
-        <p:txBody>
-          <a:bodyPr xmlns:a="http://schemas.openxmlformats.org/drawingml/2006/main"/>
-          <a:lstStyle xmlns:a="http://schemas.openxmlformats.org/drawingml/2006/main"/>
-          <a:p xmlns:a="http://schemas.openxmlformats.org/drawingml/2006/main">
-            <a:pPr algn="l">
-              <a:defRPr sz="1275" b="0">
-                <a:solidFill>
-                  <a:srgbClr val="52606B"/>
-                </a:solidFill>
-              </a:defRPr>
-            </a:pPr>
-            <a:r>
-              <a:rPr sz="1275" b="0">
-                <a:solidFill>
-                  <a:srgbClr val="52606B"/>
-                </a:solidFill>
-              </a:rPr>
-              <a:t>Bancada editorial e de prototipação: textos, síntese, roteiros, páginas simples e desdobramento.</a:t>
-            </a:r>
-          </a:p>
-        </p:txBody>
-      </p:sp>
-      <p:sp>
-        <p:nvSpPr>
-          <p:cNvPr id="11" name="">
-            <a:extLst xmlns:a="http://schemas.openxmlformats.org/drawingml/2006/main">
-              <a:ext uri="{FF2B5EF4-FFF2-40B4-BE49-F238E27FC236}">
-                <a16:creationId xmlns:a16="http://schemas.microsoft.com/office/drawing/2014/main" id="{9512403D-342E-4C3F-91C2-67C01E047F3D}"/>
-              </a:ext>
-            </a:extLst>
-          </p:cNvPr>
-          <p:cNvSpPr>
-            <a:spLocks xmlns:a="http://schemas.openxmlformats.org/drawingml/2006/main" noGrp="1"/>
-          </p:cNvSpPr>
-          <p:nvPr/>
-        </p:nvSpPr>
-        <p:spPr>
-          <a:xfrm xmlns:a="http://schemas.openxmlformats.org/drawingml/2006/main">
-            <a:off x="685800" y="3857625"/>
-            <a:ext cx="4953000" cy="1381125"/>
-          </a:xfrm>
-          <a:prstGeom xmlns:a="http://schemas.openxmlformats.org/drawingml/2006/main" prst="roundRect">
-            <a:avLst>
-              <a:gd name="adj" fmla="val 1379"/>
-            </a:avLst>
+              <a:t>Claude</a:t>
+            </a:r>
+          </a:p>
+        </p:txBody>
+      </p:sp>
+      <p:sp>
+        <p:nvSpPr>
+          <p:cNvPr id="15" name="">
+            <a:extLst xmlns:a="http://schemas.openxmlformats.org/drawingml/2006/main">
+              <a:ext uri="{FF2B5EF4-FFF2-40B4-BE49-F238E27FC236}">
+                <a16:creationId xmlns:a16="http://schemas.microsoft.com/office/drawing/2014/main" id="{718F84E4-FC30-4B42-80B8-81CD3C9F3294}"/>
+              </a:ext>
+            </a:extLst>
+          </p:cNvPr>
+          <p:cNvSpPr>
+            <a:spLocks xmlns:a="http://schemas.openxmlformats.org/drawingml/2006/main" noGrp="1"/>
+          </p:cNvSpPr>
+          <p:nvPr/>
+        </p:nvSpPr>
+        <p:spPr>
+          <a:xfrm xmlns:a="http://schemas.openxmlformats.org/drawingml/2006/main">
+            <a:off x="4714875" y="2857500"/>
+            <a:ext cx="762000" cy="209550"/>
+          </a:xfrm>
+          <a:prstGeom xmlns:a="http://schemas.openxmlformats.org/drawingml/2006/main" prst="rect">
+            <a:avLst/>
+          </a:prstGeom>
+          <a:noFill xmlns:a="http://schemas.openxmlformats.org/drawingml/2006/main"/>
+          <a:ln xmlns:a="http://schemas.openxmlformats.org/drawingml/2006/main" w="0">
+            <a:noFill/>
+            <a:prstDash val="solid"/>
+          </a:ln>
+        </p:spPr>
+        <p:txBody>
+          <a:bodyPr xmlns:a="http://schemas.openxmlformats.org/drawingml/2006/main"/>
+          <a:lstStyle xmlns:a="http://schemas.openxmlformats.org/drawingml/2006/main"/>
+          <a:p xmlns:a="http://schemas.openxmlformats.org/drawingml/2006/main">
+            <a:pPr algn="l">
+              <a:defRPr sz="1125" b="1">
+                <a:solidFill>
+                  <a:srgbClr val="0E74BA"/>
+                </a:solidFill>
+              </a:defRPr>
+            </a:pPr>
+            <a:r>
+              <a:rPr sz="1125" b="1">
+                <a:solidFill>
+                  <a:srgbClr val="0E74BA"/>
+                </a:solidFill>
+              </a:rPr>
+              <a:t>Faz</a:t>
+            </a:r>
+          </a:p>
+        </p:txBody>
+      </p:sp>
+      <p:sp>
+        <p:nvSpPr>
+          <p:cNvPr id="16" name="">
+            <a:extLst xmlns:a="http://schemas.openxmlformats.org/drawingml/2006/main">
+              <a:ext uri="{FF2B5EF4-FFF2-40B4-BE49-F238E27FC236}">
+                <a16:creationId xmlns:a16="http://schemas.microsoft.com/office/drawing/2014/main" id="{651FB464-F158-4C1A-BDCF-C734AFFE9CE1}"/>
+              </a:ext>
+            </a:extLst>
+          </p:cNvPr>
+          <p:cNvSpPr>
+            <a:spLocks xmlns:a="http://schemas.openxmlformats.org/drawingml/2006/main" noGrp="1"/>
+          </p:cNvSpPr>
+          <p:nvPr/>
+        </p:nvSpPr>
+        <p:spPr>
+          <a:xfrm xmlns:a="http://schemas.openxmlformats.org/drawingml/2006/main">
+            <a:off x="5495925" y="2819400"/>
+            <a:ext cx="1905000" cy="457200"/>
+          </a:xfrm>
+          <a:prstGeom xmlns:a="http://schemas.openxmlformats.org/drawingml/2006/main" prst="rect">
+            <a:avLst/>
+          </a:prstGeom>
+          <a:noFill xmlns:a="http://schemas.openxmlformats.org/drawingml/2006/main"/>
+          <a:ln xmlns:a="http://schemas.openxmlformats.org/drawingml/2006/main" w="0">
+            <a:noFill/>
+            <a:prstDash val="solid"/>
+          </a:ln>
+        </p:spPr>
+        <p:txBody>
+          <a:bodyPr xmlns:a="http://schemas.openxmlformats.org/drawingml/2006/main"/>
+          <a:lstStyle xmlns:a="http://schemas.openxmlformats.org/drawingml/2006/main"/>
+          <a:p xmlns:a="http://schemas.openxmlformats.org/drawingml/2006/main">
+            <a:pPr algn="l">
+              <a:defRPr sz="1200" b="0">
+                <a:solidFill>
+                  <a:srgbClr val="52606B"/>
+                </a:solidFill>
+              </a:defRPr>
+            </a:pPr>
+            <a:r>
+              <a:rPr sz="1200" b="0">
+                <a:solidFill>
+                  <a:srgbClr val="52606B"/>
+                </a:solidFill>
+              </a:rPr>
+              <a:t>escreve, revisa, sintetiza e prototipa</a:t>
+            </a:r>
+          </a:p>
+        </p:txBody>
+      </p:sp>
+      <p:sp>
+        <p:nvSpPr>
+          <p:cNvPr id="17" name="">
+            <a:extLst xmlns:a="http://schemas.openxmlformats.org/drawingml/2006/main">
+              <a:ext uri="{FF2B5EF4-FFF2-40B4-BE49-F238E27FC236}">
+                <a16:creationId xmlns:a16="http://schemas.microsoft.com/office/drawing/2014/main" id="{91D04EC9-C9FE-419F-80A8-134D1B1D3DF5}"/>
+              </a:ext>
+            </a:extLst>
+          </p:cNvPr>
+          <p:cNvSpPr>
+            <a:spLocks xmlns:a="http://schemas.openxmlformats.org/drawingml/2006/main" noGrp="1"/>
+          </p:cNvSpPr>
+          <p:nvPr/>
+        </p:nvSpPr>
+        <p:spPr>
+          <a:xfrm xmlns:a="http://schemas.openxmlformats.org/drawingml/2006/main">
+            <a:off x="4714875" y="3524250"/>
+            <a:ext cx="762000" cy="209550"/>
+          </a:xfrm>
+          <a:prstGeom xmlns:a="http://schemas.openxmlformats.org/drawingml/2006/main" prst="rect">
+            <a:avLst/>
+          </a:prstGeom>
+          <a:noFill xmlns:a="http://schemas.openxmlformats.org/drawingml/2006/main"/>
+          <a:ln xmlns:a="http://schemas.openxmlformats.org/drawingml/2006/main" w="0">
+            <a:noFill/>
+            <a:prstDash val="solid"/>
+          </a:ln>
+        </p:spPr>
+        <p:txBody>
+          <a:bodyPr xmlns:a="http://schemas.openxmlformats.org/drawingml/2006/main"/>
+          <a:lstStyle xmlns:a="http://schemas.openxmlformats.org/drawingml/2006/main"/>
+          <a:p xmlns:a="http://schemas.openxmlformats.org/drawingml/2006/main">
+            <a:pPr algn="l">
+              <a:defRPr sz="1125" b="1">
+                <a:solidFill>
+                  <a:srgbClr val="0E74BA"/>
+                </a:solidFill>
+              </a:defRPr>
+            </a:pPr>
+            <a:r>
+              <a:rPr sz="1125" b="1">
+                <a:solidFill>
+                  <a:srgbClr val="0E74BA"/>
+                </a:solidFill>
+              </a:rPr>
+              <a:t>Resolve</a:t>
+            </a:r>
+          </a:p>
+        </p:txBody>
+      </p:sp>
+      <p:sp>
+        <p:nvSpPr>
+          <p:cNvPr id="18" name="">
+            <a:extLst xmlns:a="http://schemas.openxmlformats.org/drawingml/2006/main">
+              <a:ext uri="{FF2B5EF4-FFF2-40B4-BE49-F238E27FC236}">
+                <a16:creationId xmlns:a16="http://schemas.microsoft.com/office/drawing/2014/main" id="{AD5F165D-3CD8-4638-89A2-70D306FF799D}"/>
+              </a:ext>
+            </a:extLst>
+          </p:cNvPr>
+          <p:cNvSpPr>
+            <a:spLocks xmlns:a="http://schemas.openxmlformats.org/drawingml/2006/main" noGrp="1"/>
+          </p:cNvSpPr>
+          <p:nvPr/>
+        </p:nvSpPr>
+        <p:spPr>
+          <a:xfrm xmlns:a="http://schemas.openxmlformats.org/drawingml/2006/main">
+            <a:off x="5495925" y="3486150"/>
+            <a:ext cx="1905000" cy="476250"/>
+          </a:xfrm>
+          <a:prstGeom xmlns:a="http://schemas.openxmlformats.org/drawingml/2006/main" prst="rect">
+            <a:avLst/>
+          </a:prstGeom>
+          <a:noFill xmlns:a="http://schemas.openxmlformats.org/drawingml/2006/main"/>
+          <a:ln xmlns:a="http://schemas.openxmlformats.org/drawingml/2006/main" w="0">
+            <a:noFill/>
+            <a:prstDash val="solid"/>
+          </a:ln>
+        </p:spPr>
+        <p:txBody>
+          <a:bodyPr xmlns:a="http://schemas.openxmlformats.org/drawingml/2006/main"/>
+          <a:lstStyle xmlns:a="http://schemas.openxmlformats.org/drawingml/2006/main"/>
+          <a:p xmlns:a="http://schemas.openxmlformats.org/drawingml/2006/main">
+            <a:pPr algn="l">
+              <a:defRPr sz="1200" b="0">
+                <a:solidFill>
+                  <a:srgbClr val="52606B"/>
+                </a:solidFill>
+              </a:defRPr>
+            </a:pPr>
+            <a:r>
+              <a:rPr sz="1200" b="0">
+                <a:solidFill>
+                  <a:srgbClr val="52606B"/>
+                </a:solidFill>
+              </a:rPr>
+              <a:t>qualidade editorial, briefing, roteiro, release e páginas simples</a:t>
+            </a:r>
+          </a:p>
+        </p:txBody>
+      </p:sp>
+      <p:sp>
+        <p:nvSpPr>
+          <p:cNvPr id="19" name="">
+            <a:extLst xmlns:a="http://schemas.openxmlformats.org/drawingml/2006/main">
+              <a:ext uri="{FF2B5EF4-FFF2-40B4-BE49-F238E27FC236}">
+                <a16:creationId xmlns:a16="http://schemas.microsoft.com/office/drawing/2014/main" id="{7A7B8E21-E7DF-4AD7-82D2-193290CDB690}"/>
+              </a:ext>
+            </a:extLst>
+          </p:cNvPr>
+          <p:cNvSpPr>
+            <a:spLocks xmlns:a="http://schemas.openxmlformats.org/drawingml/2006/main" noGrp="1"/>
+          </p:cNvSpPr>
+          <p:nvPr/>
+        </p:nvSpPr>
+        <p:spPr>
+          <a:xfrm xmlns:a="http://schemas.openxmlformats.org/drawingml/2006/main">
+            <a:off x="4714875" y="4229100"/>
+            <a:ext cx="762000" cy="209550"/>
+          </a:xfrm>
+          <a:prstGeom xmlns:a="http://schemas.openxmlformats.org/drawingml/2006/main" prst="rect">
+            <a:avLst/>
+          </a:prstGeom>
+          <a:noFill xmlns:a="http://schemas.openxmlformats.org/drawingml/2006/main"/>
+          <a:ln xmlns:a="http://schemas.openxmlformats.org/drawingml/2006/main" w="0">
+            <a:noFill/>
+            <a:prstDash val="solid"/>
+          </a:ln>
+        </p:spPr>
+        <p:txBody>
+          <a:bodyPr xmlns:a="http://schemas.openxmlformats.org/drawingml/2006/main"/>
+          <a:lstStyle xmlns:a="http://schemas.openxmlformats.org/drawingml/2006/main"/>
+          <a:p xmlns:a="http://schemas.openxmlformats.org/drawingml/2006/main">
+            <a:pPr algn="l">
+              <a:defRPr sz="1125" b="1">
+                <a:solidFill>
+                  <a:srgbClr val="0E74BA"/>
+                </a:solidFill>
+              </a:defRPr>
+            </a:pPr>
+            <a:r>
+              <a:rPr sz="1125" b="1">
+                <a:solidFill>
+                  <a:srgbClr val="0E74BA"/>
+                </a:solidFill>
+              </a:rPr>
+              <a:t>Ganho</a:t>
+            </a:r>
+          </a:p>
+        </p:txBody>
+      </p:sp>
+      <p:sp>
+        <p:nvSpPr>
+          <p:cNvPr id="20" name="">
+            <a:extLst xmlns:a="http://schemas.openxmlformats.org/drawingml/2006/main">
+              <a:ext uri="{FF2B5EF4-FFF2-40B4-BE49-F238E27FC236}">
+                <a16:creationId xmlns:a16="http://schemas.microsoft.com/office/drawing/2014/main" id="{7DA9187F-B0E1-45F7-AAD5-FEF60EDF3885}"/>
+              </a:ext>
+            </a:extLst>
+          </p:cNvPr>
+          <p:cNvSpPr>
+            <a:spLocks xmlns:a="http://schemas.openxmlformats.org/drawingml/2006/main" noGrp="1"/>
+          </p:cNvSpPr>
+          <p:nvPr/>
+        </p:nvSpPr>
+        <p:spPr>
+          <a:xfrm xmlns:a="http://schemas.openxmlformats.org/drawingml/2006/main">
+            <a:off x="5495925" y="4191000"/>
+            <a:ext cx="1905000" cy="666750"/>
+          </a:xfrm>
+          <a:prstGeom xmlns:a="http://schemas.openxmlformats.org/drawingml/2006/main" prst="rect">
+            <a:avLst/>
+          </a:prstGeom>
+          <a:noFill xmlns:a="http://schemas.openxmlformats.org/drawingml/2006/main"/>
+          <a:ln xmlns:a="http://schemas.openxmlformats.org/drawingml/2006/main" w="0">
+            <a:noFill/>
+            <a:prstDash val="solid"/>
+          </a:ln>
+        </p:spPr>
+        <p:txBody>
+          <a:bodyPr xmlns:a="http://schemas.openxmlformats.org/drawingml/2006/main"/>
+          <a:lstStyle xmlns:a="http://schemas.openxmlformats.org/drawingml/2006/main"/>
+          <a:p xmlns:a="http://schemas.openxmlformats.org/drawingml/2006/main">
+            <a:pPr algn="l">
+              <a:defRPr sz="1200" b="0">
+                <a:solidFill>
+                  <a:srgbClr val="52606B"/>
+                </a:solidFill>
+              </a:defRPr>
+            </a:pPr>
+            <a:r>
+              <a:rPr sz="1200" b="0">
+                <a:solidFill>
+                  <a:srgbClr val="52606B"/>
+                </a:solidFill>
+              </a:rPr>
+              <a:t>menos refação e mais autonomia</a:t>
+            </a:r>
+          </a:p>
+        </p:txBody>
+      </p:sp>
+      <p:sp>
+        <p:nvSpPr>
+          <p:cNvPr id="21" name="">
+            <a:extLst xmlns:a="http://schemas.openxmlformats.org/drawingml/2006/main">
+              <a:ext uri="{FF2B5EF4-FFF2-40B4-BE49-F238E27FC236}">
+                <a16:creationId xmlns:a16="http://schemas.microsoft.com/office/drawing/2014/main" id="{8E5424A1-F6EE-4BEF-9883-DACEA79B1E19}"/>
+              </a:ext>
+            </a:extLst>
+          </p:cNvPr>
+          <p:cNvSpPr>
+            <a:spLocks xmlns:a="http://schemas.openxmlformats.org/drawingml/2006/main" noGrp="1"/>
+          </p:cNvSpPr>
+          <p:nvPr/>
+        </p:nvSpPr>
+        <p:spPr>
+          <a:xfrm xmlns:a="http://schemas.openxmlformats.org/drawingml/2006/main">
+            <a:off x="8248650" y="1952625"/>
+            <a:ext cx="3257550" cy="3524250"/>
+          </a:xfrm>
+          <a:prstGeom xmlns:a="http://schemas.openxmlformats.org/drawingml/2006/main" prst="rect">
+            <a:avLst/>
           </a:prstGeom>
           <a:solidFill xmlns:a="http://schemas.openxmlformats.org/drawingml/2006/main">
             <a:srgbClr val="FFFFFF"/>
@@ -2362,22 +3008,22 @@
       </p:sp>
       <p:sp>
         <p:nvSpPr>
-          <p:cNvPr id="12" name="">
-            <a:extLst xmlns:a="http://schemas.openxmlformats.org/drawingml/2006/main">
-              <a:ext uri="{FF2B5EF4-FFF2-40B4-BE49-F238E27FC236}">
-                <a16:creationId xmlns:a16="http://schemas.microsoft.com/office/drawing/2014/main" id="{E4A02403-6E14-4EF3-BBCE-793F205B8D53}"/>
-              </a:ext>
-            </a:extLst>
-          </p:cNvPr>
-          <p:cNvSpPr>
-            <a:spLocks xmlns:a="http://schemas.openxmlformats.org/drawingml/2006/main" noGrp="1"/>
-          </p:cNvSpPr>
-          <p:nvPr/>
-        </p:nvSpPr>
-        <p:spPr>
-          <a:xfrm xmlns:a="http://schemas.openxmlformats.org/drawingml/2006/main">
-            <a:off x="685800" y="3857625"/>
-            <a:ext cx="66675" cy="1381125"/>
+          <p:cNvPr id="22" name="">
+            <a:extLst xmlns:a="http://schemas.openxmlformats.org/drawingml/2006/main">
+              <a:ext uri="{FF2B5EF4-FFF2-40B4-BE49-F238E27FC236}">
+                <a16:creationId xmlns:a16="http://schemas.microsoft.com/office/drawing/2014/main" id="{FB037B26-BE7A-4382-A8C1-0390665569E8}"/>
+              </a:ext>
+            </a:extLst>
+          </p:cNvPr>
+          <p:cNvSpPr>
+            <a:spLocks xmlns:a="http://schemas.openxmlformats.org/drawingml/2006/main" noGrp="1"/>
+          </p:cNvSpPr>
+          <p:nvPr/>
+        </p:nvSpPr>
+        <p:spPr>
+          <a:xfrm xmlns:a="http://schemas.openxmlformats.org/drawingml/2006/main">
+            <a:off x="8248650" y="1952625"/>
+            <a:ext cx="3257550" cy="95250"/>
           </a:xfrm>
           <a:prstGeom xmlns:a="http://schemas.openxmlformats.org/drawingml/2006/main" prst="rect">
             <a:avLst/>
@@ -2393,276 +3039,360 @@
       </p:sp>
       <p:sp>
         <p:nvSpPr>
-          <p:cNvPr id="13" name="">
-            <a:extLst xmlns:a="http://schemas.openxmlformats.org/drawingml/2006/main">
-              <a:ext uri="{FF2B5EF4-FFF2-40B4-BE49-F238E27FC236}">
-                <a16:creationId xmlns:a16="http://schemas.microsoft.com/office/drawing/2014/main" id="{BC1032E0-D4F8-4528-B292-D5E64E1712E8}"/>
-              </a:ext>
-            </a:extLst>
-          </p:cNvPr>
-          <p:cNvSpPr>
-            <a:spLocks xmlns:a="http://schemas.openxmlformats.org/drawingml/2006/main" noGrp="1"/>
-          </p:cNvSpPr>
-          <p:nvPr/>
-        </p:nvSpPr>
-        <p:spPr>
-          <a:xfrm xmlns:a="http://schemas.openxmlformats.org/drawingml/2006/main">
-            <a:off x="914400" y="4067175"/>
-            <a:ext cx="4514850" cy="266700"/>
-          </a:xfrm>
-          <a:prstGeom xmlns:a="http://schemas.openxmlformats.org/drawingml/2006/main" prst="rect">
-            <a:avLst/>
-          </a:prstGeom>
-          <a:noFill xmlns:a="http://schemas.openxmlformats.org/drawingml/2006/main"/>
-          <a:ln xmlns:a="http://schemas.openxmlformats.org/drawingml/2006/main" w="0">
-            <a:noFill/>
-            <a:prstDash val="solid"/>
-          </a:ln>
-        </p:spPr>
-        <p:txBody>
-          <a:bodyPr xmlns:a="http://schemas.openxmlformats.org/drawingml/2006/main"/>
-          <a:lstStyle xmlns:a="http://schemas.openxmlformats.org/drawingml/2006/main"/>
-          <a:p xmlns:a="http://schemas.openxmlformats.org/drawingml/2006/main">
-            <a:pPr algn="l">
-              <a:defRPr sz="1650" b="1">
+          <p:cNvPr id="23" name="">
+            <a:extLst xmlns:a="http://schemas.openxmlformats.org/drawingml/2006/main">
+              <a:ext uri="{FF2B5EF4-FFF2-40B4-BE49-F238E27FC236}">
+                <a16:creationId xmlns:a16="http://schemas.microsoft.com/office/drawing/2014/main" id="{8A5A6FA4-A322-4D7A-9A6E-97EC946BA56E}"/>
+              </a:ext>
+            </a:extLst>
+          </p:cNvPr>
+          <p:cNvSpPr>
+            <a:spLocks xmlns:a="http://schemas.openxmlformats.org/drawingml/2006/main" noGrp="1"/>
+          </p:cNvSpPr>
+          <p:nvPr/>
+        </p:nvSpPr>
+        <p:spPr>
+          <a:xfrm xmlns:a="http://schemas.openxmlformats.org/drawingml/2006/main">
+            <a:off x="8496300" y="2266950"/>
+            <a:ext cx="2762250" cy="323850"/>
+          </a:xfrm>
+          <a:prstGeom xmlns:a="http://schemas.openxmlformats.org/drawingml/2006/main" prst="rect">
+            <a:avLst/>
+          </a:prstGeom>
+          <a:noFill xmlns:a="http://schemas.openxmlformats.org/drawingml/2006/main"/>
+          <a:ln xmlns:a="http://schemas.openxmlformats.org/drawingml/2006/main" w="0">
+            <a:noFill/>
+            <a:prstDash val="solid"/>
+          </a:ln>
+        </p:spPr>
+        <p:txBody>
+          <a:bodyPr xmlns:a="http://schemas.openxmlformats.org/drawingml/2006/main"/>
+          <a:lstStyle xmlns:a="http://schemas.openxmlformats.org/drawingml/2006/main"/>
+          <a:p xmlns:a="http://schemas.openxmlformats.org/drawingml/2006/main">
+            <a:pPr algn="l">
+              <a:defRPr sz="1800" b="1">
                 <a:solidFill>
                   <a:srgbClr val="172026"/>
                 </a:solidFill>
               </a:defRPr>
             </a:pPr>
             <a:r>
-              <a:rPr sz="1650" b="1">
+              <a:rPr sz="1800" b="1">
                 <a:solidFill>
                   <a:srgbClr val="172026"/>
                 </a:solidFill>
               </a:rPr>
-              <a:t>Adobe Firefly + Creative Cloud</a:t>
-            </a:r>
-          </a:p>
-        </p:txBody>
-      </p:sp>
-      <p:sp>
-        <p:nvSpPr>
-          <p:cNvPr id="14" name="">
-            <a:extLst xmlns:a="http://schemas.openxmlformats.org/drawingml/2006/main">
-              <a:ext uri="{FF2B5EF4-FFF2-40B4-BE49-F238E27FC236}">
-                <a16:creationId xmlns:a16="http://schemas.microsoft.com/office/drawing/2014/main" id="{CBD5905A-CF43-4D58-BA5C-E4A1BFBD77FB}"/>
-              </a:ext>
-            </a:extLst>
-          </p:cNvPr>
-          <p:cNvSpPr>
-            <a:spLocks xmlns:a="http://schemas.openxmlformats.org/drawingml/2006/main" noGrp="1"/>
-          </p:cNvSpPr>
-          <p:nvPr/>
-        </p:nvSpPr>
-        <p:spPr>
-          <a:xfrm xmlns:a="http://schemas.openxmlformats.org/drawingml/2006/main">
-            <a:off x="914400" y="4467225"/>
-            <a:ext cx="4514850" cy="600075"/>
-          </a:xfrm>
-          <a:prstGeom xmlns:a="http://schemas.openxmlformats.org/drawingml/2006/main" prst="rect">
-            <a:avLst/>
-          </a:prstGeom>
-          <a:noFill xmlns:a="http://schemas.openxmlformats.org/drawingml/2006/main"/>
-          <a:ln xmlns:a="http://schemas.openxmlformats.org/drawingml/2006/main" w="0">
-            <a:noFill/>
-            <a:prstDash val="solid"/>
-          </a:ln>
-        </p:spPr>
-        <p:txBody>
-          <a:bodyPr xmlns:a="http://schemas.openxmlformats.org/drawingml/2006/main"/>
-          <a:lstStyle xmlns:a="http://schemas.openxmlformats.org/drawingml/2006/main"/>
-          <a:p xmlns:a="http://schemas.openxmlformats.org/drawingml/2006/main">
-            <a:pPr algn="l">
-              <a:defRPr sz="1275" b="0">
-                <a:solidFill>
-                  <a:srgbClr val="52606B"/>
-                </a:solidFill>
-              </a:defRPr>
-            </a:pPr>
-            <a:r>
-              <a:rPr sz="1275" b="0">
-                <a:solidFill>
-                  <a:srgbClr val="52606B"/>
-                </a:solidFill>
-              </a:rPr>
-              <a:t>Hub criativo seguro: imagem, vídeo, assets, acabamento e modelos parceiros com governança.</a:t>
-            </a:r>
-          </a:p>
-        </p:txBody>
-      </p:sp>
-      <p:sp>
-        <p:nvSpPr>
-          <p:cNvPr id="15" name="">
-            <a:extLst xmlns:a="http://schemas.openxmlformats.org/drawingml/2006/main">
-              <a:ext uri="{FF2B5EF4-FFF2-40B4-BE49-F238E27FC236}">
-                <a16:creationId xmlns:a16="http://schemas.microsoft.com/office/drawing/2014/main" id="{D781DA67-1693-4A3E-8D58-578BBD7F7F5F}"/>
-              </a:ext>
-            </a:extLst>
-          </p:cNvPr>
-          <p:cNvSpPr>
-            <a:spLocks xmlns:a="http://schemas.openxmlformats.org/drawingml/2006/main" noGrp="1"/>
-          </p:cNvSpPr>
-          <p:nvPr/>
-        </p:nvSpPr>
-        <p:spPr>
-          <a:xfrm xmlns:a="http://schemas.openxmlformats.org/drawingml/2006/main">
-            <a:off x="6553200" y="3857625"/>
-            <a:ext cx="4953000" cy="1381125"/>
-          </a:xfrm>
-          <a:prstGeom xmlns:a="http://schemas.openxmlformats.org/drawingml/2006/main" prst="roundRect">
-            <a:avLst>
-              <a:gd name="adj" fmla="val 1379"/>
-            </a:avLst>
-          </a:prstGeom>
-          <a:solidFill xmlns:a="http://schemas.openxmlformats.org/drawingml/2006/main">
-            <a:srgbClr val="FFFFFF"/>
-          </a:solidFill>
-          <a:ln xmlns:a="http://schemas.openxmlformats.org/drawingml/2006/main" w="9525">
-            <a:solidFill>
-              <a:srgbClr val="D6DDE3"/>
-            </a:solidFill>
-            <a:prstDash val="solid"/>
-          </a:ln>
-        </p:spPr>
-      </p:sp>
-      <p:sp>
-        <p:nvSpPr>
-          <p:cNvPr id="16" name="">
-            <a:extLst xmlns:a="http://schemas.openxmlformats.org/drawingml/2006/main">
-              <a:ext uri="{FF2B5EF4-FFF2-40B4-BE49-F238E27FC236}">
-                <a16:creationId xmlns:a16="http://schemas.microsoft.com/office/drawing/2014/main" id="{06A0E033-3046-4AAE-824A-EAA8EA85B2CF}"/>
-              </a:ext>
-            </a:extLst>
-          </p:cNvPr>
-          <p:cNvSpPr>
-            <a:spLocks xmlns:a="http://schemas.openxmlformats.org/drawingml/2006/main" noGrp="1"/>
-          </p:cNvSpPr>
-          <p:nvPr/>
-        </p:nvSpPr>
-        <p:spPr>
-          <a:xfrm xmlns:a="http://schemas.openxmlformats.org/drawingml/2006/main">
-            <a:off x="6553200" y="3857625"/>
-            <a:ext cx="66675" cy="1381125"/>
-          </a:xfrm>
-          <a:prstGeom xmlns:a="http://schemas.openxmlformats.org/drawingml/2006/main" prst="rect">
-            <a:avLst/>
-          </a:prstGeom>
-          <a:solidFill xmlns:a="http://schemas.openxmlformats.org/drawingml/2006/main">
-            <a:srgbClr val="1D7A54"/>
-          </a:solidFill>
-          <a:ln xmlns:a="http://schemas.openxmlformats.org/drawingml/2006/main" w="0">
-            <a:noFill/>
-            <a:prstDash val="solid"/>
-          </a:ln>
-        </p:spPr>
-      </p:sp>
-      <p:sp>
-        <p:nvSpPr>
-          <p:cNvPr id="17" name="">
-            <a:extLst xmlns:a="http://schemas.openxmlformats.org/drawingml/2006/main">
-              <a:ext uri="{FF2B5EF4-FFF2-40B4-BE49-F238E27FC236}">
-                <a16:creationId xmlns:a16="http://schemas.microsoft.com/office/drawing/2014/main" id="{7E4458D7-9017-4A2E-8E54-677354E0DFBB}"/>
-              </a:ext>
-            </a:extLst>
-          </p:cNvPr>
-          <p:cNvSpPr>
-            <a:spLocks xmlns:a="http://schemas.openxmlformats.org/drawingml/2006/main" noGrp="1"/>
-          </p:cNvSpPr>
-          <p:nvPr/>
-        </p:nvSpPr>
-        <p:spPr>
-          <a:xfrm xmlns:a="http://schemas.openxmlformats.org/drawingml/2006/main">
-            <a:off x="6781800" y="4067175"/>
-            <a:ext cx="4514850" cy="266700"/>
-          </a:xfrm>
-          <a:prstGeom xmlns:a="http://schemas.openxmlformats.org/drawingml/2006/main" prst="rect">
-            <a:avLst/>
-          </a:prstGeom>
-          <a:noFill xmlns:a="http://schemas.openxmlformats.org/drawingml/2006/main"/>
-          <a:ln xmlns:a="http://schemas.openxmlformats.org/drawingml/2006/main" w="0">
-            <a:noFill/>
-            <a:prstDash val="solid"/>
-          </a:ln>
-        </p:spPr>
-        <p:txBody>
-          <a:bodyPr xmlns:a="http://schemas.openxmlformats.org/drawingml/2006/main"/>
-          <a:lstStyle xmlns:a="http://schemas.openxmlformats.org/drawingml/2006/main"/>
-          <a:p xmlns:a="http://schemas.openxmlformats.org/drawingml/2006/main">
-            <a:pPr algn="l">
-              <a:defRPr sz="1650" b="1">
-                <a:solidFill>
-                  <a:srgbClr val="172026"/>
-                </a:solidFill>
-              </a:defRPr>
-            </a:pPr>
-            <a:r>
-              <a:rPr sz="1650" b="1">
-                <a:solidFill>
-                  <a:srgbClr val="172026"/>
-                </a:solidFill>
-              </a:rPr>
-              <a:t>Especialistas</a:t>
-            </a:r>
-          </a:p>
-        </p:txBody>
-      </p:sp>
-      <p:sp>
-        <p:nvSpPr>
-          <p:cNvPr id="18" name="">
-            <a:extLst xmlns:a="http://schemas.openxmlformats.org/drawingml/2006/main">
-              <a:ext uri="{FF2B5EF4-FFF2-40B4-BE49-F238E27FC236}">
-                <a16:creationId xmlns:a16="http://schemas.microsoft.com/office/drawing/2014/main" id="{4167D1B0-F197-48BC-BB19-E219111A5472}"/>
-              </a:ext>
-            </a:extLst>
-          </p:cNvPr>
-          <p:cNvSpPr>
-            <a:spLocks xmlns:a="http://schemas.openxmlformats.org/drawingml/2006/main" noGrp="1"/>
-          </p:cNvSpPr>
-          <p:nvPr/>
-        </p:nvSpPr>
-        <p:spPr>
-          <a:xfrm xmlns:a="http://schemas.openxmlformats.org/drawingml/2006/main">
-            <a:off x="6781800" y="4467225"/>
-            <a:ext cx="4514850" cy="600075"/>
-          </a:xfrm>
-          <a:prstGeom xmlns:a="http://schemas.openxmlformats.org/drawingml/2006/main" prst="rect">
-            <a:avLst/>
-          </a:prstGeom>
-          <a:noFill xmlns:a="http://schemas.openxmlformats.org/drawingml/2006/main"/>
-          <a:ln xmlns:a="http://schemas.openxmlformats.org/drawingml/2006/main" w="0">
-            <a:noFill/>
-            <a:prstDash val="solid"/>
-          </a:ln>
-        </p:spPr>
-        <p:txBody>
-          <a:bodyPr xmlns:a="http://schemas.openxmlformats.org/drawingml/2006/main"/>
-          <a:lstStyle xmlns:a="http://schemas.openxmlformats.org/drawingml/2006/main"/>
-          <a:p xmlns:a="http://schemas.openxmlformats.org/drawingml/2006/main">
-            <a:pPr algn="l">
-              <a:defRPr sz="1275" b="0">
-                <a:solidFill>
-                  <a:srgbClr val="52606B"/>
-                </a:solidFill>
-              </a:defRPr>
-            </a:pPr>
-            <a:r>
-              <a:rPr sz="1275" b="0">
-                <a:solidFill>
-                  <a:srgbClr val="52606B"/>
-                </a:solidFill>
-              </a:rPr>
-              <a:t>Perplexity, DeepL, ElevenLabs, Descript, Fireflies e Adobe Podcast entram apenas quando superam a suíte principal.</a:t>
-            </a:r>
-          </a:p>
-        </p:txBody>
-      </p:sp>
-      <p:sp>
-        <p:nvSpPr>
-          <p:cNvPr id="19" name="">
-            <a:extLst xmlns:a="http://schemas.openxmlformats.org/drawingml/2006/main">
-              <a:ext uri="{FF2B5EF4-FFF2-40B4-BE49-F238E27FC236}">
-                <a16:creationId xmlns:a16="http://schemas.microsoft.com/office/drawing/2014/main" id="{5C71EE52-9D4E-4016-9ED6-10B179D073A2}"/>
+              <a:t>Adobe</a:t>
+            </a:r>
+          </a:p>
+        </p:txBody>
+      </p:sp>
+      <p:sp>
+        <p:nvSpPr>
+          <p:cNvPr id="24" name="">
+            <a:extLst xmlns:a="http://schemas.openxmlformats.org/drawingml/2006/main">
+              <a:ext uri="{FF2B5EF4-FFF2-40B4-BE49-F238E27FC236}">
+                <a16:creationId xmlns:a16="http://schemas.microsoft.com/office/drawing/2014/main" id="{04BCF96C-ACDC-4CF7-939A-1A044F2C8FEE}"/>
+              </a:ext>
+            </a:extLst>
+          </p:cNvPr>
+          <p:cNvSpPr>
+            <a:spLocks xmlns:a="http://schemas.openxmlformats.org/drawingml/2006/main" noGrp="1"/>
+          </p:cNvSpPr>
+          <p:nvPr/>
+        </p:nvSpPr>
+        <p:spPr>
+          <a:xfrm xmlns:a="http://schemas.openxmlformats.org/drawingml/2006/main">
+            <a:off x="8496300" y="2857500"/>
+            <a:ext cx="762000" cy="209550"/>
+          </a:xfrm>
+          <a:prstGeom xmlns:a="http://schemas.openxmlformats.org/drawingml/2006/main" prst="rect">
+            <a:avLst/>
+          </a:prstGeom>
+          <a:noFill xmlns:a="http://schemas.openxmlformats.org/drawingml/2006/main"/>
+          <a:ln xmlns:a="http://schemas.openxmlformats.org/drawingml/2006/main" w="0">
+            <a:noFill/>
+            <a:prstDash val="solid"/>
+          </a:ln>
+        </p:spPr>
+        <p:txBody>
+          <a:bodyPr xmlns:a="http://schemas.openxmlformats.org/drawingml/2006/main"/>
+          <a:lstStyle xmlns:a="http://schemas.openxmlformats.org/drawingml/2006/main"/>
+          <a:p xmlns:a="http://schemas.openxmlformats.org/drawingml/2006/main">
+            <a:pPr algn="l">
+              <a:defRPr sz="1125" b="1">
+                <a:solidFill>
+                  <a:srgbClr val="EF7A1D"/>
+                </a:solidFill>
+              </a:defRPr>
+            </a:pPr>
+            <a:r>
+              <a:rPr sz="1125" b="1">
+                <a:solidFill>
+                  <a:srgbClr val="EF7A1D"/>
+                </a:solidFill>
+              </a:rPr>
+              <a:t>Faz</a:t>
+            </a:r>
+          </a:p>
+        </p:txBody>
+      </p:sp>
+      <p:sp>
+        <p:nvSpPr>
+          <p:cNvPr id="25" name="">
+            <a:extLst xmlns:a="http://schemas.openxmlformats.org/drawingml/2006/main">
+              <a:ext uri="{FF2B5EF4-FFF2-40B4-BE49-F238E27FC236}">
+                <a16:creationId xmlns:a16="http://schemas.microsoft.com/office/drawing/2014/main" id="{F956320F-57DA-4920-ACFF-98ADCD7FBF70}"/>
+              </a:ext>
+            </a:extLst>
+          </p:cNvPr>
+          <p:cNvSpPr>
+            <a:spLocks xmlns:a="http://schemas.openxmlformats.org/drawingml/2006/main" noGrp="1"/>
+          </p:cNvSpPr>
+          <p:nvPr/>
+        </p:nvSpPr>
+        <p:spPr>
+          <a:xfrm xmlns:a="http://schemas.openxmlformats.org/drawingml/2006/main">
+            <a:off x="9277350" y="2819400"/>
+            <a:ext cx="1905000" cy="457200"/>
+          </a:xfrm>
+          <a:prstGeom xmlns:a="http://schemas.openxmlformats.org/drawingml/2006/main" prst="rect">
+            <a:avLst/>
+          </a:prstGeom>
+          <a:noFill xmlns:a="http://schemas.openxmlformats.org/drawingml/2006/main"/>
+          <a:ln xmlns:a="http://schemas.openxmlformats.org/drawingml/2006/main" w="0">
+            <a:noFill/>
+            <a:prstDash val="solid"/>
+          </a:ln>
+        </p:spPr>
+        <p:txBody>
+          <a:bodyPr xmlns:a="http://schemas.openxmlformats.org/drawingml/2006/main"/>
+          <a:lstStyle xmlns:a="http://schemas.openxmlformats.org/drawingml/2006/main"/>
+          <a:p xmlns:a="http://schemas.openxmlformats.org/drawingml/2006/main">
+            <a:pPr algn="l">
+              <a:defRPr sz="1200" b="0">
+                <a:solidFill>
+                  <a:srgbClr val="52606B"/>
+                </a:solidFill>
+              </a:defRPr>
+            </a:pPr>
+            <a:r>
+              <a:rPr sz="1200" b="0">
+                <a:solidFill>
+                  <a:srgbClr val="52606B"/>
+                </a:solidFill>
+              </a:rPr>
+              <a:t>cria e finaliza imagem, vídeo e assets</a:t>
+            </a:r>
+          </a:p>
+        </p:txBody>
+      </p:sp>
+      <p:sp>
+        <p:nvSpPr>
+          <p:cNvPr id="26" name="">
+            <a:extLst xmlns:a="http://schemas.openxmlformats.org/drawingml/2006/main">
+              <a:ext uri="{FF2B5EF4-FFF2-40B4-BE49-F238E27FC236}">
+                <a16:creationId xmlns:a16="http://schemas.microsoft.com/office/drawing/2014/main" id="{75D19690-B3EA-4822-8C5F-F09A19ADFD48}"/>
+              </a:ext>
+            </a:extLst>
+          </p:cNvPr>
+          <p:cNvSpPr>
+            <a:spLocks xmlns:a="http://schemas.openxmlformats.org/drawingml/2006/main" noGrp="1"/>
+          </p:cNvSpPr>
+          <p:nvPr/>
+        </p:nvSpPr>
+        <p:spPr>
+          <a:xfrm xmlns:a="http://schemas.openxmlformats.org/drawingml/2006/main">
+            <a:off x="8496300" y="3524250"/>
+            <a:ext cx="762000" cy="209550"/>
+          </a:xfrm>
+          <a:prstGeom xmlns:a="http://schemas.openxmlformats.org/drawingml/2006/main" prst="rect">
+            <a:avLst/>
+          </a:prstGeom>
+          <a:noFill xmlns:a="http://schemas.openxmlformats.org/drawingml/2006/main"/>
+          <a:ln xmlns:a="http://schemas.openxmlformats.org/drawingml/2006/main" w="0">
+            <a:noFill/>
+            <a:prstDash val="solid"/>
+          </a:ln>
+        </p:spPr>
+        <p:txBody>
+          <a:bodyPr xmlns:a="http://schemas.openxmlformats.org/drawingml/2006/main"/>
+          <a:lstStyle xmlns:a="http://schemas.openxmlformats.org/drawingml/2006/main"/>
+          <a:p xmlns:a="http://schemas.openxmlformats.org/drawingml/2006/main">
+            <a:pPr algn="l">
+              <a:defRPr sz="1125" b="1">
+                <a:solidFill>
+                  <a:srgbClr val="EF7A1D"/>
+                </a:solidFill>
+              </a:defRPr>
+            </a:pPr>
+            <a:r>
+              <a:rPr sz="1125" b="1">
+                <a:solidFill>
+                  <a:srgbClr val="EF7A1D"/>
+                </a:solidFill>
+              </a:rPr>
+              <a:t>Resolve</a:t>
+            </a:r>
+          </a:p>
+        </p:txBody>
+      </p:sp>
+      <p:sp>
+        <p:nvSpPr>
+          <p:cNvPr id="27" name="">
+            <a:extLst xmlns:a="http://schemas.openxmlformats.org/drawingml/2006/main">
+              <a:ext uri="{FF2B5EF4-FFF2-40B4-BE49-F238E27FC236}">
+                <a16:creationId xmlns:a16="http://schemas.microsoft.com/office/drawing/2014/main" id="{BF985454-50CC-4FB2-8478-C0124C00E594}"/>
+              </a:ext>
+            </a:extLst>
+          </p:cNvPr>
+          <p:cNvSpPr>
+            <a:spLocks xmlns:a="http://schemas.openxmlformats.org/drawingml/2006/main" noGrp="1"/>
+          </p:cNvSpPr>
+          <p:nvPr/>
+        </p:nvSpPr>
+        <p:spPr>
+          <a:xfrm xmlns:a="http://schemas.openxmlformats.org/drawingml/2006/main">
+            <a:off x="9277350" y="3486150"/>
+            <a:ext cx="1905000" cy="476250"/>
+          </a:xfrm>
+          <a:prstGeom xmlns:a="http://schemas.openxmlformats.org/drawingml/2006/main" prst="rect">
+            <a:avLst/>
+          </a:prstGeom>
+          <a:noFill xmlns:a="http://schemas.openxmlformats.org/drawingml/2006/main"/>
+          <a:ln xmlns:a="http://schemas.openxmlformats.org/drawingml/2006/main" w="0">
+            <a:noFill/>
+            <a:prstDash val="solid"/>
+          </a:ln>
+        </p:spPr>
+        <p:txBody>
+          <a:bodyPr xmlns:a="http://schemas.openxmlformats.org/drawingml/2006/main"/>
+          <a:lstStyle xmlns:a="http://schemas.openxmlformats.org/drawingml/2006/main"/>
+          <a:p xmlns:a="http://schemas.openxmlformats.org/drawingml/2006/main">
+            <a:pPr algn="l">
+              <a:defRPr sz="1200" b="0">
+                <a:solidFill>
+                  <a:srgbClr val="52606B"/>
+                </a:solidFill>
+              </a:defRPr>
+            </a:pPr>
+            <a:r>
+              <a:rPr sz="1200" b="0">
+                <a:solidFill>
+                  <a:srgbClr val="52606B"/>
+                </a:solidFill>
+              </a:rPr>
+              <a:t>marca, acabamento, uso comercial e modelos parceiros</a:t>
+            </a:r>
+          </a:p>
+        </p:txBody>
+      </p:sp>
+      <p:sp>
+        <p:nvSpPr>
+          <p:cNvPr id="28" name="">
+            <a:extLst xmlns:a="http://schemas.openxmlformats.org/drawingml/2006/main">
+              <a:ext uri="{FF2B5EF4-FFF2-40B4-BE49-F238E27FC236}">
+                <a16:creationId xmlns:a16="http://schemas.microsoft.com/office/drawing/2014/main" id="{22622178-398F-4E01-95C8-329125C7C068}"/>
+              </a:ext>
+            </a:extLst>
+          </p:cNvPr>
+          <p:cNvSpPr>
+            <a:spLocks xmlns:a="http://schemas.openxmlformats.org/drawingml/2006/main" noGrp="1"/>
+          </p:cNvSpPr>
+          <p:nvPr/>
+        </p:nvSpPr>
+        <p:spPr>
+          <a:xfrm xmlns:a="http://schemas.openxmlformats.org/drawingml/2006/main">
+            <a:off x="8496300" y="4229100"/>
+            <a:ext cx="762000" cy="209550"/>
+          </a:xfrm>
+          <a:prstGeom xmlns:a="http://schemas.openxmlformats.org/drawingml/2006/main" prst="rect">
+            <a:avLst/>
+          </a:prstGeom>
+          <a:noFill xmlns:a="http://schemas.openxmlformats.org/drawingml/2006/main"/>
+          <a:ln xmlns:a="http://schemas.openxmlformats.org/drawingml/2006/main" w="0">
+            <a:noFill/>
+            <a:prstDash val="solid"/>
+          </a:ln>
+        </p:spPr>
+        <p:txBody>
+          <a:bodyPr xmlns:a="http://schemas.openxmlformats.org/drawingml/2006/main"/>
+          <a:lstStyle xmlns:a="http://schemas.openxmlformats.org/drawingml/2006/main"/>
+          <a:p xmlns:a="http://schemas.openxmlformats.org/drawingml/2006/main">
+            <a:pPr algn="l">
+              <a:defRPr sz="1125" b="1">
+                <a:solidFill>
+                  <a:srgbClr val="EF7A1D"/>
+                </a:solidFill>
+              </a:defRPr>
+            </a:pPr>
+            <a:r>
+              <a:rPr sz="1125" b="1">
+                <a:solidFill>
+                  <a:srgbClr val="EF7A1D"/>
+                </a:solidFill>
+              </a:rPr>
+              <a:t>Ganho</a:t>
+            </a:r>
+          </a:p>
+        </p:txBody>
+      </p:sp>
+      <p:sp>
+        <p:nvSpPr>
+          <p:cNvPr id="29" name="">
+            <a:extLst xmlns:a="http://schemas.openxmlformats.org/drawingml/2006/main">
+              <a:ext uri="{FF2B5EF4-FFF2-40B4-BE49-F238E27FC236}">
+                <a16:creationId xmlns:a16="http://schemas.microsoft.com/office/drawing/2014/main" id="{0FD230D9-7FF9-4A51-BB42-B97F1AE63186}"/>
+              </a:ext>
+            </a:extLst>
+          </p:cNvPr>
+          <p:cNvSpPr>
+            <a:spLocks xmlns:a="http://schemas.openxmlformats.org/drawingml/2006/main" noGrp="1"/>
+          </p:cNvSpPr>
+          <p:nvPr/>
+        </p:nvSpPr>
+        <p:spPr>
+          <a:xfrm xmlns:a="http://schemas.openxmlformats.org/drawingml/2006/main">
+            <a:off x="9277350" y="4191000"/>
+            <a:ext cx="1905000" cy="666750"/>
+          </a:xfrm>
+          <a:prstGeom xmlns:a="http://schemas.openxmlformats.org/drawingml/2006/main" prst="rect">
+            <a:avLst/>
+          </a:prstGeom>
+          <a:noFill xmlns:a="http://schemas.openxmlformats.org/drawingml/2006/main"/>
+          <a:ln xmlns:a="http://schemas.openxmlformats.org/drawingml/2006/main" w="0">
+            <a:noFill/>
+            <a:prstDash val="solid"/>
+          </a:ln>
+        </p:spPr>
+        <p:txBody>
+          <a:bodyPr xmlns:a="http://schemas.openxmlformats.org/drawingml/2006/main"/>
+          <a:lstStyle xmlns:a="http://schemas.openxmlformats.org/drawingml/2006/main"/>
+          <a:p xmlns:a="http://schemas.openxmlformats.org/drawingml/2006/main">
+            <a:pPr algn="l">
+              <a:defRPr sz="1200" b="0">
+                <a:solidFill>
+                  <a:srgbClr val="52606B"/>
+                </a:solidFill>
+              </a:defRPr>
+            </a:pPr>
+            <a:r>
+              <a:rPr sz="1200" b="0">
+                <a:solidFill>
+                  <a:srgbClr val="52606B"/>
+                </a:solidFill>
+              </a:rPr>
+              <a:t>qualidade criativa com segurança</a:t>
+            </a:r>
+          </a:p>
+        </p:txBody>
+      </p:sp>
+      <p:sp>
+        <p:nvSpPr>
+          <p:cNvPr id="30" name="">
+            <a:extLst xmlns:a="http://schemas.openxmlformats.org/drawingml/2006/main">
+              <a:ext uri="{FF2B5EF4-FFF2-40B4-BE49-F238E27FC236}">
+                <a16:creationId xmlns:a16="http://schemas.microsoft.com/office/drawing/2014/main" id="{FD5A3B85-B9A1-4357-A7B4-7CFC68C2527F}"/>
               </a:ext>
             </a:extLst>
           </p:cNvPr>
@@ -2709,10 +3439,10 @@
       </p:sp>
       <p:sp>
         <p:nvSpPr>
-          <p:cNvPr id="20" name="">
-            <a:extLst xmlns:a="http://schemas.openxmlformats.org/drawingml/2006/main">
-              <a:ext uri="{FF2B5EF4-FFF2-40B4-BE49-F238E27FC236}">
-                <a16:creationId xmlns:a16="http://schemas.microsoft.com/office/drawing/2014/main" id="{63B958F0-311C-420F-92E7-BA6AE4AE6EBE}"/>
+          <p:cNvPr id="31" name="">
+            <a:extLst xmlns:a="http://schemas.openxmlformats.org/drawingml/2006/main">
+              <a:ext uri="{FF2B5EF4-FFF2-40B4-BE49-F238E27FC236}">
+                <a16:creationId xmlns:a16="http://schemas.microsoft.com/office/drawing/2014/main" id="{1CA58CA7-58A9-4DF9-8A94-9C632A5B1F63}"/>
               </a:ext>
             </a:extLst>
           </p:cNvPr>
@@ -2760,7 +3490,7 @@
     </p:spTree>
     <p:extLst>
       <p:ext uri="{BB962C8B-B14F-4D97-AF65-F5344CB8AC3E}">
-        <p14:creationId xmlns:p14="http://schemas.microsoft.com/office/powerpoint/2010/main" val="6376131"/>
+        <p14:creationId xmlns:p14="http://schemas.microsoft.com/office/powerpoint/2010/main" val="1059944916"/>
       </p:ext>
     </p:extLst>
   </p:cSld>
@@ -2788,10 +3518,10 @@
       </p:grpSpPr>
       <p:sp>
         <p:nvSpPr>
-          <p:cNvPr id="17" name="">
-            <a:extLst xmlns:a="http://schemas.openxmlformats.org/drawingml/2006/main">
-              <a:ext uri="{FF2B5EF4-FFF2-40B4-BE49-F238E27FC236}">
-                <a16:creationId xmlns:a16="http://schemas.microsoft.com/office/drawing/2014/main" id="{BD70E39A-1E81-420C-8489-88FFF75A2036}"/>
+          <p:cNvPr id="33" name="">
+            <a:extLst xmlns:a="http://schemas.openxmlformats.org/drawingml/2006/main">
+              <a:ext uri="{FF2B5EF4-FFF2-40B4-BE49-F238E27FC236}">
+                <a16:creationId xmlns:a16="http://schemas.microsoft.com/office/drawing/2014/main" id="{D0A7CD9A-C1BD-4AD0-9864-C8737A24A1F3}"/>
               </a:ext>
             </a:extLst>
           </p:cNvPr>
@@ -2831,7 +3561,7 @@
                   <a:srgbClr val="172026"/>
                 </a:solidFill>
               </a:rPr>
-              <a:t>Ganhos</a:t>
+              <a:t>Especialistas recomendados</a:t>
             </a:r>
           </a:p>
         </p:txBody>
@@ -2841,7 +3571,7 @@
           <p:cNvPr id="2" name="">
             <a:extLst xmlns:a="http://schemas.openxmlformats.org/drawingml/2006/main">
               <a:ext uri="{FF2B5EF4-FFF2-40B4-BE49-F238E27FC236}">
-                <a16:creationId xmlns:a16="http://schemas.microsoft.com/office/drawing/2014/main" id="{AE7B2536-DDF6-42D9-9FEF-A28B564A1A2F}"/>
+                <a16:creationId xmlns:a16="http://schemas.microsoft.com/office/drawing/2014/main" id="{5F8F4DEA-469B-4847-A195-41BB0B35A6FE}"/>
               </a:ext>
             </a:extLst>
           </p:cNvPr>
@@ -2881,7 +3611,7 @@
                   <a:srgbClr val="52606B"/>
                 </a:solidFill>
               </a:rPr>
-              <a:t>O impacto esperado está no ciclo de produção, não na ferramenta isolada.</a:t>
+              <a:t>Entram quando a suíte principal não resolve bem ou quando o ganho de qualidade é claro.</a:t>
             </a:r>
           </a:p>
         </p:txBody>
@@ -2891,25 +3621,175 @@
           <p:cNvPr id="3" name="">
             <a:extLst xmlns:a="http://schemas.openxmlformats.org/drawingml/2006/main">
               <a:ext uri="{FF2B5EF4-FFF2-40B4-BE49-F238E27FC236}">
-                <a16:creationId xmlns:a16="http://schemas.microsoft.com/office/drawing/2014/main" id="{05D578B8-2FE8-480A-9230-5F27D5F61E08}"/>
-              </a:ext>
-            </a:extLst>
-          </p:cNvPr>
-          <p:cNvSpPr>
-            <a:spLocks xmlns:a="http://schemas.openxmlformats.org/drawingml/2006/main" noGrp="1"/>
-          </p:cNvSpPr>
-          <p:nvPr/>
-        </p:nvSpPr>
-        <p:spPr>
-          <a:xfrm xmlns:a="http://schemas.openxmlformats.org/drawingml/2006/main">
-            <a:off x="685800" y="2000250"/>
-            <a:ext cx="3143250" cy="2381250"/>
+                <a16:creationId xmlns:a16="http://schemas.microsoft.com/office/drawing/2014/main" id="{51FD0FF2-FCBD-4FF0-B698-4B13A9C38967}"/>
+              </a:ext>
+            </a:extLst>
+          </p:cNvPr>
+          <p:cNvSpPr>
+            <a:spLocks xmlns:a="http://schemas.openxmlformats.org/drawingml/2006/main" noGrp="1"/>
+          </p:cNvSpPr>
+          <p:nvPr/>
+        </p:nvSpPr>
+        <p:spPr>
+          <a:xfrm xmlns:a="http://schemas.openxmlformats.org/drawingml/2006/main">
+            <a:off x="838200" y="1952625"/>
+            <a:ext cx="1714500" cy="228600"/>
+          </a:xfrm>
+          <a:prstGeom xmlns:a="http://schemas.openxmlformats.org/drawingml/2006/main" prst="rect">
+            <a:avLst/>
+          </a:prstGeom>
+          <a:noFill xmlns:a="http://schemas.openxmlformats.org/drawingml/2006/main"/>
+          <a:ln xmlns:a="http://schemas.openxmlformats.org/drawingml/2006/main" w="0">
+            <a:noFill/>
+            <a:prstDash val="solid"/>
+          </a:ln>
+        </p:spPr>
+        <p:txBody>
+          <a:bodyPr xmlns:a="http://schemas.openxmlformats.org/drawingml/2006/main"/>
+          <a:lstStyle xmlns:a="http://schemas.openxmlformats.org/drawingml/2006/main"/>
+          <a:p xmlns:a="http://schemas.openxmlformats.org/drawingml/2006/main">
+            <a:pPr algn="l">
+              <a:defRPr sz="1050" b="1">
+                <a:solidFill>
+                  <a:srgbClr val="52606B"/>
+                </a:solidFill>
+              </a:defRPr>
+            </a:pPr>
+            <a:r>
+              <a:rPr sz="1050" b="1">
+                <a:solidFill>
+                  <a:srgbClr val="52606B"/>
+                </a:solidFill>
+              </a:rPr>
+              <a:t>Ferramenta</a:t>
+            </a:r>
+          </a:p>
+        </p:txBody>
+      </p:sp>
+      <p:sp>
+        <p:nvSpPr>
+          <p:cNvPr id="4" name="">
+            <a:extLst xmlns:a="http://schemas.openxmlformats.org/drawingml/2006/main">
+              <a:ext uri="{FF2B5EF4-FFF2-40B4-BE49-F238E27FC236}">
+                <a16:creationId xmlns:a16="http://schemas.microsoft.com/office/drawing/2014/main" id="{2D85D627-075E-4825-9E59-BE17B7FEDBC5}"/>
+              </a:ext>
+            </a:extLst>
+          </p:cNvPr>
+          <p:cNvSpPr>
+            <a:spLocks xmlns:a="http://schemas.openxmlformats.org/drawingml/2006/main" noGrp="1"/>
+          </p:cNvSpPr>
+          <p:nvPr/>
+        </p:nvSpPr>
+        <p:spPr>
+          <a:xfrm xmlns:a="http://schemas.openxmlformats.org/drawingml/2006/main">
+            <a:off x="3333750" y="1952625"/>
+            <a:ext cx="2095500" cy="228600"/>
+          </a:xfrm>
+          <a:prstGeom xmlns:a="http://schemas.openxmlformats.org/drawingml/2006/main" prst="rect">
+            <a:avLst/>
+          </a:prstGeom>
+          <a:noFill xmlns:a="http://schemas.openxmlformats.org/drawingml/2006/main"/>
+          <a:ln xmlns:a="http://schemas.openxmlformats.org/drawingml/2006/main" w="0">
+            <a:noFill/>
+            <a:prstDash val="solid"/>
+          </a:ln>
+        </p:spPr>
+        <p:txBody>
+          <a:bodyPr xmlns:a="http://schemas.openxmlformats.org/drawingml/2006/main"/>
+          <a:lstStyle xmlns:a="http://schemas.openxmlformats.org/drawingml/2006/main"/>
+          <a:p xmlns:a="http://schemas.openxmlformats.org/drawingml/2006/main">
+            <a:pPr algn="l">
+              <a:defRPr sz="1050" b="1">
+                <a:solidFill>
+                  <a:srgbClr val="52606B"/>
+                </a:solidFill>
+              </a:defRPr>
+            </a:pPr>
+            <a:r>
+              <a:rPr sz="1050" b="1">
+                <a:solidFill>
+                  <a:srgbClr val="52606B"/>
+                </a:solidFill>
+              </a:rPr>
+              <a:t>Quando usar</a:t>
+            </a:r>
+          </a:p>
+        </p:txBody>
+      </p:sp>
+      <p:sp>
+        <p:nvSpPr>
+          <p:cNvPr id="5" name="">
+            <a:extLst xmlns:a="http://schemas.openxmlformats.org/drawingml/2006/main">
+              <a:ext uri="{FF2B5EF4-FFF2-40B4-BE49-F238E27FC236}">
+                <a16:creationId xmlns:a16="http://schemas.microsoft.com/office/drawing/2014/main" id="{6CB1A92F-179E-4B7F-AC0F-422D8FFCCC5D}"/>
+              </a:ext>
+            </a:extLst>
+          </p:cNvPr>
+          <p:cNvSpPr>
+            <a:spLocks xmlns:a="http://schemas.openxmlformats.org/drawingml/2006/main" noGrp="1"/>
+          </p:cNvSpPr>
+          <p:nvPr/>
+        </p:nvSpPr>
+        <p:spPr>
+          <a:xfrm xmlns:a="http://schemas.openxmlformats.org/drawingml/2006/main">
+            <a:off x="7000875" y="1952625"/>
+            <a:ext cx="2095500" cy="228600"/>
+          </a:xfrm>
+          <a:prstGeom xmlns:a="http://schemas.openxmlformats.org/drawingml/2006/main" prst="rect">
+            <a:avLst/>
+          </a:prstGeom>
+          <a:noFill xmlns:a="http://schemas.openxmlformats.org/drawingml/2006/main"/>
+          <a:ln xmlns:a="http://schemas.openxmlformats.org/drawingml/2006/main" w="0">
+            <a:noFill/>
+            <a:prstDash val="solid"/>
+          </a:ln>
+        </p:spPr>
+        <p:txBody>
+          <a:bodyPr xmlns:a="http://schemas.openxmlformats.org/drawingml/2006/main"/>
+          <a:lstStyle xmlns:a="http://schemas.openxmlformats.org/drawingml/2006/main"/>
+          <a:p xmlns:a="http://schemas.openxmlformats.org/drawingml/2006/main">
+            <a:pPr algn="l">
+              <a:defRPr sz="1050" b="1">
+                <a:solidFill>
+                  <a:srgbClr val="52606B"/>
+                </a:solidFill>
+              </a:defRPr>
+            </a:pPr>
+            <a:r>
+              <a:rPr sz="1050" b="1">
+                <a:solidFill>
+                  <a:srgbClr val="52606B"/>
+                </a:solidFill>
+              </a:rPr>
+              <a:t>Ganho prático</a:t>
+            </a:r>
+          </a:p>
+        </p:txBody>
+      </p:sp>
+      <p:sp>
+        <p:nvSpPr>
+          <p:cNvPr id="6" name="">
+            <a:extLst xmlns:a="http://schemas.openxmlformats.org/drawingml/2006/main">
+              <a:ext uri="{FF2B5EF4-FFF2-40B4-BE49-F238E27FC236}">
+                <a16:creationId xmlns:a16="http://schemas.microsoft.com/office/drawing/2014/main" id="{000CCC68-92EE-4708-99E3-30BD38912F63}"/>
+              </a:ext>
+            </a:extLst>
+          </p:cNvPr>
+          <p:cNvSpPr>
+            <a:spLocks xmlns:a="http://schemas.openxmlformats.org/drawingml/2006/main" noGrp="1"/>
+          </p:cNvSpPr>
+          <p:nvPr/>
+        </p:nvSpPr>
+        <p:spPr>
+          <a:xfrm xmlns:a="http://schemas.openxmlformats.org/drawingml/2006/main">
+            <a:off x="685800" y="2266950"/>
+            <a:ext cx="9982200" cy="19050"/>
           </a:xfrm>
           <a:prstGeom xmlns:a="http://schemas.openxmlformats.org/drawingml/2006/main" prst="rect">
             <a:avLst/>
           </a:prstGeom>
           <a:solidFill xmlns:a="http://schemas.openxmlformats.org/drawingml/2006/main">
-            <a:srgbClr val="DCEFF8"/>
+            <a:srgbClr val="0E74BA"/>
           </a:solidFill>
           <a:ln xmlns:a="http://schemas.openxmlformats.org/drawingml/2006/main" w="0">
             <a:noFill/>
@@ -2919,162 +3799,50 @@
       </p:sp>
       <p:sp>
         <p:nvSpPr>
-          <p:cNvPr id="4" name="">
-            <a:extLst xmlns:a="http://schemas.openxmlformats.org/drawingml/2006/main">
-              <a:ext uri="{FF2B5EF4-FFF2-40B4-BE49-F238E27FC236}">
-                <a16:creationId xmlns:a16="http://schemas.microsoft.com/office/drawing/2014/main" id="{54F1247B-EBE1-454D-B713-144F55C2CDA9}"/>
-              </a:ext>
-            </a:extLst>
-          </p:cNvPr>
-          <p:cNvSpPr>
-            <a:spLocks xmlns:a="http://schemas.openxmlformats.org/drawingml/2006/main" noGrp="1"/>
-          </p:cNvSpPr>
-          <p:nvPr/>
-        </p:nvSpPr>
-        <p:spPr>
-          <a:xfrm xmlns:a="http://schemas.openxmlformats.org/drawingml/2006/main">
-            <a:off x="4191000" y="2000250"/>
-            <a:ext cx="3143250" cy="2381250"/>
-          </a:xfrm>
-          <a:prstGeom xmlns:a="http://schemas.openxmlformats.org/drawingml/2006/main" prst="rect">
-            <a:avLst/>
-          </a:prstGeom>
-          <a:solidFill xmlns:a="http://schemas.openxmlformats.org/drawingml/2006/main">
-            <a:srgbClr val="FFF1E8"/>
-          </a:solidFill>
-          <a:ln xmlns:a="http://schemas.openxmlformats.org/drawingml/2006/main" w="0">
-            <a:noFill/>
-            <a:prstDash val="solid"/>
-          </a:ln>
-        </p:spPr>
-      </p:sp>
-      <p:sp>
-        <p:nvSpPr>
-          <p:cNvPr id="5" name="">
-            <a:extLst xmlns:a="http://schemas.openxmlformats.org/drawingml/2006/main">
-              <a:ext uri="{FF2B5EF4-FFF2-40B4-BE49-F238E27FC236}">
-                <a16:creationId xmlns:a16="http://schemas.microsoft.com/office/drawing/2014/main" id="{7BB0D387-D2AC-45AA-BACC-BA48A7DFE500}"/>
-              </a:ext>
-            </a:extLst>
-          </p:cNvPr>
-          <p:cNvSpPr>
-            <a:spLocks xmlns:a="http://schemas.openxmlformats.org/drawingml/2006/main" noGrp="1"/>
-          </p:cNvSpPr>
-          <p:nvPr/>
-        </p:nvSpPr>
-        <p:spPr>
-          <a:xfrm xmlns:a="http://schemas.openxmlformats.org/drawingml/2006/main">
-            <a:off x="7696200" y="2000250"/>
-            <a:ext cx="3143250" cy="2381250"/>
-          </a:xfrm>
-          <a:prstGeom xmlns:a="http://schemas.openxmlformats.org/drawingml/2006/main" prst="rect">
-            <a:avLst/>
-          </a:prstGeom>
-          <a:solidFill xmlns:a="http://schemas.openxmlformats.org/drawingml/2006/main">
-            <a:srgbClr val="E8F4EE"/>
-          </a:solidFill>
-          <a:ln xmlns:a="http://schemas.openxmlformats.org/drawingml/2006/main" w="0">
-            <a:noFill/>
-            <a:prstDash val="solid"/>
-          </a:ln>
-        </p:spPr>
-      </p:sp>
-      <p:sp>
-        <p:nvSpPr>
-          <p:cNvPr id="6" name="">
-            <a:extLst xmlns:a="http://schemas.openxmlformats.org/drawingml/2006/main">
-              <a:ext uri="{FF2B5EF4-FFF2-40B4-BE49-F238E27FC236}">
-                <a16:creationId xmlns:a16="http://schemas.microsoft.com/office/drawing/2014/main" id="{33B6A9A5-2779-4CB7-84D7-57F05D30214E}"/>
-              </a:ext>
-            </a:extLst>
-          </p:cNvPr>
-          <p:cNvSpPr>
-            <a:spLocks xmlns:a="http://schemas.openxmlformats.org/drawingml/2006/main" noGrp="1"/>
-          </p:cNvSpPr>
-          <p:nvPr/>
-        </p:nvSpPr>
-        <p:spPr>
-          <a:xfrm xmlns:a="http://schemas.openxmlformats.org/drawingml/2006/main">
-            <a:off x="952500" y="2286000"/>
-            <a:ext cx="2476500" cy="381000"/>
-          </a:xfrm>
-          <a:prstGeom xmlns:a="http://schemas.openxmlformats.org/drawingml/2006/main" prst="rect">
-            <a:avLst/>
-          </a:prstGeom>
-          <a:noFill xmlns:a="http://schemas.openxmlformats.org/drawingml/2006/main"/>
-          <a:ln xmlns:a="http://schemas.openxmlformats.org/drawingml/2006/main" w="0">
-            <a:noFill/>
-            <a:prstDash val="solid"/>
-          </a:ln>
-        </p:spPr>
-        <p:txBody>
-          <a:bodyPr xmlns:a="http://schemas.openxmlformats.org/drawingml/2006/main"/>
-          <a:lstStyle xmlns:a="http://schemas.openxmlformats.org/drawingml/2006/main"/>
-          <a:p xmlns:a="http://schemas.openxmlformats.org/drawingml/2006/main">
-            <a:pPr algn="l">
-              <a:defRPr sz="2250" b="1">
-                <a:solidFill>
-                  <a:srgbClr val="073F63"/>
-                </a:solidFill>
-              </a:defRPr>
-            </a:pPr>
-            <a:r>
-              <a:rPr sz="2250" b="1">
-                <a:solidFill>
-                  <a:srgbClr val="073F63"/>
-                </a:solidFill>
-              </a:rPr>
-              <a:t>Qualidade</a:t>
-            </a:r>
-          </a:p>
-        </p:txBody>
-      </p:sp>
-      <p:sp>
-        <p:nvSpPr>
           <p:cNvPr id="7" name="">
             <a:extLst xmlns:a="http://schemas.openxmlformats.org/drawingml/2006/main">
               <a:ext uri="{FF2B5EF4-FFF2-40B4-BE49-F238E27FC236}">
-                <a16:creationId xmlns:a16="http://schemas.microsoft.com/office/drawing/2014/main" id="{0AA7547A-62C0-403F-ADF7-82597ACEC07F}"/>
-              </a:ext>
-            </a:extLst>
-          </p:cNvPr>
-          <p:cNvSpPr>
-            <a:spLocks xmlns:a="http://schemas.openxmlformats.org/drawingml/2006/main" noGrp="1"/>
-          </p:cNvSpPr>
-          <p:nvPr/>
-        </p:nvSpPr>
-        <p:spPr>
-          <a:xfrm xmlns:a="http://schemas.openxmlformats.org/drawingml/2006/main">
-            <a:off x="952500" y="2952750"/>
-            <a:ext cx="2381250" cy="838200"/>
-          </a:xfrm>
-          <a:prstGeom xmlns:a="http://schemas.openxmlformats.org/drawingml/2006/main" prst="rect">
-            <a:avLst/>
-          </a:prstGeom>
-          <a:noFill xmlns:a="http://schemas.openxmlformats.org/drawingml/2006/main"/>
-          <a:ln xmlns:a="http://schemas.openxmlformats.org/drawingml/2006/main" w="0">
-            <a:noFill/>
-            <a:prstDash val="solid"/>
-          </a:ln>
-        </p:spPr>
-        <p:txBody>
-          <a:bodyPr xmlns:a="http://schemas.openxmlformats.org/drawingml/2006/main"/>
-          <a:lstStyle xmlns:a="http://schemas.openxmlformats.org/drawingml/2006/main"/>
-          <a:p xmlns:a="http://schemas.openxmlformats.org/drawingml/2006/main">
-            <a:pPr algn="l">
-              <a:defRPr sz="1500" b="0">
-                <a:solidFill>
-                  <a:srgbClr val="52606B"/>
-                </a:solidFill>
-              </a:defRPr>
-            </a:pPr>
-            <a:r>
-              <a:rPr sz="1500" b="0">
-                <a:solidFill>
-                  <a:srgbClr val="52606B"/>
-                </a:solidFill>
-              </a:rPr>
-              <a:t>Textos mais consistentes, melhor briefing, revisão crítica e menos desalinhamento.</a:t>
+                <a16:creationId xmlns:a16="http://schemas.microsoft.com/office/drawing/2014/main" id="{9BB271FB-D560-4DC4-A874-008AA8919A87}"/>
+              </a:ext>
+            </a:extLst>
+          </p:cNvPr>
+          <p:cNvSpPr>
+            <a:spLocks xmlns:a="http://schemas.openxmlformats.org/drawingml/2006/main" noGrp="1"/>
+          </p:cNvSpPr>
+          <p:nvPr/>
+        </p:nvSpPr>
+        <p:spPr>
+          <a:xfrm xmlns:a="http://schemas.openxmlformats.org/drawingml/2006/main">
+            <a:off x="838200" y="2571750"/>
+            <a:ext cx="2190750" cy="266700"/>
+          </a:xfrm>
+          <a:prstGeom xmlns:a="http://schemas.openxmlformats.org/drawingml/2006/main" prst="rect">
+            <a:avLst/>
+          </a:prstGeom>
+          <a:noFill xmlns:a="http://schemas.openxmlformats.org/drawingml/2006/main"/>
+          <a:ln xmlns:a="http://schemas.openxmlformats.org/drawingml/2006/main" w="0">
+            <a:noFill/>
+            <a:prstDash val="solid"/>
+          </a:ln>
+        </p:spPr>
+        <p:txBody>
+          <a:bodyPr xmlns:a="http://schemas.openxmlformats.org/drawingml/2006/main"/>
+          <a:lstStyle xmlns:a="http://schemas.openxmlformats.org/drawingml/2006/main"/>
+          <a:p xmlns:a="http://schemas.openxmlformats.org/drawingml/2006/main">
+            <a:pPr algn="l">
+              <a:defRPr sz="1350" b="1">
+                <a:solidFill>
+                  <a:srgbClr val="0E74BA"/>
+                </a:solidFill>
+              </a:defRPr>
+            </a:pPr>
+            <a:r>
+              <a:rPr sz="1350" b="1">
+                <a:solidFill>
+                  <a:srgbClr val="0E74BA"/>
+                </a:solidFill>
+              </a:rPr>
+              <a:t>Perplexity</a:t>
             </a:r>
           </a:p>
         </p:txBody>
@@ -3084,47 +3852,47 @@
           <p:cNvPr id="8" name="">
             <a:extLst xmlns:a="http://schemas.openxmlformats.org/drawingml/2006/main">
               <a:ext uri="{FF2B5EF4-FFF2-40B4-BE49-F238E27FC236}">
-                <a16:creationId xmlns:a16="http://schemas.microsoft.com/office/drawing/2014/main" id="{F12E19FE-701D-46D7-A9FC-F38EB7D65D40}"/>
-              </a:ext>
-            </a:extLst>
-          </p:cNvPr>
-          <p:cNvSpPr>
-            <a:spLocks xmlns:a="http://schemas.openxmlformats.org/drawingml/2006/main" noGrp="1"/>
-          </p:cNvSpPr>
-          <p:nvPr/>
-        </p:nvSpPr>
-        <p:spPr>
-          <a:xfrm xmlns:a="http://schemas.openxmlformats.org/drawingml/2006/main">
-            <a:off x="4457700" y="2286000"/>
-            <a:ext cx="2476500" cy="381000"/>
-          </a:xfrm>
-          <a:prstGeom xmlns:a="http://schemas.openxmlformats.org/drawingml/2006/main" prst="rect">
-            <a:avLst/>
-          </a:prstGeom>
-          <a:noFill xmlns:a="http://schemas.openxmlformats.org/drawingml/2006/main"/>
-          <a:ln xmlns:a="http://schemas.openxmlformats.org/drawingml/2006/main" w="0">
-            <a:noFill/>
-            <a:prstDash val="solid"/>
-          </a:ln>
-        </p:spPr>
-        <p:txBody>
-          <a:bodyPr xmlns:a="http://schemas.openxmlformats.org/drawingml/2006/main"/>
-          <a:lstStyle xmlns:a="http://schemas.openxmlformats.org/drawingml/2006/main"/>
-          <a:p xmlns:a="http://schemas.openxmlformats.org/drawingml/2006/main">
-            <a:pPr algn="l">
-              <a:defRPr sz="2250" b="1">
-                <a:solidFill>
-                  <a:srgbClr val="EF7A1D"/>
-                </a:solidFill>
-              </a:defRPr>
-            </a:pPr>
-            <a:r>
-              <a:rPr sz="2250" b="1">
-                <a:solidFill>
-                  <a:srgbClr val="EF7A1D"/>
-                </a:solidFill>
-              </a:rPr>
-              <a:t>Velocidade</a:t>
+                <a16:creationId xmlns:a16="http://schemas.microsoft.com/office/drawing/2014/main" id="{1BA133C5-D6EF-4B6F-8C75-71B902C62121}"/>
+              </a:ext>
+            </a:extLst>
+          </p:cNvPr>
+          <p:cNvSpPr>
+            <a:spLocks xmlns:a="http://schemas.openxmlformats.org/drawingml/2006/main" noGrp="1"/>
+          </p:cNvSpPr>
+          <p:nvPr/>
+        </p:nvSpPr>
+        <p:spPr>
+          <a:xfrm xmlns:a="http://schemas.openxmlformats.org/drawingml/2006/main">
+            <a:off x="3333750" y="2552700"/>
+            <a:ext cx="3143250" cy="342900"/>
+          </a:xfrm>
+          <a:prstGeom xmlns:a="http://schemas.openxmlformats.org/drawingml/2006/main" prst="rect">
+            <a:avLst/>
+          </a:prstGeom>
+          <a:noFill xmlns:a="http://schemas.openxmlformats.org/drawingml/2006/main"/>
+          <a:ln xmlns:a="http://schemas.openxmlformats.org/drawingml/2006/main" w="0">
+            <a:noFill/>
+            <a:prstDash val="solid"/>
+          </a:ln>
+        </p:spPr>
+        <p:txBody>
+          <a:bodyPr xmlns:a="http://schemas.openxmlformats.org/drawingml/2006/main"/>
+          <a:lstStyle xmlns:a="http://schemas.openxmlformats.org/drawingml/2006/main"/>
+          <a:p xmlns:a="http://schemas.openxmlformats.org/drawingml/2006/main">
+            <a:pPr algn="l">
+              <a:defRPr sz="1275" b="0">
+                <a:solidFill>
+                  <a:srgbClr val="172026"/>
+                </a:solidFill>
+              </a:defRPr>
+            </a:pPr>
+            <a:r>
+              <a:rPr sz="1275" b="0">
+                <a:solidFill>
+                  <a:srgbClr val="172026"/>
+                </a:solidFill>
+              </a:rPr>
+              <a:t>pesquisa com fontes e contexto externo</a:t>
             </a:r>
           </a:p>
         </p:txBody>
@@ -3134,47 +3902,47 @@
           <p:cNvPr id="9" name="">
             <a:extLst xmlns:a="http://schemas.openxmlformats.org/drawingml/2006/main">
               <a:ext uri="{FF2B5EF4-FFF2-40B4-BE49-F238E27FC236}">
-                <a16:creationId xmlns:a16="http://schemas.microsoft.com/office/drawing/2014/main" id="{6FBC7421-2BFE-40BB-A9A4-552FB9572179}"/>
-              </a:ext>
-            </a:extLst>
-          </p:cNvPr>
-          <p:cNvSpPr>
-            <a:spLocks xmlns:a="http://schemas.openxmlformats.org/drawingml/2006/main" noGrp="1"/>
-          </p:cNvSpPr>
-          <p:nvPr/>
-        </p:nvSpPr>
-        <p:spPr>
-          <a:xfrm xmlns:a="http://schemas.openxmlformats.org/drawingml/2006/main">
-            <a:off x="4457700" y="2952750"/>
-            <a:ext cx="2381250" cy="838200"/>
-          </a:xfrm>
-          <a:prstGeom xmlns:a="http://schemas.openxmlformats.org/drawingml/2006/main" prst="rect">
-            <a:avLst/>
-          </a:prstGeom>
-          <a:noFill xmlns:a="http://schemas.openxmlformats.org/drawingml/2006/main"/>
-          <a:ln xmlns:a="http://schemas.openxmlformats.org/drawingml/2006/main" w="0">
-            <a:noFill/>
-            <a:prstDash val="solid"/>
-          </a:ln>
-        </p:spPr>
-        <p:txBody>
-          <a:bodyPr xmlns:a="http://schemas.openxmlformats.org/drawingml/2006/main"/>
-          <a:lstStyle xmlns:a="http://schemas.openxmlformats.org/drawingml/2006/main"/>
-          <a:p xmlns:a="http://schemas.openxmlformats.org/drawingml/2006/main">
-            <a:pPr algn="l">
-              <a:defRPr sz="1500" b="0">
-                <a:solidFill>
-                  <a:srgbClr val="52606B"/>
-                </a:solidFill>
-              </a:defRPr>
-            </a:pPr>
-            <a:r>
-              <a:rPr sz="1500" b="0">
-                <a:solidFill>
-                  <a:srgbClr val="52606B"/>
-                </a:solidFill>
-              </a:rPr>
-              <a:t>Primeira versão, variações e ajustes antes de acionar fornecedor.</a:t>
+                <a16:creationId xmlns:a16="http://schemas.microsoft.com/office/drawing/2014/main" id="{6D806BB4-AAA6-415C-B5FC-081359F13805}"/>
+              </a:ext>
+            </a:extLst>
+          </p:cNvPr>
+          <p:cNvSpPr>
+            <a:spLocks xmlns:a="http://schemas.openxmlformats.org/drawingml/2006/main" noGrp="1"/>
+          </p:cNvSpPr>
+          <p:nvPr/>
+        </p:nvSpPr>
+        <p:spPr>
+          <a:xfrm xmlns:a="http://schemas.openxmlformats.org/drawingml/2006/main">
+            <a:off x="7000875" y="2552700"/>
+            <a:ext cx="3619500" cy="342900"/>
+          </a:xfrm>
+          <a:prstGeom xmlns:a="http://schemas.openxmlformats.org/drawingml/2006/main" prst="rect">
+            <a:avLst/>
+          </a:prstGeom>
+          <a:noFill xmlns:a="http://schemas.openxmlformats.org/drawingml/2006/main"/>
+          <a:ln xmlns:a="http://schemas.openxmlformats.org/drawingml/2006/main" w="0">
+            <a:noFill/>
+            <a:prstDash val="solid"/>
+          </a:ln>
+        </p:spPr>
+        <p:txBody>
+          <a:bodyPr xmlns:a="http://schemas.openxmlformats.org/drawingml/2006/main"/>
+          <a:lstStyle xmlns:a="http://schemas.openxmlformats.org/drawingml/2006/main"/>
+          <a:p xmlns:a="http://schemas.openxmlformats.org/drawingml/2006/main">
+            <a:pPr algn="l">
+              <a:defRPr sz="1275" b="0">
+                <a:solidFill>
+                  <a:srgbClr val="52606B"/>
+                </a:solidFill>
+              </a:defRPr>
+            </a:pPr>
+            <a:r>
+              <a:rPr sz="1275" b="0">
+                <a:solidFill>
+                  <a:srgbClr val="52606B"/>
+                </a:solidFill>
+              </a:rPr>
+              <a:t>menos risco factual em release, pauta e material executivo</a:t>
             </a:r>
           </a:p>
         </p:txBody>
@@ -3184,119 +3952,19 @@
           <p:cNvPr id="10" name="">
             <a:extLst xmlns:a="http://schemas.openxmlformats.org/drawingml/2006/main">
               <a:ext uri="{FF2B5EF4-FFF2-40B4-BE49-F238E27FC236}">
-                <a16:creationId xmlns:a16="http://schemas.microsoft.com/office/drawing/2014/main" id="{3B56E1D4-E8DD-49C2-B788-A3B1C906419E}"/>
-              </a:ext>
-            </a:extLst>
-          </p:cNvPr>
-          <p:cNvSpPr>
-            <a:spLocks xmlns:a="http://schemas.openxmlformats.org/drawingml/2006/main" noGrp="1"/>
-          </p:cNvSpPr>
-          <p:nvPr/>
-        </p:nvSpPr>
-        <p:spPr>
-          <a:xfrm xmlns:a="http://schemas.openxmlformats.org/drawingml/2006/main">
-            <a:off x="7962900" y="2286000"/>
-            <a:ext cx="2476500" cy="381000"/>
-          </a:xfrm>
-          <a:prstGeom xmlns:a="http://schemas.openxmlformats.org/drawingml/2006/main" prst="rect">
-            <a:avLst/>
-          </a:prstGeom>
-          <a:noFill xmlns:a="http://schemas.openxmlformats.org/drawingml/2006/main"/>
-          <a:ln xmlns:a="http://schemas.openxmlformats.org/drawingml/2006/main" w="0">
-            <a:noFill/>
-            <a:prstDash val="solid"/>
-          </a:ln>
-        </p:spPr>
-        <p:txBody>
-          <a:bodyPr xmlns:a="http://schemas.openxmlformats.org/drawingml/2006/main"/>
-          <a:lstStyle xmlns:a="http://schemas.openxmlformats.org/drawingml/2006/main"/>
-          <a:p xmlns:a="http://schemas.openxmlformats.org/drawingml/2006/main">
-            <a:pPr algn="l">
-              <a:defRPr sz="2250" b="1">
-                <a:solidFill>
-                  <a:srgbClr val="1D7A54"/>
-                </a:solidFill>
-              </a:defRPr>
-            </a:pPr>
-            <a:r>
-              <a:rPr sz="2250" b="1">
-                <a:solidFill>
-                  <a:srgbClr val="1D7A54"/>
-                </a:solidFill>
-              </a:rPr>
-              <a:t>Custo</a:t>
-            </a:r>
-          </a:p>
-        </p:txBody>
-      </p:sp>
-      <p:sp>
-        <p:nvSpPr>
-          <p:cNvPr id="11" name="">
-            <a:extLst xmlns:a="http://schemas.openxmlformats.org/drawingml/2006/main">
-              <a:ext uri="{FF2B5EF4-FFF2-40B4-BE49-F238E27FC236}">
-                <a16:creationId xmlns:a16="http://schemas.microsoft.com/office/drawing/2014/main" id="{B50D808B-BD9B-45FB-A61E-17D404BDB6F1}"/>
-              </a:ext>
-            </a:extLst>
-          </p:cNvPr>
-          <p:cNvSpPr>
-            <a:spLocks xmlns:a="http://schemas.openxmlformats.org/drawingml/2006/main" noGrp="1"/>
-          </p:cNvSpPr>
-          <p:nvPr/>
-        </p:nvSpPr>
-        <p:spPr>
-          <a:xfrm xmlns:a="http://schemas.openxmlformats.org/drawingml/2006/main">
-            <a:off x="7962900" y="2952750"/>
-            <a:ext cx="2381250" cy="838200"/>
-          </a:xfrm>
-          <a:prstGeom xmlns:a="http://schemas.openxmlformats.org/drawingml/2006/main" prst="rect">
-            <a:avLst/>
-          </a:prstGeom>
-          <a:noFill xmlns:a="http://schemas.openxmlformats.org/drawingml/2006/main"/>
-          <a:ln xmlns:a="http://schemas.openxmlformats.org/drawingml/2006/main" w="0">
-            <a:noFill/>
-            <a:prstDash val="solid"/>
-          </a:ln>
-        </p:spPr>
-        <p:txBody>
-          <a:bodyPr xmlns:a="http://schemas.openxmlformats.org/drawingml/2006/main"/>
-          <a:lstStyle xmlns:a="http://schemas.openxmlformats.org/drawingml/2006/main"/>
-          <a:p xmlns:a="http://schemas.openxmlformats.org/drawingml/2006/main">
-            <a:pPr algn="l">
-              <a:defRPr sz="1500" b="0">
-                <a:solidFill>
-                  <a:srgbClr val="52606B"/>
-                </a:solidFill>
-              </a:defRPr>
-            </a:pPr>
-            <a:r>
-              <a:rPr sz="1500" b="0">
-                <a:solidFill>
-                  <a:srgbClr val="52606B"/>
-                </a:solidFill>
-              </a:rPr>
-              <a:t>Redução de custo unitário em entregas recorrentes e menos refação paga.</a:t>
-            </a:r>
-          </a:p>
-        </p:txBody>
-      </p:sp>
-      <p:sp>
-        <p:nvSpPr>
-          <p:cNvPr id="12" name="">
-            <a:extLst xmlns:a="http://schemas.openxmlformats.org/drawingml/2006/main">
-              <a:ext uri="{FF2B5EF4-FFF2-40B4-BE49-F238E27FC236}">
-                <a16:creationId xmlns:a16="http://schemas.microsoft.com/office/drawing/2014/main" id="{8969F716-FFF0-4283-BDB5-587E7BA5432F}"/>
-              </a:ext>
-            </a:extLst>
-          </p:cNvPr>
-          <p:cNvSpPr>
-            <a:spLocks xmlns:a="http://schemas.openxmlformats.org/drawingml/2006/main" noGrp="1"/>
-          </p:cNvSpPr>
-          <p:nvPr/>
-        </p:nvSpPr>
-        <p:spPr>
-          <a:xfrm xmlns:a="http://schemas.openxmlformats.org/drawingml/2006/main">
-            <a:off x="685800" y="4953000"/>
-            <a:ext cx="9886950" cy="9525"/>
+                <a16:creationId xmlns:a16="http://schemas.microsoft.com/office/drawing/2014/main" id="{0470FB60-873C-44D2-8C7F-F832D7B099BE}"/>
+              </a:ext>
+            </a:extLst>
+          </p:cNvPr>
+          <p:cNvSpPr>
+            <a:spLocks xmlns:a="http://schemas.openxmlformats.org/drawingml/2006/main" noGrp="1"/>
+          </p:cNvSpPr>
+          <p:nvPr/>
+        </p:nvSpPr>
+        <p:spPr>
+          <a:xfrm xmlns:a="http://schemas.openxmlformats.org/drawingml/2006/main">
+            <a:off x="685800" y="3000375"/>
+            <a:ext cx="9982200" cy="9525"/>
           </a:xfrm>
           <a:prstGeom xmlns:a="http://schemas.openxmlformats.org/drawingml/2006/main" prst="rect">
             <a:avLst/>
@@ -3312,110 +3980,915 @@
       </p:sp>
       <p:sp>
         <p:nvSpPr>
+          <p:cNvPr id="11" name="">
+            <a:extLst xmlns:a="http://schemas.openxmlformats.org/drawingml/2006/main">
+              <a:ext uri="{FF2B5EF4-FFF2-40B4-BE49-F238E27FC236}">
+                <a16:creationId xmlns:a16="http://schemas.microsoft.com/office/drawing/2014/main" id="{567AE934-A67C-4B37-A5B9-05AB2008D732}"/>
+              </a:ext>
+            </a:extLst>
+          </p:cNvPr>
+          <p:cNvSpPr>
+            <a:spLocks xmlns:a="http://schemas.openxmlformats.org/drawingml/2006/main" noGrp="1"/>
+          </p:cNvSpPr>
+          <p:nvPr/>
+        </p:nvSpPr>
+        <p:spPr>
+          <a:xfrm xmlns:a="http://schemas.openxmlformats.org/drawingml/2006/main">
+            <a:off x="838200" y="3095625"/>
+            <a:ext cx="2190750" cy="266700"/>
+          </a:xfrm>
+          <a:prstGeom xmlns:a="http://schemas.openxmlformats.org/drawingml/2006/main" prst="rect">
+            <a:avLst/>
+          </a:prstGeom>
+          <a:noFill xmlns:a="http://schemas.openxmlformats.org/drawingml/2006/main"/>
+          <a:ln xmlns:a="http://schemas.openxmlformats.org/drawingml/2006/main" w="0">
+            <a:noFill/>
+            <a:prstDash val="solid"/>
+          </a:ln>
+        </p:spPr>
+        <p:txBody>
+          <a:bodyPr xmlns:a="http://schemas.openxmlformats.org/drawingml/2006/main"/>
+          <a:lstStyle xmlns:a="http://schemas.openxmlformats.org/drawingml/2006/main"/>
+          <a:p xmlns:a="http://schemas.openxmlformats.org/drawingml/2006/main">
+            <a:pPr algn="l">
+              <a:defRPr sz="1350" b="1">
+                <a:solidFill>
+                  <a:srgbClr val="1D7A54"/>
+                </a:solidFill>
+              </a:defRPr>
+            </a:pPr>
+            <a:r>
+              <a:rPr sz="1350" b="1">
+                <a:solidFill>
+                  <a:srgbClr val="1D7A54"/>
+                </a:solidFill>
+              </a:rPr>
+              <a:t>DeepL</a:t>
+            </a:r>
+          </a:p>
+        </p:txBody>
+      </p:sp>
+      <p:sp>
+        <p:nvSpPr>
+          <p:cNvPr id="12" name="">
+            <a:extLst xmlns:a="http://schemas.openxmlformats.org/drawingml/2006/main">
+              <a:ext uri="{FF2B5EF4-FFF2-40B4-BE49-F238E27FC236}">
+                <a16:creationId xmlns:a16="http://schemas.microsoft.com/office/drawing/2014/main" id="{75DCA645-8653-4F09-8FF4-3E38DB963EC0}"/>
+              </a:ext>
+            </a:extLst>
+          </p:cNvPr>
+          <p:cNvSpPr>
+            <a:spLocks xmlns:a="http://schemas.openxmlformats.org/drawingml/2006/main" noGrp="1"/>
+          </p:cNvSpPr>
+          <p:nvPr/>
+        </p:nvSpPr>
+        <p:spPr>
+          <a:xfrm xmlns:a="http://schemas.openxmlformats.org/drawingml/2006/main">
+            <a:off x="3333750" y="3076575"/>
+            <a:ext cx="3143250" cy="342900"/>
+          </a:xfrm>
+          <a:prstGeom xmlns:a="http://schemas.openxmlformats.org/drawingml/2006/main" prst="rect">
+            <a:avLst/>
+          </a:prstGeom>
+          <a:noFill xmlns:a="http://schemas.openxmlformats.org/drawingml/2006/main"/>
+          <a:ln xmlns:a="http://schemas.openxmlformats.org/drawingml/2006/main" w="0">
+            <a:noFill/>
+            <a:prstDash val="solid"/>
+          </a:ln>
+        </p:spPr>
+        <p:txBody>
+          <a:bodyPr xmlns:a="http://schemas.openxmlformats.org/drawingml/2006/main"/>
+          <a:lstStyle xmlns:a="http://schemas.openxmlformats.org/drawingml/2006/main"/>
+          <a:p xmlns:a="http://schemas.openxmlformats.org/drawingml/2006/main">
+            <a:pPr algn="l">
+              <a:defRPr sz="1275" b="0">
+                <a:solidFill>
+                  <a:srgbClr val="172026"/>
+                </a:solidFill>
+              </a:defRPr>
+            </a:pPr>
+            <a:r>
+              <a:rPr sz="1275" b="0">
+                <a:solidFill>
+                  <a:srgbClr val="172026"/>
+                </a:solidFill>
+              </a:rPr>
+              <a:t>tradução e glossário institucional</a:t>
+            </a:r>
+          </a:p>
+        </p:txBody>
+      </p:sp>
+      <p:sp>
+        <p:nvSpPr>
           <p:cNvPr id="13" name="">
             <a:extLst xmlns:a="http://schemas.openxmlformats.org/drawingml/2006/main">
               <a:ext uri="{FF2B5EF4-FFF2-40B4-BE49-F238E27FC236}">
-                <a16:creationId xmlns:a16="http://schemas.microsoft.com/office/drawing/2014/main" id="{80A7BD1B-A11A-4A89-B421-F75BE194DDFD}"/>
-              </a:ext>
-            </a:extLst>
-          </p:cNvPr>
-          <p:cNvSpPr>
-            <a:spLocks xmlns:a="http://schemas.openxmlformats.org/drawingml/2006/main" noGrp="1"/>
-          </p:cNvSpPr>
-          <p:nvPr/>
-        </p:nvSpPr>
-        <p:spPr>
-          <a:xfrm xmlns:a="http://schemas.openxmlformats.org/drawingml/2006/main">
-            <a:off x="685800" y="5257800"/>
-            <a:ext cx="1809750" cy="285750"/>
-          </a:xfrm>
-          <a:prstGeom xmlns:a="http://schemas.openxmlformats.org/drawingml/2006/main" prst="rect">
-            <a:avLst/>
-          </a:prstGeom>
-          <a:noFill xmlns:a="http://schemas.openxmlformats.org/drawingml/2006/main"/>
-          <a:ln xmlns:a="http://schemas.openxmlformats.org/drawingml/2006/main" w="0">
-            <a:noFill/>
-            <a:prstDash val="solid"/>
-          </a:ln>
-        </p:spPr>
-        <p:txBody>
-          <a:bodyPr xmlns:a="http://schemas.openxmlformats.org/drawingml/2006/main"/>
-          <a:lstStyle xmlns:a="http://schemas.openxmlformats.org/drawingml/2006/main"/>
-          <a:p xmlns:a="http://schemas.openxmlformats.org/drawingml/2006/main">
-            <a:pPr algn="l">
-              <a:defRPr sz="1725" b="1">
+                <a16:creationId xmlns:a16="http://schemas.microsoft.com/office/drawing/2014/main" id="{50AF3F70-4D50-48D1-9315-A59B7820DF36}"/>
+              </a:ext>
+            </a:extLst>
+          </p:cNvPr>
+          <p:cNvSpPr>
+            <a:spLocks xmlns:a="http://schemas.openxmlformats.org/drawingml/2006/main" noGrp="1"/>
+          </p:cNvSpPr>
+          <p:nvPr/>
+        </p:nvSpPr>
+        <p:spPr>
+          <a:xfrm xmlns:a="http://schemas.openxmlformats.org/drawingml/2006/main">
+            <a:off x="7000875" y="3076575"/>
+            <a:ext cx="3619500" cy="342900"/>
+          </a:xfrm>
+          <a:prstGeom xmlns:a="http://schemas.openxmlformats.org/drawingml/2006/main" prst="rect">
+            <a:avLst/>
+          </a:prstGeom>
+          <a:noFill xmlns:a="http://schemas.openxmlformats.org/drawingml/2006/main"/>
+          <a:ln xmlns:a="http://schemas.openxmlformats.org/drawingml/2006/main" w="0">
+            <a:noFill/>
+            <a:prstDash val="solid"/>
+          </a:ln>
+        </p:spPr>
+        <p:txBody>
+          <a:bodyPr xmlns:a="http://schemas.openxmlformats.org/drawingml/2006/main"/>
+          <a:lstStyle xmlns:a="http://schemas.openxmlformats.org/drawingml/2006/main"/>
+          <a:p xmlns:a="http://schemas.openxmlformats.org/drawingml/2006/main">
+            <a:pPr algn="l">
+              <a:defRPr sz="1275" b="0">
+                <a:solidFill>
+                  <a:srgbClr val="52606B"/>
+                </a:solidFill>
+              </a:defRPr>
+            </a:pPr>
+            <a:r>
+              <a:rPr sz="1275" b="0">
+                <a:solidFill>
+                  <a:srgbClr val="52606B"/>
+                </a:solidFill>
+              </a:rPr>
+              <a:t>consistência terminológica e adaptação internacional</a:t>
+            </a:r>
+          </a:p>
+        </p:txBody>
+      </p:sp>
+      <p:sp>
+        <p:nvSpPr>
+          <p:cNvPr id="14" name="">
+            <a:extLst xmlns:a="http://schemas.openxmlformats.org/drawingml/2006/main">
+              <a:ext uri="{FF2B5EF4-FFF2-40B4-BE49-F238E27FC236}">
+                <a16:creationId xmlns:a16="http://schemas.microsoft.com/office/drawing/2014/main" id="{E851402C-5F53-4FA0-A6EA-DAB5F2B9605D}"/>
+              </a:ext>
+            </a:extLst>
+          </p:cNvPr>
+          <p:cNvSpPr>
+            <a:spLocks xmlns:a="http://schemas.openxmlformats.org/drawingml/2006/main" noGrp="1"/>
+          </p:cNvSpPr>
+          <p:nvPr/>
+        </p:nvSpPr>
+        <p:spPr>
+          <a:xfrm xmlns:a="http://schemas.openxmlformats.org/drawingml/2006/main">
+            <a:off x="685800" y="3524250"/>
+            <a:ext cx="9982200" cy="9525"/>
+          </a:xfrm>
+          <a:prstGeom xmlns:a="http://schemas.openxmlformats.org/drawingml/2006/main" prst="rect">
+            <a:avLst/>
+          </a:prstGeom>
+          <a:solidFill xmlns:a="http://schemas.openxmlformats.org/drawingml/2006/main">
+            <a:srgbClr val="D6DDE3"/>
+          </a:solidFill>
+          <a:ln xmlns:a="http://schemas.openxmlformats.org/drawingml/2006/main" w="0">
+            <a:noFill/>
+            <a:prstDash val="solid"/>
+          </a:ln>
+        </p:spPr>
+      </p:sp>
+      <p:sp>
+        <p:nvSpPr>
+          <p:cNvPr id="15" name="">
+            <a:extLst xmlns:a="http://schemas.openxmlformats.org/drawingml/2006/main">
+              <a:ext uri="{FF2B5EF4-FFF2-40B4-BE49-F238E27FC236}">
+                <a16:creationId xmlns:a16="http://schemas.microsoft.com/office/drawing/2014/main" id="{3AEC6D3E-4B57-451D-B6E3-E423F12CE035}"/>
+              </a:ext>
+            </a:extLst>
+          </p:cNvPr>
+          <p:cNvSpPr>
+            <a:spLocks xmlns:a="http://schemas.openxmlformats.org/drawingml/2006/main" noGrp="1"/>
+          </p:cNvSpPr>
+          <p:nvPr/>
+        </p:nvSpPr>
+        <p:spPr>
+          <a:xfrm xmlns:a="http://schemas.openxmlformats.org/drawingml/2006/main">
+            <a:off x="838200" y="3619500"/>
+            <a:ext cx="2190750" cy="266700"/>
+          </a:xfrm>
+          <a:prstGeom xmlns:a="http://schemas.openxmlformats.org/drawingml/2006/main" prst="rect">
+            <a:avLst/>
+          </a:prstGeom>
+          <a:noFill xmlns:a="http://schemas.openxmlformats.org/drawingml/2006/main"/>
+          <a:ln xmlns:a="http://schemas.openxmlformats.org/drawingml/2006/main" w="0">
+            <a:noFill/>
+            <a:prstDash val="solid"/>
+          </a:ln>
+        </p:spPr>
+        <p:txBody>
+          <a:bodyPr xmlns:a="http://schemas.openxmlformats.org/drawingml/2006/main"/>
+          <a:lstStyle xmlns:a="http://schemas.openxmlformats.org/drawingml/2006/main"/>
+          <a:p xmlns:a="http://schemas.openxmlformats.org/drawingml/2006/main">
+            <a:pPr algn="l">
+              <a:defRPr sz="1350" b="1">
+                <a:solidFill>
+                  <a:srgbClr val="EF7A1D"/>
+                </a:solidFill>
+              </a:defRPr>
+            </a:pPr>
+            <a:r>
+              <a:rPr sz="1350" b="1">
+                <a:solidFill>
+                  <a:srgbClr val="EF7A1D"/>
+                </a:solidFill>
+              </a:rPr>
+              <a:t>ElevenLabs</a:t>
+            </a:r>
+          </a:p>
+        </p:txBody>
+      </p:sp>
+      <p:sp>
+        <p:nvSpPr>
+          <p:cNvPr id="16" name="">
+            <a:extLst xmlns:a="http://schemas.openxmlformats.org/drawingml/2006/main">
+              <a:ext uri="{FF2B5EF4-FFF2-40B4-BE49-F238E27FC236}">
+                <a16:creationId xmlns:a16="http://schemas.microsoft.com/office/drawing/2014/main" id="{1BD57425-6B91-4261-B3FF-92AD722084C0}"/>
+              </a:ext>
+            </a:extLst>
+          </p:cNvPr>
+          <p:cNvSpPr>
+            <a:spLocks xmlns:a="http://schemas.openxmlformats.org/drawingml/2006/main" noGrp="1"/>
+          </p:cNvSpPr>
+          <p:nvPr/>
+        </p:nvSpPr>
+        <p:spPr>
+          <a:xfrm xmlns:a="http://schemas.openxmlformats.org/drawingml/2006/main">
+            <a:off x="3333750" y="3600450"/>
+            <a:ext cx="3143250" cy="342900"/>
+          </a:xfrm>
+          <a:prstGeom xmlns:a="http://schemas.openxmlformats.org/drawingml/2006/main" prst="rect">
+            <a:avLst/>
+          </a:prstGeom>
+          <a:noFill xmlns:a="http://schemas.openxmlformats.org/drawingml/2006/main"/>
+          <a:ln xmlns:a="http://schemas.openxmlformats.org/drawingml/2006/main" w="0">
+            <a:noFill/>
+            <a:prstDash val="solid"/>
+          </a:ln>
+        </p:spPr>
+        <p:txBody>
+          <a:bodyPr xmlns:a="http://schemas.openxmlformats.org/drawingml/2006/main"/>
+          <a:lstStyle xmlns:a="http://schemas.openxmlformats.org/drawingml/2006/main"/>
+          <a:p xmlns:a="http://schemas.openxmlformats.org/drawingml/2006/main">
+            <a:pPr algn="l">
+              <a:defRPr sz="1275" b="0">
                 <a:solidFill>
                   <a:srgbClr val="172026"/>
                 </a:solidFill>
               </a:defRPr>
             </a:pPr>
             <a:r>
-              <a:rPr sz="1725" b="1">
+              <a:rPr sz="1275" b="0">
                 <a:solidFill>
                   <a:srgbClr val="172026"/>
                 </a:solidFill>
               </a:rPr>
-              <a:t>Referência</a:t>
-            </a:r>
-          </a:p>
-        </p:txBody>
-      </p:sp>
-      <p:sp>
-        <p:nvSpPr>
-          <p:cNvPr id="14" name="">
-            <a:extLst xmlns:a="http://schemas.openxmlformats.org/drawingml/2006/main">
-              <a:ext uri="{FF2B5EF4-FFF2-40B4-BE49-F238E27FC236}">
-                <a16:creationId xmlns:a16="http://schemas.microsoft.com/office/drawing/2014/main" id="{176E7A6F-8D81-4A82-BCF8-691B55521B41}"/>
-              </a:ext>
-            </a:extLst>
-          </p:cNvPr>
-          <p:cNvSpPr>
-            <a:spLocks xmlns:a="http://schemas.openxmlformats.org/drawingml/2006/main" noGrp="1"/>
-          </p:cNvSpPr>
-          <p:nvPr/>
-        </p:nvSpPr>
-        <p:spPr>
-          <a:xfrm xmlns:a="http://schemas.openxmlformats.org/drawingml/2006/main">
-            <a:off x="2762250" y="5219700"/>
-            <a:ext cx="7810500" cy="533400"/>
-          </a:xfrm>
-          <a:prstGeom xmlns:a="http://schemas.openxmlformats.org/drawingml/2006/main" prst="rect">
-            <a:avLst/>
-          </a:prstGeom>
-          <a:noFill xmlns:a="http://schemas.openxmlformats.org/drawingml/2006/main"/>
-          <a:ln xmlns:a="http://schemas.openxmlformats.org/drawingml/2006/main" w="0">
-            <a:noFill/>
-            <a:prstDash val="solid"/>
-          </a:ln>
-        </p:spPr>
-        <p:txBody>
-          <a:bodyPr xmlns:a="http://schemas.openxmlformats.org/drawingml/2006/main"/>
-          <a:lstStyle xmlns:a="http://schemas.openxmlformats.org/drawingml/2006/main"/>
-          <a:p xmlns:a="http://schemas.openxmlformats.org/drawingml/2006/main">
-            <a:pPr algn="l">
-              <a:defRPr sz="1500" b="0">
-                <a:solidFill>
-                  <a:srgbClr val="52606B"/>
-                </a:solidFill>
-              </a:defRPr>
-            </a:pPr>
-            <a:r>
-              <a:rPr sz="1500" b="0">
-                <a:solidFill>
-                  <a:srgbClr val="52606B"/>
-                </a:solidFill>
-              </a:rPr>
-              <a:t>Landing page com custo médio informado de R$ 14 mil ajuda a dimensionar o potencial de economia em páginas, campanhas, adaptações e ajustes simples.</a:t>
-            </a:r>
-          </a:p>
-        </p:txBody>
-      </p:sp>
-      <p:sp>
-        <p:nvSpPr>
-          <p:cNvPr id="15" name="">
-            <a:extLst xmlns:a="http://schemas.openxmlformats.org/drawingml/2006/main">
-              <a:ext uri="{FF2B5EF4-FFF2-40B4-BE49-F238E27FC236}">
-                <a16:creationId xmlns:a16="http://schemas.microsoft.com/office/drawing/2014/main" id="{7A3403A9-E9F8-42A4-BEA7-00C644643D1C}"/>
+              <a:t>narração, dublagem e voz sintética</a:t>
+            </a:r>
+          </a:p>
+        </p:txBody>
+      </p:sp>
+      <p:sp>
+        <p:nvSpPr>
+          <p:cNvPr id="17" name="">
+            <a:extLst xmlns:a="http://schemas.openxmlformats.org/drawingml/2006/main">
+              <a:ext uri="{FF2B5EF4-FFF2-40B4-BE49-F238E27FC236}">
+                <a16:creationId xmlns:a16="http://schemas.microsoft.com/office/drawing/2014/main" id="{1CD6A88C-6876-446C-93EF-C483E9B42090}"/>
+              </a:ext>
+            </a:extLst>
+          </p:cNvPr>
+          <p:cNvSpPr>
+            <a:spLocks xmlns:a="http://schemas.openxmlformats.org/drawingml/2006/main" noGrp="1"/>
+          </p:cNvSpPr>
+          <p:nvPr/>
+        </p:nvSpPr>
+        <p:spPr>
+          <a:xfrm xmlns:a="http://schemas.openxmlformats.org/drawingml/2006/main">
+            <a:off x="7000875" y="3600450"/>
+            <a:ext cx="3619500" cy="342900"/>
+          </a:xfrm>
+          <a:prstGeom xmlns:a="http://schemas.openxmlformats.org/drawingml/2006/main" prst="rect">
+            <a:avLst/>
+          </a:prstGeom>
+          <a:noFill xmlns:a="http://schemas.openxmlformats.org/drawingml/2006/main"/>
+          <a:ln xmlns:a="http://schemas.openxmlformats.org/drawingml/2006/main" w="0">
+            <a:noFill/>
+            <a:prstDash val="solid"/>
+          </a:ln>
+        </p:spPr>
+        <p:txBody>
+          <a:bodyPr xmlns:a="http://schemas.openxmlformats.org/drawingml/2006/main"/>
+          <a:lstStyle xmlns:a="http://schemas.openxmlformats.org/drawingml/2006/main"/>
+          <a:p xmlns:a="http://schemas.openxmlformats.org/drawingml/2006/main">
+            <a:pPr algn="l">
+              <a:defRPr sz="1275" b="0">
+                <a:solidFill>
+                  <a:srgbClr val="52606B"/>
+                </a:solidFill>
+              </a:defRPr>
+            </a:pPr>
+            <a:r>
+              <a:rPr sz="1275" b="0">
+                <a:solidFill>
+                  <a:srgbClr val="52606B"/>
+                </a:solidFill>
+              </a:rPr>
+              <a:t>áudio premium para vídeos, versões e campanhas</a:t>
+            </a:r>
+          </a:p>
+        </p:txBody>
+      </p:sp>
+      <p:sp>
+        <p:nvSpPr>
+          <p:cNvPr id="18" name="">
+            <a:extLst xmlns:a="http://schemas.openxmlformats.org/drawingml/2006/main">
+              <a:ext uri="{FF2B5EF4-FFF2-40B4-BE49-F238E27FC236}">
+                <a16:creationId xmlns:a16="http://schemas.microsoft.com/office/drawing/2014/main" id="{2A600074-7D19-403E-8E35-BFC9B26242CA}"/>
+              </a:ext>
+            </a:extLst>
+          </p:cNvPr>
+          <p:cNvSpPr>
+            <a:spLocks xmlns:a="http://schemas.openxmlformats.org/drawingml/2006/main" noGrp="1"/>
+          </p:cNvSpPr>
+          <p:nvPr/>
+        </p:nvSpPr>
+        <p:spPr>
+          <a:xfrm xmlns:a="http://schemas.openxmlformats.org/drawingml/2006/main">
+            <a:off x="685800" y="4048125"/>
+            <a:ext cx="9982200" cy="9525"/>
+          </a:xfrm>
+          <a:prstGeom xmlns:a="http://schemas.openxmlformats.org/drawingml/2006/main" prst="rect">
+            <a:avLst/>
+          </a:prstGeom>
+          <a:solidFill xmlns:a="http://schemas.openxmlformats.org/drawingml/2006/main">
+            <a:srgbClr val="D6DDE3"/>
+          </a:solidFill>
+          <a:ln xmlns:a="http://schemas.openxmlformats.org/drawingml/2006/main" w="0">
+            <a:noFill/>
+            <a:prstDash val="solid"/>
+          </a:ln>
+        </p:spPr>
+      </p:sp>
+      <p:sp>
+        <p:nvSpPr>
+          <p:cNvPr id="19" name="">
+            <a:extLst xmlns:a="http://schemas.openxmlformats.org/drawingml/2006/main">
+              <a:ext uri="{FF2B5EF4-FFF2-40B4-BE49-F238E27FC236}">
+                <a16:creationId xmlns:a16="http://schemas.microsoft.com/office/drawing/2014/main" id="{B9BBC0BE-2B1C-4D02-9CDD-AFAEA2ECF08B}"/>
+              </a:ext>
+            </a:extLst>
+          </p:cNvPr>
+          <p:cNvSpPr>
+            <a:spLocks xmlns:a="http://schemas.openxmlformats.org/drawingml/2006/main" noGrp="1"/>
+          </p:cNvSpPr>
+          <p:nvPr/>
+        </p:nvSpPr>
+        <p:spPr>
+          <a:xfrm xmlns:a="http://schemas.openxmlformats.org/drawingml/2006/main">
+            <a:off x="838200" y="4143375"/>
+            <a:ext cx="2190750" cy="266700"/>
+          </a:xfrm>
+          <a:prstGeom xmlns:a="http://schemas.openxmlformats.org/drawingml/2006/main" prst="rect">
+            <a:avLst/>
+          </a:prstGeom>
+          <a:noFill xmlns:a="http://schemas.openxmlformats.org/drawingml/2006/main"/>
+          <a:ln xmlns:a="http://schemas.openxmlformats.org/drawingml/2006/main" w="0">
+            <a:noFill/>
+            <a:prstDash val="solid"/>
+          </a:ln>
+        </p:spPr>
+        <p:txBody>
+          <a:bodyPr xmlns:a="http://schemas.openxmlformats.org/drawingml/2006/main"/>
+          <a:lstStyle xmlns:a="http://schemas.openxmlformats.org/drawingml/2006/main"/>
+          <a:p xmlns:a="http://schemas.openxmlformats.org/drawingml/2006/main">
+            <a:pPr algn="l">
+              <a:defRPr sz="1350" b="1">
+                <a:solidFill>
+                  <a:srgbClr val="0E74BA"/>
+                </a:solidFill>
+              </a:defRPr>
+            </a:pPr>
+            <a:r>
+              <a:rPr sz="1350" b="1">
+                <a:solidFill>
+                  <a:srgbClr val="0E74BA"/>
+                </a:solidFill>
+              </a:rPr>
+              <a:t>Descript</a:t>
+            </a:r>
+          </a:p>
+        </p:txBody>
+      </p:sp>
+      <p:sp>
+        <p:nvSpPr>
+          <p:cNvPr id="20" name="">
+            <a:extLst xmlns:a="http://schemas.openxmlformats.org/drawingml/2006/main">
+              <a:ext uri="{FF2B5EF4-FFF2-40B4-BE49-F238E27FC236}">
+                <a16:creationId xmlns:a16="http://schemas.microsoft.com/office/drawing/2014/main" id="{34DE81D9-4BA2-4507-9DFD-BDB8425AEAC8}"/>
+              </a:ext>
+            </a:extLst>
+          </p:cNvPr>
+          <p:cNvSpPr>
+            <a:spLocks xmlns:a="http://schemas.openxmlformats.org/drawingml/2006/main" noGrp="1"/>
+          </p:cNvSpPr>
+          <p:nvPr/>
+        </p:nvSpPr>
+        <p:spPr>
+          <a:xfrm xmlns:a="http://schemas.openxmlformats.org/drawingml/2006/main">
+            <a:off x="3333750" y="4124325"/>
+            <a:ext cx="3143250" cy="342900"/>
+          </a:xfrm>
+          <a:prstGeom xmlns:a="http://schemas.openxmlformats.org/drawingml/2006/main" prst="rect">
+            <a:avLst/>
+          </a:prstGeom>
+          <a:noFill xmlns:a="http://schemas.openxmlformats.org/drawingml/2006/main"/>
+          <a:ln xmlns:a="http://schemas.openxmlformats.org/drawingml/2006/main" w="0">
+            <a:noFill/>
+            <a:prstDash val="solid"/>
+          </a:ln>
+        </p:spPr>
+        <p:txBody>
+          <a:bodyPr xmlns:a="http://schemas.openxmlformats.org/drawingml/2006/main"/>
+          <a:lstStyle xmlns:a="http://schemas.openxmlformats.org/drawingml/2006/main"/>
+          <a:p xmlns:a="http://schemas.openxmlformats.org/drawingml/2006/main">
+            <a:pPr algn="l">
+              <a:defRPr sz="1275" b="0">
+                <a:solidFill>
+                  <a:srgbClr val="172026"/>
+                </a:solidFill>
+              </a:defRPr>
+            </a:pPr>
+            <a:r>
+              <a:rPr sz="1275" b="0">
+                <a:solidFill>
+                  <a:srgbClr val="172026"/>
+                </a:solidFill>
+              </a:rPr>
+              <a:t>edição de vídeo por transcrição</a:t>
+            </a:r>
+          </a:p>
+        </p:txBody>
+      </p:sp>
+      <p:sp>
+        <p:nvSpPr>
+          <p:cNvPr id="21" name="">
+            <a:extLst xmlns:a="http://schemas.openxmlformats.org/drawingml/2006/main">
+              <a:ext uri="{FF2B5EF4-FFF2-40B4-BE49-F238E27FC236}">
+                <a16:creationId xmlns:a16="http://schemas.microsoft.com/office/drawing/2014/main" id="{62C52158-7037-457F-9D78-00C1EC6FF7B4}"/>
+              </a:ext>
+            </a:extLst>
+          </p:cNvPr>
+          <p:cNvSpPr>
+            <a:spLocks xmlns:a="http://schemas.openxmlformats.org/drawingml/2006/main" noGrp="1"/>
+          </p:cNvSpPr>
+          <p:nvPr/>
+        </p:nvSpPr>
+        <p:spPr>
+          <a:xfrm xmlns:a="http://schemas.openxmlformats.org/drawingml/2006/main">
+            <a:off x="7000875" y="4124325"/>
+            <a:ext cx="3619500" cy="342900"/>
+          </a:xfrm>
+          <a:prstGeom xmlns:a="http://schemas.openxmlformats.org/drawingml/2006/main" prst="rect">
+            <a:avLst/>
+          </a:prstGeom>
+          <a:noFill xmlns:a="http://schemas.openxmlformats.org/drawingml/2006/main"/>
+          <a:ln xmlns:a="http://schemas.openxmlformats.org/drawingml/2006/main" w="0">
+            <a:noFill/>
+            <a:prstDash val="solid"/>
+          </a:ln>
+        </p:spPr>
+        <p:txBody>
+          <a:bodyPr xmlns:a="http://schemas.openxmlformats.org/drawingml/2006/main"/>
+          <a:lstStyle xmlns:a="http://schemas.openxmlformats.org/drawingml/2006/main"/>
+          <a:p xmlns:a="http://schemas.openxmlformats.org/drawingml/2006/main">
+            <a:pPr algn="l">
+              <a:defRPr sz="1275" b="0">
+                <a:solidFill>
+                  <a:srgbClr val="52606B"/>
+                </a:solidFill>
+              </a:defRPr>
+            </a:pPr>
+            <a:r>
+              <a:rPr sz="1275" b="0">
+                <a:solidFill>
+                  <a:srgbClr val="52606B"/>
+                </a:solidFill>
+              </a:rPr>
+              <a:t>cortes rápidos de entrevista, legenda e social</a:t>
+            </a:r>
+          </a:p>
+        </p:txBody>
+      </p:sp>
+      <p:sp>
+        <p:nvSpPr>
+          <p:cNvPr id="22" name="">
+            <a:extLst xmlns:a="http://schemas.openxmlformats.org/drawingml/2006/main">
+              <a:ext uri="{FF2B5EF4-FFF2-40B4-BE49-F238E27FC236}">
+                <a16:creationId xmlns:a16="http://schemas.microsoft.com/office/drawing/2014/main" id="{683B4C6F-CA45-4026-A483-6573DE384B0F}"/>
+              </a:ext>
+            </a:extLst>
+          </p:cNvPr>
+          <p:cNvSpPr>
+            <a:spLocks xmlns:a="http://schemas.openxmlformats.org/drawingml/2006/main" noGrp="1"/>
+          </p:cNvSpPr>
+          <p:nvPr/>
+        </p:nvSpPr>
+        <p:spPr>
+          <a:xfrm xmlns:a="http://schemas.openxmlformats.org/drawingml/2006/main">
+            <a:off x="685800" y="4572000"/>
+            <a:ext cx="9982200" cy="9525"/>
+          </a:xfrm>
+          <a:prstGeom xmlns:a="http://schemas.openxmlformats.org/drawingml/2006/main" prst="rect">
+            <a:avLst/>
+          </a:prstGeom>
+          <a:solidFill xmlns:a="http://schemas.openxmlformats.org/drawingml/2006/main">
+            <a:srgbClr val="D6DDE3"/>
+          </a:solidFill>
+          <a:ln xmlns:a="http://schemas.openxmlformats.org/drawingml/2006/main" w="0">
+            <a:noFill/>
+            <a:prstDash val="solid"/>
+          </a:ln>
+        </p:spPr>
+      </p:sp>
+      <p:sp>
+        <p:nvSpPr>
+          <p:cNvPr id="23" name="">
+            <a:extLst xmlns:a="http://schemas.openxmlformats.org/drawingml/2006/main">
+              <a:ext uri="{FF2B5EF4-FFF2-40B4-BE49-F238E27FC236}">
+                <a16:creationId xmlns:a16="http://schemas.microsoft.com/office/drawing/2014/main" id="{F8AA759E-F40C-4F63-93ED-F0935D18E941}"/>
+              </a:ext>
+            </a:extLst>
+          </p:cNvPr>
+          <p:cNvSpPr>
+            <a:spLocks xmlns:a="http://schemas.openxmlformats.org/drawingml/2006/main" noGrp="1"/>
+          </p:cNvSpPr>
+          <p:nvPr/>
+        </p:nvSpPr>
+        <p:spPr>
+          <a:xfrm xmlns:a="http://schemas.openxmlformats.org/drawingml/2006/main">
+            <a:off x="838200" y="4667250"/>
+            <a:ext cx="2190750" cy="266700"/>
+          </a:xfrm>
+          <a:prstGeom xmlns:a="http://schemas.openxmlformats.org/drawingml/2006/main" prst="rect">
+            <a:avLst/>
+          </a:prstGeom>
+          <a:noFill xmlns:a="http://schemas.openxmlformats.org/drawingml/2006/main"/>
+          <a:ln xmlns:a="http://schemas.openxmlformats.org/drawingml/2006/main" w="0">
+            <a:noFill/>
+            <a:prstDash val="solid"/>
+          </a:ln>
+        </p:spPr>
+        <p:txBody>
+          <a:bodyPr xmlns:a="http://schemas.openxmlformats.org/drawingml/2006/main"/>
+          <a:lstStyle xmlns:a="http://schemas.openxmlformats.org/drawingml/2006/main"/>
+          <a:p xmlns:a="http://schemas.openxmlformats.org/drawingml/2006/main">
+            <a:pPr algn="l">
+              <a:defRPr sz="1350" b="1">
+                <a:solidFill>
+                  <a:srgbClr val="1D7A54"/>
+                </a:solidFill>
+              </a:defRPr>
+            </a:pPr>
+            <a:r>
+              <a:rPr sz="1350" b="1">
+                <a:solidFill>
+                  <a:srgbClr val="1D7A54"/>
+                </a:solidFill>
+              </a:rPr>
+              <a:t>Fireflies</a:t>
+            </a:r>
+          </a:p>
+        </p:txBody>
+      </p:sp>
+      <p:sp>
+        <p:nvSpPr>
+          <p:cNvPr id="24" name="">
+            <a:extLst xmlns:a="http://schemas.openxmlformats.org/drawingml/2006/main">
+              <a:ext uri="{FF2B5EF4-FFF2-40B4-BE49-F238E27FC236}">
+                <a16:creationId xmlns:a16="http://schemas.microsoft.com/office/drawing/2014/main" id="{788C62D1-9070-4E65-90C4-377E14FF3AB2}"/>
+              </a:ext>
+            </a:extLst>
+          </p:cNvPr>
+          <p:cNvSpPr>
+            <a:spLocks xmlns:a="http://schemas.openxmlformats.org/drawingml/2006/main" noGrp="1"/>
+          </p:cNvSpPr>
+          <p:nvPr/>
+        </p:nvSpPr>
+        <p:spPr>
+          <a:xfrm xmlns:a="http://schemas.openxmlformats.org/drawingml/2006/main">
+            <a:off x="3333750" y="4648200"/>
+            <a:ext cx="3143250" cy="342900"/>
+          </a:xfrm>
+          <a:prstGeom xmlns:a="http://schemas.openxmlformats.org/drawingml/2006/main" prst="rect">
+            <a:avLst/>
+          </a:prstGeom>
+          <a:noFill xmlns:a="http://schemas.openxmlformats.org/drawingml/2006/main"/>
+          <a:ln xmlns:a="http://schemas.openxmlformats.org/drawingml/2006/main" w="0">
+            <a:noFill/>
+            <a:prstDash val="solid"/>
+          </a:ln>
+        </p:spPr>
+        <p:txBody>
+          <a:bodyPr xmlns:a="http://schemas.openxmlformats.org/drawingml/2006/main"/>
+          <a:lstStyle xmlns:a="http://schemas.openxmlformats.org/drawingml/2006/main"/>
+          <a:p xmlns:a="http://schemas.openxmlformats.org/drawingml/2006/main">
+            <a:pPr algn="l">
+              <a:defRPr sz="1275" b="0">
+                <a:solidFill>
+                  <a:srgbClr val="172026"/>
+                </a:solidFill>
+              </a:defRPr>
+            </a:pPr>
+            <a:r>
+              <a:rPr sz="1275" b="0">
+                <a:solidFill>
+                  <a:srgbClr val="172026"/>
+                </a:solidFill>
+              </a:rPr>
+              <a:t>atas quando Copilot não cobrir bem</a:t>
+            </a:r>
+          </a:p>
+        </p:txBody>
+      </p:sp>
+      <p:sp>
+        <p:nvSpPr>
+          <p:cNvPr id="25" name="">
+            <a:extLst xmlns:a="http://schemas.openxmlformats.org/drawingml/2006/main">
+              <a:ext uri="{FF2B5EF4-FFF2-40B4-BE49-F238E27FC236}">
+                <a16:creationId xmlns:a16="http://schemas.microsoft.com/office/drawing/2014/main" id="{27E32B62-E0AC-41D4-9C48-52E89D9F9DE1}"/>
+              </a:ext>
+            </a:extLst>
+          </p:cNvPr>
+          <p:cNvSpPr>
+            <a:spLocks xmlns:a="http://schemas.openxmlformats.org/drawingml/2006/main" noGrp="1"/>
+          </p:cNvSpPr>
+          <p:nvPr/>
+        </p:nvSpPr>
+        <p:spPr>
+          <a:xfrm xmlns:a="http://schemas.openxmlformats.org/drawingml/2006/main">
+            <a:off x="7000875" y="4648200"/>
+            <a:ext cx="3619500" cy="342900"/>
+          </a:xfrm>
+          <a:prstGeom xmlns:a="http://schemas.openxmlformats.org/drawingml/2006/main" prst="rect">
+            <a:avLst/>
+          </a:prstGeom>
+          <a:noFill xmlns:a="http://schemas.openxmlformats.org/drawingml/2006/main"/>
+          <a:ln xmlns:a="http://schemas.openxmlformats.org/drawingml/2006/main" w="0">
+            <a:noFill/>
+            <a:prstDash val="solid"/>
+          </a:ln>
+        </p:spPr>
+        <p:txBody>
+          <a:bodyPr xmlns:a="http://schemas.openxmlformats.org/drawingml/2006/main"/>
+          <a:lstStyle xmlns:a="http://schemas.openxmlformats.org/drawingml/2006/main"/>
+          <a:p xmlns:a="http://schemas.openxmlformats.org/drawingml/2006/main">
+            <a:pPr algn="l">
+              <a:defRPr sz="1275" b="0">
+                <a:solidFill>
+                  <a:srgbClr val="52606B"/>
+                </a:solidFill>
+              </a:defRPr>
+            </a:pPr>
+            <a:r>
+              <a:rPr sz="1275" b="0">
+                <a:solidFill>
+                  <a:srgbClr val="52606B"/>
+                </a:solidFill>
+              </a:rPr>
+              <a:t>menos perda de decisão e follow-up</a:t>
+            </a:r>
+          </a:p>
+        </p:txBody>
+      </p:sp>
+      <p:sp>
+        <p:nvSpPr>
+          <p:cNvPr id="26" name="">
+            <a:extLst xmlns:a="http://schemas.openxmlformats.org/drawingml/2006/main">
+              <a:ext uri="{FF2B5EF4-FFF2-40B4-BE49-F238E27FC236}">
+                <a16:creationId xmlns:a16="http://schemas.microsoft.com/office/drawing/2014/main" id="{834ED7B7-1690-42D3-ADAC-AC4395A76F8D}"/>
+              </a:ext>
+            </a:extLst>
+          </p:cNvPr>
+          <p:cNvSpPr>
+            <a:spLocks xmlns:a="http://schemas.openxmlformats.org/drawingml/2006/main" noGrp="1"/>
+          </p:cNvSpPr>
+          <p:nvPr/>
+        </p:nvSpPr>
+        <p:spPr>
+          <a:xfrm xmlns:a="http://schemas.openxmlformats.org/drawingml/2006/main">
+            <a:off x="685800" y="5095875"/>
+            <a:ext cx="9982200" cy="9525"/>
+          </a:xfrm>
+          <a:prstGeom xmlns:a="http://schemas.openxmlformats.org/drawingml/2006/main" prst="rect">
+            <a:avLst/>
+          </a:prstGeom>
+          <a:solidFill xmlns:a="http://schemas.openxmlformats.org/drawingml/2006/main">
+            <a:srgbClr val="D6DDE3"/>
+          </a:solidFill>
+          <a:ln xmlns:a="http://schemas.openxmlformats.org/drawingml/2006/main" w="0">
+            <a:noFill/>
+            <a:prstDash val="solid"/>
+          </a:ln>
+        </p:spPr>
+      </p:sp>
+      <p:sp>
+        <p:nvSpPr>
+          <p:cNvPr id="27" name="">
+            <a:extLst xmlns:a="http://schemas.openxmlformats.org/drawingml/2006/main">
+              <a:ext uri="{FF2B5EF4-FFF2-40B4-BE49-F238E27FC236}">
+                <a16:creationId xmlns:a16="http://schemas.microsoft.com/office/drawing/2014/main" id="{FE8E5DC2-E1C1-41CD-B35B-C9E02CE338AD}"/>
+              </a:ext>
+            </a:extLst>
+          </p:cNvPr>
+          <p:cNvSpPr>
+            <a:spLocks xmlns:a="http://schemas.openxmlformats.org/drawingml/2006/main" noGrp="1"/>
+          </p:cNvSpPr>
+          <p:nvPr/>
+        </p:nvSpPr>
+        <p:spPr>
+          <a:xfrm xmlns:a="http://schemas.openxmlformats.org/drawingml/2006/main">
+            <a:off x="838200" y="5191125"/>
+            <a:ext cx="2190750" cy="266700"/>
+          </a:xfrm>
+          <a:prstGeom xmlns:a="http://schemas.openxmlformats.org/drawingml/2006/main" prst="rect">
+            <a:avLst/>
+          </a:prstGeom>
+          <a:noFill xmlns:a="http://schemas.openxmlformats.org/drawingml/2006/main"/>
+          <a:ln xmlns:a="http://schemas.openxmlformats.org/drawingml/2006/main" w="0">
+            <a:noFill/>
+            <a:prstDash val="solid"/>
+          </a:ln>
+        </p:spPr>
+        <p:txBody>
+          <a:bodyPr xmlns:a="http://schemas.openxmlformats.org/drawingml/2006/main"/>
+          <a:lstStyle xmlns:a="http://schemas.openxmlformats.org/drawingml/2006/main"/>
+          <a:p xmlns:a="http://schemas.openxmlformats.org/drawingml/2006/main">
+            <a:pPr algn="l">
+              <a:defRPr sz="1350" b="1">
+                <a:solidFill>
+                  <a:srgbClr val="EF7A1D"/>
+                </a:solidFill>
+              </a:defRPr>
+            </a:pPr>
+            <a:r>
+              <a:rPr sz="1350" b="1">
+                <a:solidFill>
+                  <a:srgbClr val="EF7A1D"/>
+                </a:solidFill>
+              </a:rPr>
+              <a:t>Adobe Podcast</a:t>
+            </a:r>
+          </a:p>
+        </p:txBody>
+      </p:sp>
+      <p:sp>
+        <p:nvSpPr>
+          <p:cNvPr id="28" name="">
+            <a:extLst xmlns:a="http://schemas.openxmlformats.org/drawingml/2006/main">
+              <a:ext uri="{FF2B5EF4-FFF2-40B4-BE49-F238E27FC236}">
+                <a16:creationId xmlns:a16="http://schemas.microsoft.com/office/drawing/2014/main" id="{0D49625F-BCA2-4A1C-9E1D-2154A66CA51A}"/>
+              </a:ext>
+            </a:extLst>
+          </p:cNvPr>
+          <p:cNvSpPr>
+            <a:spLocks xmlns:a="http://schemas.openxmlformats.org/drawingml/2006/main" noGrp="1"/>
+          </p:cNvSpPr>
+          <p:nvPr/>
+        </p:nvSpPr>
+        <p:spPr>
+          <a:xfrm xmlns:a="http://schemas.openxmlformats.org/drawingml/2006/main">
+            <a:off x="3333750" y="5172075"/>
+            <a:ext cx="3143250" cy="342900"/>
+          </a:xfrm>
+          <a:prstGeom xmlns:a="http://schemas.openxmlformats.org/drawingml/2006/main" prst="rect">
+            <a:avLst/>
+          </a:prstGeom>
+          <a:noFill xmlns:a="http://schemas.openxmlformats.org/drawingml/2006/main"/>
+          <a:ln xmlns:a="http://schemas.openxmlformats.org/drawingml/2006/main" w="0">
+            <a:noFill/>
+            <a:prstDash val="solid"/>
+          </a:ln>
+        </p:spPr>
+        <p:txBody>
+          <a:bodyPr xmlns:a="http://schemas.openxmlformats.org/drawingml/2006/main"/>
+          <a:lstStyle xmlns:a="http://schemas.openxmlformats.org/drawingml/2006/main"/>
+          <a:p xmlns:a="http://schemas.openxmlformats.org/drawingml/2006/main">
+            <a:pPr algn="l">
+              <a:defRPr sz="1275" b="0">
+                <a:solidFill>
+                  <a:srgbClr val="172026"/>
+                </a:solidFill>
+              </a:defRPr>
+            </a:pPr>
+            <a:r>
+              <a:rPr sz="1275" b="0">
+                <a:solidFill>
+                  <a:srgbClr val="172026"/>
+                </a:solidFill>
+              </a:rPr>
+              <a:t>recuperação de áudio ruim</a:t>
+            </a:r>
+          </a:p>
+        </p:txBody>
+      </p:sp>
+      <p:sp>
+        <p:nvSpPr>
+          <p:cNvPr id="29" name="">
+            <a:extLst xmlns:a="http://schemas.openxmlformats.org/drawingml/2006/main">
+              <a:ext uri="{FF2B5EF4-FFF2-40B4-BE49-F238E27FC236}">
+                <a16:creationId xmlns:a16="http://schemas.microsoft.com/office/drawing/2014/main" id="{78767723-10EB-4EE8-89AC-84D07D53B674}"/>
+              </a:ext>
+            </a:extLst>
+          </p:cNvPr>
+          <p:cNvSpPr>
+            <a:spLocks xmlns:a="http://schemas.openxmlformats.org/drawingml/2006/main" noGrp="1"/>
+          </p:cNvSpPr>
+          <p:nvPr/>
+        </p:nvSpPr>
+        <p:spPr>
+          <a:xfrm xmlns:a="http://schemas.openxmlformats.org/drawingml/2006/main">
+            <a:off x="7000875" y="5172075"/>
+            <a:ext cx="3619500" cy="342900"/>
+          </a:xfrm>
+          <a:prstGeom xmlns:a="http://schemas.openxmlformats.org/drawingml/2006/main" prst="rect">
+            <a:avLst/>
+          </a:prstGeom>
+          <a:noFill xmlns:a="http://schemas.openxmlformats.org/drawingml/2006/main"/>
+          <a:ln xmlns:a="http://schemas.openxmlformats.org/drawingml/2006/main" w="0">
+            <a:noFill/>
+            <a:prstDash val="solid"/>
+          </a:ln>
+        </p:spPr>
+        <p:txBody>
+          <a:bodyPr xmlns:a="http://schemas.openxmlformats.org/drawingml/2006/main"/>
+          <a:lstStyle xmlns:a="http://schemas.openxmlformats.org/drawingml/2006/main"/>
+          <a:p xmlns:a="http://schemas.openxmlformats.org/drawingml/2006/main">
+            <a:pPr algn="l">
+              <a:defRPr sz="1275" b="0">
+                <a:solidFill>
+                  <a:srgbClr val="52606B"/>
+                </a:solidFill>
+              </a:defRPr>
+            </a:pPr>
+            <a:r>
+              <a:rPr sz="1275" b="0">
+                <a:solidFill>
+                  <a:srgbClr val="52606B"/>
+                </a:solidFill>
+              </a:rPr>
+              <a:t>mais aproveitamento de gravações de campo</a:t>
+            </a:r>
+          </a:p>
+        </p:txBody>
+      </p:sp>
+      <p:sp>
+        <p:nvSpPr>
+          <p:cNvPr id="30" name="">
+            <a:extLst xmlns:a="http://schemas.openxmlformats.org/drawingml/2006/main">
+              <a:ext uri="{FF2B5EF4-FFF2-40B4-BE49-F238E27FC236}">
+                <a16:creationId xmlns:a16="http://schemas.microsoft.com/office/drawing/2014/main" id="{C5677365-7BF6-4531-8754-309311721F1D}"/>
+              </a:ext>
+            </a:extLst>
+          </p:cNvPr>
+          <p:cNvSpPr>
+            <a:spLocks xmlns:a="http://schemas.openxmlformats.org/drawingml/2006/main" noGrp="1"/>
+          </p:cNvSpPr>
+          <p:nvPr/>
+        </p:nvSpPr>
+        <p:spPr>
+          <a:xfrm xmlns:a="http://schemas.openxmlformats.org/drawingml/2006/main">
+            <a:off x="685800" y="5619750"/>
+            <a:ext cx="9982200" cy="9525"/>
+          </a:xfrm>
+          <a:prstGeom xmlns:a="http://schemas.openxmlformats.org/drawingml/2006/main" prst="rect">
+            <a:avLst/>
+          </a:prstGeom>
+          <a:solidFill xmlns:a="http://schemas.openxmlformats.org/drawingml/2006/main">
+            <a:srgbClr val="D6DDE3"/>
+          </a:solidFill>
+          <a:ln xmlns:a="http://schemas.openxmlformats.org/drawingml/2006/main" w="0">
+            <a:noFill/>
+            <a:prstDash val="solid"/>
+          </a:ln>
+        </p:spPr>
+      </p:sp>
+      <p:sp>
+        <p:nvSpPr>
+          <p:cNvPr id="31" name="">
+            <a:extLst xmlns:a="http://schemas.openxmlformats.org/drawingml/2006/main">
+              <a:ext uri="{FF2B5EF4-FFF2-40B4-BE49-F238E27FC236}">
+                <a16:creationId xmlns:a16="http://schemas.microsoft.com/office/drawing/2014/main" id="{033418E1-E934-4606-BE40-758B3DF6B90F}"/>
               </a:ext>
             </a:extLst>
           </p:cNvPr>
@@ -3462,10 +4935,10 @@
       </p:sp>
       <p:sp>
         <p:nvSpPr>
-          <p:cNvPr id="16" name="">
-            <a:extLst xmlns:a="http://schemas.openxmlformats.org/drawingml/2006/main">
-              <a:ext uri="{FF2B5EF4-FFF2-40B4-BE49-F238E27FC236}">
-                <a16:creationId xmlns:a16="http://schemas.microsoft.com/office/drawing/2014/main" id="{6104EF28-6641-4679-8657-7874C3C77079}"/>
+          <p:cNvPr id="32" name="">
+            <a:extLst xmlns:a="http://schemas.openxmlformats.org/drawingml/2006/main">
+              <a:ext uri="{FF2B5EF4-FFF2-40B4-BE49-F238E27FC236}">
+                <a16:creationId xmlns:a16="http://schemas.microsoft.com/office/drawing/2014/main" id="{607D8C54-A333-4D37-98CB-F818DB008886}"/>
               </a:ext>
             </a:extLst>
           </p:cNvPr>
@@ -3513,7 +4986,7 @@
     </p:spTree>
     <p:extLst>
       <p:ext uri="{BB962C8B-B14F-4D97-AF65-F5344CB8AC3E}">
-        <p14:creationId xmlns:p14="http://schemas.microsoft.com/office/powerpoint/2010/main" val="918508090"/>
+        <p14:creationId xmlns:p14="http://schemas.microsoft.com/office/powerpoint/2010/main" val="507247545"/>
       </p:ext>
     </p:extLst>
   </p:cSld>
@@ -3521,6 +4994,759 @@
 </file>
 
 <file path=ppt/slides/slide4.xml><?xml version="1.0" encoding="utf-8"?>
+<p:sld xmlns:p="http://schemas.openxmlformats.org/presentationml/2006/main">
+  <p:cSld>
+    <p:bg>
+      <p:bgPr>
+        <a:solidFill xmlns:a="http://schemas.openxmlformats.org/drawingml/2006/main">
+          <a:srgbClr val="FFFFFF"/>
+        </a:solidFill>
+      </p:bgPr>
+    </p:bg>
+    <p:spTree>
+      <p:nvGrpSpPr>
+        <p:cNvPr id="1" name=""/>
+        <p:cNvGrpSpPr/>
+        <p:nvPr/>
+      </p:nvGrpSpPr>
+      <p:grpSpPr>
+        <a:xfrm xmlns:a="http://schemas.openxmlformats.org/drawingml/2006/main"/>
+      </p:grpSpPr>
+      <p:sp>
+        <p:nvSpPr>
+          <p:cNvPr id="17" name="">
+            <a:extLst xmlns:a="http://schemas.openxmlformats.org/drawingml/2006/main">
+              <a:ext uri="{FF2B5EF4-FFF2-40B4-BE49-F238E27FC236}">
+                <a16:creationId xmlns:a16="http://schemas.microsoft.com/office/drawing/2014/main" id="{CEE18622-E441-4654-9466-3286DEC3F431}"/>
+              </a:ext>
+            </a:extLst>
+          </p:cNvPr>
+          <p:cNvSpPr>
+            <a:spLocks xmlns:a="http://schemas.openxmlformats.org/drawingml/2006/main" noGrp="1"/>
+          </p:cNvSpPr>
+          <p:nvPr/>
+        </p:nvSpPr>
+        <p:spPr>
+          <a:xfrm xmlns:a="http://schemas.openxmlformats.org/drawingml/2006/main">
+            <a:off x="685800" y="514350"/>
+            <a:ext cx="8191500" cy="457200"/>
+          </a:xfrm>
+          <a:prstGeom xmlns:a="http://schemas.openxmlformats.org/drawingml/2006/main" prst="rect">
+            <a:avLst/>
+          </a:prstGeom>
+          <a:noFill xmlns:a="http://schemas.openxmlformats.org/drawingml/2006/main"/>
+          <a:ln xmlns:a="http://schemas.openxmlformats.org/drawingml/2006/main" w="0">
+            <a:noFill/>
+            <a:prstDash val="solid"/>
+          </a:ln>
+        </p:spPr>
+        <p:txBody>
+          <a:bodyPr xmlns:a="http://schemas.openxmlformats.org/drawingml/2006/main"/>
+          <a:lstStyle xmlns:a="http://schemas.openxmlformats.org/drawingml/2006/main"/>
+          <a:p xmlns:a="http://schemas.openxmlformats.org/drawingml/2006/main">
+            <a:pPr algn="l">
+              <a:defRPr sz="2550" b="1">
+                <a:solidFill>
+                  <a:srgbClr val="172026"/>
+                </a:solidFill>
+              </a:defRPr>
+            </a:pPr>
+            <a:r>
+              <a:rPr sz="2550" b="1">
+                <a:solidFill>
+                  <a:srgbClr val="172026"/>
+                </a:solidFill>
+              </a:rPr>
+              <a:t>Ganhos</a:t>
+            </a:r>
+          </a:p>
+        </p:txBody>
+      </p:sp>
+      <p:sp>
+        <p:nvSpPr>
+          <p:cNvPr id="2" name="">
+            <a:extLst xmlns:a="http://schemas.openxmlformats.org/drawingml/2006/main">
+              <a:ext uri="{FF2B5EF4-FFF2-40B4-BE49-F238E27FC236}">
+                <a16:creationId xmlns:a16="http://schemas.microsoft.com/office/drawing/2014/main" id="{B6806EB8-122B-4A4F-A645-FC09C9E3BA3F}"/>
+              </a:ext>
+            </a:extLst>
+          </p:cNvPr>
+          <p:cNvSpPr>
+            <a:spLocks xmlns:a="http://schemas.openxmlformats.org/drawingml/2006/main" noGrp="1"/>
+          </p:cNvSpPr>
+          <p:nvPr/>
+        </p:nvSpPr>
+        <p:spPr>
+          <a:xfrm xmlns:a="http://schemas.openxmlformats.org/drawingml/2006/main">
+            <a:off x="685800" y="1066800"/>
+            <a:ext cx="8763000" cy="495300"/>
+          </a:xfrm>
+          <a:prstGeom xmlns:a="http://schemas.openxmlformats.org/drawingml/2006/main" prst="rect">
+            <a:avLst/>
+          </a:prstGeom>
+          <a:noFill xmlns:a="http://schemas.openxmlformats.org/drawingml/2006/main"/>
+          <a:ln xmlns:a="http://schemas.openxmlformats.org/drawingml/2006/main" w="0">
+            <a:noFill/>
+            <a:prstDash val="solid"/>
+          </a:ln>
+        </p:spPr>
+        <p:txBody>
+          <a:bodyPr xmlns:a="http://schemas.openxmlformats.org/drawingml/2006/main"/>
+          <a:lstStyle xmlns:a="http://schemas.openxmlformats.org/drawingml/2006/main"/>
+          <a:p xmlns:a="http://schemas.openxmlformats.org/drawingml/2006/main">
+            <a:pPr algn="l">
+              <a:defRPr sz="1425" b="0">
+                <a:solidFill>
+                  <a:srgbClr val="52606B"/>
+                </a:solidFill>
+              </a:defRPr>
+            </a:pPr>
+            <a:r>
+              <a:rPr sz="1425" b="0">
+                <a:solidFill>
+                  <a:srgbClr val="52606B"/>
+                </a:solidFill>
+              </a:rPr>
+              <a:t>O impacto esperado está no ciclo de produção, não na ferramenta isolada.</a:t>
+            </a:r>
+          </a:p>
+        </p:txBody>
+      </p:sp>
+      <p:sp>
+        <p:nvSpPr>
+          <p:cNvPr id="3" name="">
+            <a:extLst xmlns:a="http://schemas.openxmlformats.org/drawingml/2006/main">
+              <a:ext uri="{FF2B5EF4-FFF2-40B4-BE49-F238E27FC236}">
+                <a16:creationId xmlns:a16="http://schemas.microsoft.com/office/drawing/2014/main" id="{998F9F3B-4D41-4E5C-8C9A-5CE804CEC4BC}"/>
+              </a:ext>
+            </a:extLst>
+          </p:cNvPr>
+          <p:cNvSpPr>
+            <a:spLocks xmlns:a="http://schemas.openxmlformats.org/drawingml/2006/main" noGrp="1"/>
+          </p:cNvSpPr>
+          <p:nvPr/>
+        </p:nvSpPr>
+        <p:spPr>
+          <a:xfrm xmlns:a="http://schemas.openxmlformats.org/drawingml/2006/main">
+            <a:off x="685800" y="2000250"/>
+            <a:ext cx="3143250" cy="2381250"/>
+          </a:xfrm>
+          <a:prstGeom xmlns:a="http://schemas.openxmlformats.org/drawingml/2006/main" prst="rect">
+            <a:avLst/>
+          </a:prstGeom>
+          <a:solidFill xmlns:a="http://schemas.openxmlformats.org/drawingml/2006/main">
+            <a:srgbClr val="DCEFF8"/>
+          </a:solidFill>
+          <a:ln xmlns:a="http://schemas.openxmlformats.org/drawingml/2006/main" w="0">
+            <a:noFill/>
+            <a:prstDash val="solid"/>
+          </a:ln>
+        </p:spPr>
+      </p:sp>
+      <p:sp>
+        <p:nvSpPr>
+          <p:cNvPr id="4" name="">
+            <a:extLst xmlns:a="http://schemas.openxmlformats.org/drawingml/2006/main">
+              <a:ext uri="{FF2B5EF4-FFF2-40B4-BE49-F238E27FC236}">
+                <a16:creationId xmlns:a16="http://schemas.microsoft.com/office/drawing/2014/main" id="{74D32762-3642-4CD7-80A6-9929F8CD2DFD}"/>
+              </a:ext>
+            </a:extLst>
+          </p:cNvPr>
+          <p:cNvSpPr>
+            <a:spLocks xmlns:a="http://schemas.openxmlformats.org/drawingml/2006/main" noGrp="1"/>
+          </p:cNvSpPr>
+          <p:nvPr/>
+        </p:nvSpPr>
+        <p:spPr>
+          <a:xfrm xmlns:a="http://schemas.openxmlformats.org/drawingml/2006/main">
+            <a:off x="4191000" y="2000250"/>
+            <a:ext cx="3143250" cy="2381250"/>
+          </a:xfrm>
+          <a:prstGeom xmlns:a="http://schemas.openxmlformats.org/drawingml/2006/main" prst="rect">
+            <a:avLst/>
+          </a:prstGeom>
+          <a:solidFill xmlns:a="http://schemas.openxmlformats.org/drawingml/2006/main">
+            <a:srgbClr val="FFF1E8"/>
+          </a:solidFill>
+          <a:ln xmlns:a="http://schemas.openxmlformats.org/drawingml/2006/main" w="0">
+            <a:noFill/>
+            <a:prstDash val="solid"/>
+          </a:ln>
+        </p:spPr>
+      </p:sp>
+      <p:sp>
+        <p:nvSpPr>
+          <p:cNvPr id="5" name="">
+            <a:extLst xmlns:a="http://schemas.openxmlformats.org/drawingml/2006/main">
+              <a:ext uri="{FF2B5EF4-FFF2-40B4-BE49-F238E27FC236}">
+                <a16:creationId xmlns:a16="http://schemas.microsoft.com/office/drawing/2014/main" id="{8C4DC082-2E52-45A5-8FA5-C1F1149295BF}"/>
+              </a:ext>
+            </a:extLst>
+          </p:cNvPr>
+          <p:cNvSpPr>
+            <a:spLocks xmlns:a="http://schemas.openxmlformats.org/drawingml/2006/main" noGrp="1"/>
+          </p:cNvSpPr>
+          <p:nvPr/>
+        </p:nvSpPr>
+        <p:spPr>
+          <a:xfrm xmlns:a="http://schemas.openxmlformats.org/drawingml/2006/main">
+            <a:off x="7696200" y="2000250"/>
+            <a:ext cx="3143250" cy="2381250"/>
+          </a:xfrm>
+          <a:prstGeom xmlns:a="http://schemas.openxmlformats.org/drawingml/2006/main" prst="rect">
+            <a:avLst/>
+          </a:prstGeom>
+          <a:solidFill xmlns:a="http://schemas.openxmlformats.org/drawingml/2006/main">
+            <a:srgbClr val="E8F4EE"/>
+          </a:solidFill>
+          <a:ln xmlns:a="http://schemas.openxmlformats.org/drawingml/2006/main" w="0">
+            <a:noFill/>
+            <a:prstDash val="solid"/>
+          </a:ln>
+        </p:spPr>
+      </p:sp>
+      <p:sp>
+        <p:nvSpPr>
+          <p:cNvPr id="6" name="">
+            <a:extLst xmlns:a="http://schemas.openxmlformats.org/drawingml/2006/main">
+              <a:ext uri="{FF2B5EF4-FFF2-40B4-BE49-F238E27FC236}">
+                <a16:creationId xmlns:a16="http://schemas.microsoft.com/office/drawing/2014/main" id="{C166F9E2-753C-4027-89C7-E9389E91DF73}"/>
+              </a:ext>
+            </a:extLst>
+          </p:cNvPr>
+          <p:cNvSpPr>
+            <a:spLocks xmlns:a="http://schemas.openxmlformats.org/drawingml/2006/main" noGrp="1"/>
+          </p:cNvSpPr>
+          <p:nvPr/>
+        </p:nvSpPr>
+        <p:spPr>
+          <a:xfrm xmlns:a="http://schemas.openxmlformats.org/drawingml/2006/main">
+            <a:off x="952500" y="2286000"/>
+            <a:ext cx="2476500" cy="381000"/>
+          </a:xfrm>
+          <a:prstGeom xmlns:a="http://schemas.openxmlformats.org/drawingml/2006/main" prst="rect">
+            <a:avLst/>
+          </a:prstGeom>
+          <a:noFill xmlns:a="http://schemas.openxmlformats.org/drawingml/2006/main"/>
+          <a:ln xmlns:a="http://schemas.openxmlformats.org/drawingml/2006/main" w="0">
+            <a:noFill/>
+            <a:prstDash val="solid"/>
+          </a:ln>
+        </p:spPr>
+        <p:txBody>
+          <a:bodyPr xmlns:a="http://schemas.openxmlformats.org/drawingml/2006/main"/>
+          <a:lstStyle xmlns:a="http://schemas.openxmlformats.org/drawingml/2006/main"/>
+          <a:p xmlns:a="http://schemas.openxmlformats.org/drawingml/2006/main">
+            <a:pPr algn="l">
+              <a:defRPr sz="2250" b="1">
+                <a:solidFill>
+                  <a:srgbClr val="073F63"/>
+                </a:solidFill>
+              </a:defRPr>
+            </a:pPr>
+            <a:r>
+              <a:rPr sz="2250" b="1">
+                <a:solidFill>
+                  <a:srgbClr val="073F63"/>
+                </a:solidFill>
+              </a:rPr>
+              <a:t>Qualidade</a:t>
+            </a:r>
+          </a:p>
+        </p:txBody>
+      </p:sp>
+      <p:sp>
+        <p:nvSpPr>
+          <p:cNvPr id="7" name="">
+            <a:extLst xmlns:a="http://schemas.openxmlformats.org/drawingml/2006/main">
+              <a:ext uri="{FF2B5EF4-FFF2-40B4-BE49-F238E27FC236}">
+                <a16:creationId xmlns:a16="http://schemas.microsoft.com/office/drawing/2014/main" id="{E3E6F917-EC3C-463D-B9B9-E858F97E1FBB}"/>
+              </a:ext>
+            </a:extLst>
+          </p:cNvPr>
+          <p:cNvSpPr>
+            <a:spLocks xmlns:a="http://schemas.openxmlformats.org/drawingml/2006/main" noGrp="1"/>
+          </p:cNvSpPr>
+          <p:nvPr/>
+        </p:nvSpPr>
+        <p:spPr>
+          <a:xfrm xmlns:a="http://schemas.openxmlformats.org/drawingml/2006/main">
+            <a:off x="952500" y="2952750"/>
+            <a:ext cx="2381250" cy="838200"/>
+          </a:xfrm>
+          <a:prstGeom xmlns:a="http://schemas.openxmlformats.org/drawingml/2006/main" prst="rect">
+            <a:avLst/>
+          </a:prstGeom>
+          <a:noFill xmlns:a="http://schemas.openxmlformats.org/drawingml/2006/main"/>
+          <a:ln xmlns:a="http://schemas.openxmlformats.org/drawingml/2006/main" w="0">
+            <a:noFill/>
+            <a:prstDash val="solid"/>
+          </a:ln>
+        </p:spPr>
+        <p:txBody>
+          <a:bodyPr xmlns:a="http://schemas.openxmlformats.org/drawingml/2006/main"/>
+          <a:lstStyle xmlns:a="http://schemas.openxmlformats.org/drawingml/2006/main"/>
+          <a:p xmlns:a="http://schemas.openxmlformats.org/drawingml/2006/main">
+            <a:pPr algn="l">
+              <a:defRPr sz="1500" b="0">
+                <a:solidFill>
+                  <a:srgbClr val="52606B"/>
+                </a:solidFill>
+              </a:defRPr>
+            </a:pPr>
+            <a:r>
+              <a:rPr sz="1500" b="0">
+                <a:solidFill>
+                  <a:srgbClr val="52606B"/>
+                </a:solidFill>
+              </a:rPr>
+              <a:t>Textos mais consistentes, melhor briefing, revisão crítica e menos desalinhamento.</a:t>
+            </a:r>
+          </a:p>
+        </p:txBody>
+      </p:sp>
+      <p:sp>
+        <p:nvSpPr>
+          <p:cNvPr id="8" name="">
+            <a:extLst xmlns:a="http://schemas.openxmlformats.org/drawingml/2006/main">
+              <a:ext uri="{FF2B5EF4-FFF2-40B4-BE49-F238E27FC236}">
+                <a16:creationId xmlns:a16="http://schemas.microsoft.com/office/drawing/2014/main" id="{556EA328-B953-4879-95E3-ECB218F66353}"/>
+              </a:ext>
+            </a:extLst>
+          </p:cNvPr>
+          <p:cNvSpPr>
+            <a:spLocks xmlns:a="http://schemas.openxmlformats.org/drawingml/2006/main" noGrp="1"/>
+          </p:cNvSpPr>
+          <p:nvPr/>
+        </p:nvSpPr>
+        <p:spPr>
+          <a:xfrm xmlns:a="http://schemas.openxmlformats.org/drawingml/2006/main">
+            <a:off x="4457700" y="2286000"/>
+            <a:ext cx="2476500" cy="381000"/>
+          </a:xfrm>
+          <a:prstGeom xmlns:a="http://schemas.openxmlformats.org/drawingml/2006/main" prst="rect">
+            <a:avLst/>
+          </a:prstGeom>
+          <a:noFill xmlns:a="http://schemas.openxmlformats.org/drawingml/2006/main"/>
+          <a:ln xmlns:a="http://schemas.openxmlformats.org/drawingml/2006/main" w="0">
+            <a:noFill/>
+            <a:prstDash val="solid"/>
+          </a:ln>
+        </p:spPr>
+        <p:txBody>
+          <a:bodyPr xmlns:a="http://schemas.openxmlformats.org/drawingml/2006/main"/>
+          <a:lstStyle xmlns:a="http://schemas.openxmlformats.org/drawingml/2006/main"/>
+          <a:p xmlns:a="http://schemas.openxmlformats.org/drawingml/2006/main">
+            <a:pPr algn="l">
+              <a:defRPr sz="2250" b="1">
+                <a:solidFill>
+                  <a:srgbClr val="EF7A1D"/>
+                </a:solidFill>
+              </a:defRPr>
+            </a:pPr>
+            <a:r>
+              <a:rPr sz="2250" b="1">
+                <a:solidFill>
+                  <a:srgbClr val="EF7A1D"/>
+                </a:solidFill>
+              </a:rPr>
+              <a:t>Velocidade</a:t>
+            </a:r>
+          </a:p>
+        </p:txBody>
+      </p:sp>
+      <p:sp>
+        <p:nvSpPr>
+          <p:cNvPr id="9" name="">
+            <a:extLst xmlns:a="http://schemas.openxmlformats.org/drawingml/2006/main">
+              <a:ext uri="{FF2B5EF4-FFF2-40B4-BE49-F238E27FC236}">
+                <a16:creationId xmlns:a16="http://schemas.microsoft.com/office/drawing/2014/main" id="{D2D47CCE-5746-4525-A785-BCF932D65A40}"/>
+              </a:ext>
+            </a:extLst>
+          </p:cNvPr>
+          <p:cNvSpPr>
+            <a:spLocks xmlns:a="http://schemas.openxmlformats.org/drawingml/2006/main" noGrp="1"/>
+          </p:cNvSpPr>
+          <p:nvPr/>
+        </p:nvSpPr>
+        <p:spPr>
+          <a:xfrm xmlns:a="http://schemas.openxmlformats.org/drawingml/2006/main">
+            <a:off x="4457700" y="2952750"/>
+            <a:ext cx="2381250" cy="838200"/>
+          </a:xfrm>
+          <a:prstGeom xmlns:a="http://schemas.openxmlformats.org/drawingml/2006/main" prst="rect">
+            <a:avLst/>
+          </a:prstGeom>
+          <a:noFill xmlns:a="http://schemas.openxmlformats.org/drawingml/2006/main"/>
+          <a:ln xmlns:a="http://schemas.openxmlformats.org/drawingml/2006/main" w="0">
+            <a:noFill/>
+            <a:prstDash val="solid"/>
+          </a:ln>
+        </p:spPr>
+        <p:txBody>
+          <a:bodyPr xmlns:a="http://schemas.openxmlformats.org/drawingml/2006/main"/>
+          <a:lstStyle xmlns:a="http://schemas.openxmlformats.org/drawingml/2006/main"/>
+          <a:p xmlns:a="http://schemas.openxmlformats.org/drawingml/2006/main">
+            <a:pPr algn="l">
+              <a:defRPr sz="1500" b="0">
+                <a:solidFill>
+                  <a:srgbClr val="52606B"/>
+                </a:solidFill>
+              </a:defRPr>
+            </a:pPr>
+            <a:r>
+              <a:rPr sz="1500" b="0">
+                <a:solidFill>
+                  <a:srgbClr val="52606B"/>
+                </a:solidFill>
+              </a:rPr>
+              <a:t>Primeira versão, variações e ajustes antes de acionar fornecedor.</a:t>
+            </a:r>
+          </a:p>
+        </p:txBody>
+      </p:sp>
+      <p:sp>
+        <p:nvSpPr>
+          <p:cNvPr id="10" name="">
+            <a:extLst xmlns:a="http://schemas.openxmlformats.org/drawingml/2006/main">
+              <a:ext uri="{FF2B5EF4-FFF2-40B4-BE49-F238E27FC236}">
+                <a16:creationId xmlns:a16="http://schemas.microsoft.com/office/drawing/2014/main" id="{78064EB1-E269-4CDF-B42D-155BD35B59E0}"/>
+              </a:ext>
+            </a:extLst>
+          </p:cNvPr>
+          <p:cNvSpPr>
+            <a:spLocks xmlns:a="http://schemas.openxmlformats.org/drawingml/2006/main" noGrp="1"/>
+          </p:cNvSpPr>
+          <p:nvPr/>
+        </p:nvSpPr>
+        <p:spPr>
+          <a:xfrm xmlns:a="http://schemas.openxmlformats.org/drawingml/2006/main">
+            <a:off x="7962900" y="2286000"/>
+            <a:ext cx="2476500" cy="381000"/>
+          </a:xfrm>
+          <a:prstGeom xmlns:a="http://schemas.openxmlformats.org/drawingml/2006/main" prst="rect">
+            <a:avLst/>
+          </a:prstGeom>
+          <a:noFill xmlns:a="http://schemas.openxmlformats.org/drawingml/2006/main"/>
+          <a:ln xmlns:a="http://schemas.openxmlformats.org/drawingml/2006/main" w="0">
+            <a:noFill/>
+            <a:prstDash val="solid"/>
+          </a:ln>
+        </p:spPr>
+        <p:txBody>
+          <a:bodyPr xmlns:a="http://schemas.openxmlformats.org/drawingml/2006/main"/>
+          <a:lstStyle xmlns:a="http://schemas.openxmlformats.org/drawingml/2006/main"/>
+          <a:p xmlns:a="http://schemas.openxmlformats.org/drawingml/2006/main">
+            <a:pPr algn="l">
+              <a:defRPr sz="2250" b="1">
+                <a:solidFill>
+                  <a:srgbClr val="1D7A54"/>
+                </a:solidFill>
+              </a:defRPr>
+            </a:pPr>
+            <a:r>
+              <a:rPr sz="2250" b="1">
+                <a:solidFill>
+                  <a:srgbClr val="1D7A54"/>
+                </a:solidFill>
+              </a:rPr>
+              <a:t>Custo</a:t>
+            </a:r>
+          </a:p>
+        </p:txBody>
+      </p:sp>
+      <p:sp>
+        <p:nvSpPr>
+          <p:cNvPr id="11" name="">
+            <a:extLst xmlns:a="http://schemas.openxmlformats.org/drawingml/2006/main">
+              <a:ext uri="{FF2B5EF4-FFF2-40B4-BE49-F238E27FC236}">
+                <a16:creationId xmlns:a16="http://schemas.microsoft.com/office/drawing/2014/main" id="{036BB1C0-E61B-4F2D-93DF-A857720636B4}"/>
+              </a:ext>
+            </a:extLst>
+          </p:cNvPr>
+          <p:cNvSpPr>
+            <a:spLocks xmlns:a="http://schemas.openxmlformats.org/drawingml/2006/main" noGrp="1"/>
+          </p:cNvSpPr>
+          <p:nvPr/>
+        </p:nvSpPr>
+        <p:spPr>
+          <a:xfrm xmlns:a="http://schemas.openxmlformats.org/drawingml/2006/main">
+            <a:off x="7962900" y="2952750"/>
+            <a:ext cx="2381250" cy="838200"/>
+          </a:xfrm>
+          <a:prstGeom xmlns:a="http://schemas.openxmlformats.org/drawingml/2006/main" prst="rect">
+            <a:avLst/>
+          </a:prstGeom>
+          <a:noFill xmlns:a="http://schemas.openxmlformats.org/drawingml/2006/main"/>
+          <a:ln xmlns:a="http://schemas.openxmlformats.org/drawingml/2006/main" w="0">
+            <a:noFill/>
+            <a:prstDash val="solid"/>
+          </a:ln>
+        </p:spPr>
+        <p:txBody>
+          <a:bodyPr xmlns:a="http://schemas.openxmlformats.org/drawingml/2006/main"/>
+          <a:lstStyle xmlns:a="http://schemas.openxmlformats.org/drawingml/2006/main"/>
+          <a:p xmlns:a="http://schemas.openxmlformats.org/drawingml/2006/main">
+            <a:pPr algn="l">
+              <a:defRPr sz="1500" b="0">
+                <a:solidFill>
+                  <a:srgbClr val="52606B"/>
+                </a:solidFill>
+              </a:defRPr>
+            </a:pPr>
+            <a:r>
+              <a:rPr sz="1500" b="0">
+                <a:solidFill>
+                  <a:srgbClr val="52606B"/>
+                </a:solidFill>
+              </a:rPr>
+              <a:t>Redução de custo unitário em entregas recorrentes e menos refação paga.</a:t>
+            </a:r>
+          </a:p>
+        </p:txBody>
+      </p:sp>
+      <p:sp>
+        <p:nvSpPr>
+          <p:cNvPr id="12" name="">
+            <a:extLst xmlns:a="http://schemas.openxmlformats.org/drawingml/2006/main">
+              <a:ext uri="{FF2B5EF4-FFF2-40B4-BE49-F238E27FC236}">
+                <a16:creationId xmlns:a16="http://schemas.microsoft.com/office/drawing/2014/main" id="{8E32BFA2-5878-4A11-A2FD-A4309E247B83}"/>
+              </a:ext>
+            </a:extLst>
+          </p:cNvPr>
+          <p:cNvSpPr>
+            <a:spLocks xmlns:a="http://schemas.openxmlformats.org/drawingml/2006/main" noGrp="1"/>
+          </p:cNvSpPr>
+          <p:nvPr/>
+        </p:nvSpPr>
+        <p:spPr>
+          <a:xfrm xmlns:a="http://schemas.openxmlformats.org/drawingml/2006/main">
+            <a:off x="685800" y="4953000"/>
+            <a:ext cx="9886950" cy="9525"/>
+          </a:xfrm>
+          <a:prstGeom xmlns:a="http://schemas.openxmlformats.org/drawingml/2006/main" prst="rect">
+            <a:avLst/>
+          </a:prstGeom>
+          <a:solidFill xmlns:a="http://schemas.openxmlformats.org/drawingml/2006/main">
+            <a:srgbClr val="D6DDE3"/>
+          </a:solidFill>
+          <a:ln xmlns:a="http://schemas.openxmlformats.org/drawingml/2006/main" w="0">
+            <a:noFill/>
+            <a:prstDash val="solid"/>
+          </a:ln>
+        </p:spPr>
+      </p:sp>
+      <p:sp>
+        <p:nvSpPr>
+          <p:cNvPr id="13" name="">
+            <a:extLst xmlns:a="http://schemas.openxmlformats.org/drawingml/2006/main">
+              <a:ext uri="{FF2B5EF4-FFF2-40B4-BE49-F238E27FC236}">
+                <a16:creationId xmlns:a16="http://schemas.microsoft.com/office/drawing/2014/main" id="{A5399A99-181E-4DE4-AD4A-3E9B8038E0C9}"/>
+              </a:ext>
+            </a:extLst>
+          </p:cNvPr>
+          <p:cNvSpPr>
+            <a:spLocks xmlns:a="http://schemas.openxmlformats.org/drawingml/2006/main" noGrp="1"/>
+          </p:cNvSpPr>
+          <p:nvPr/>
+        </p:nvSpPr>
+        <p:spPr>
+          <a:xfrm xmlns:a="http://schemas.openxmlformats.org/drawingml/2006/main">
+            <a:off x="685800" y="5257800"/>
+            <a:ext cx="1809750" cy="285750"/>
+          </a:xfrm>
+          <a:prstGeom xmlns:a="http://schemas.openxmlformats.org/drawingml/2006/main" prst="rect">
+            <a:avLst/>
+          </a:prstGeom>
+          <a:noFill xmlns:a="http://schemas.openxmlformats.org/drawingml/2006/main"/>
+          <a:ln xmlns:a="http://schemas.openxmlformats.org/drawingml/2006/main" w="0">
+            <a:noFill/>
+            <a:prstDash val="solid"/>
+          </a:ln>
+        </p:spPr>
+        <p:txBody>
+          <a:bodyPr xmlns:a="http://schemas.openxmlformats.org/drawingml/2006/main"/>
+          <a:lstStyle xmlns:a="http://schemas.openxmlformats.org/drawingml/2006/main"/>
+          <a:p xmlns:a="http://schemas.openxmlformats.org/drawingml/2006/main">
+            <a:pPr algn="l">
+              <a:defRPr sz="1725" b="1">
+                <a:solidFill>
+                  <a:srgbClr val="172026"/>
+                </a:solidFill>
+              </a:defRPr>
+            </a:pPr>
+            <a:r>
+              <a:rPr sz="1725" b="1">
+                <a:solidFill>
+                  <a:srgbClr val="172026"/>
+                </a:solidFill>
+              </a:rPr>
+              <a:t>Referência</a:t>
+            </a:r>
+          </a:p>
+        </p:txBody>
+      </p:sp>
+      <p:sp>
+        <p:nvSpPr>
+          <p:cNvPr id="14" name="">
+            <a:extLst xmlns:a="http://schemas.openxmlformats.org/drawingml/2006/main">
+              <a:ext uri="{FF2B5EF4-FFF2-40B4-BE49-F238E27FC236}">
+                <a16:creationId xmlns:a16="http://schemas.microsoft.com/office/drawing/2014/main" id="{CF2B5927-AA6B-4AA8-8F75-B1D23D244420}"/>
+              </a:ext>
+            </a:extLst>
+          </p:cNvPr>
+          <p:cNvSpPr>
+            <a:spLocks xmlns:a="http://schemas.openxmlformats.org/drawingml/2006/main" noGrp="1"/>
+          </p:cNvSpPr>
+          <p:nvPr/>
+        </p:nvSpPr>
+        <p:spPr>
+          <a:xfrm xmlns:a="http://schemas.openxmlformats.org/drawingml/2006/main">
+            <a:off x="2762250" y="5219700"/>
+            <a:ext cx="7810500" cy="533400"/>
+          </a:xfrm>
+          <a:prstGeom xmlns:a="http://schemas.openxmlformats.org/drawingml/2006/main" prst="rect">
+            <a:avLst/>
+          </a:prstGeom>
+          <a:noFill xmlns:a="http://schemas.openxmlformats.org/drawingml/2006/main"/>
+          <a:ln xmlns:a="http://schemas.openxmlformats.org/drawingml/2006/main" w="0">
+            <a:noFill/>
+            <a:prstDash val="solid"/>
+          </a:ln>
+        </p:spPr>
+        <p:txBody>
+          <a:bodyPr xmlns:a="http://schemas.openxmlformats.org/drawingml/2006/main"/>
+          <a:lstStyle xmlns:a="http://schemas.openxmlformats.org/drawingml/2006/main"/>
+          <a:p xmlns:a="http://schemas.openxmlformats.org/drawingml/2006/main">
+            <a:pPr algn="l">
+              <a:defRPr sz="1500" b="0">
+                <a:solidFill>
+                  <a:srgbClr val="52606B"/>
+                </a:solidFill>
+              </a:defRPr>
+            </a:pPr>
+            <a:r>
+              <a:rPr sz="1500" b="0">
+                <a:solidFill>
+                  <a:srgbClr val="52606B"/>
+                </a:solidFill>
+              </a:rPr>
+              <a:t>Landing page com custo médio informado de R$ 14 mil ajuda a dimensionar o potencial de economia em páginas, campanhas, adaptações e ajustes simples.</a:t>
+            </a:r>
+          </a:p>
+        </p:txBody>
+      </p:sp>
+      <p:sp>
+        <p:nvSpPr>
+          <p:cNvPr id="15" name="">
+            <a:extLst xmlns:a="http://schemas.openxmlformats.org/drawingml/2006/main">
+              <a:ext uri="{FF2B5EF4-FFF2-40B4-BE49-F238E27FC236}">
+                <a16:creationId xmlns:a16="http://schemas.microsoft.com/office/drawing/2014/main" id="{03CD426F-886F-4111-8998-E4EC36241FB4}"/>
+              </a:ext>
+            </a:extLst>
+          </p:cNvPr>
+          <p:cNvSpPr>
+            <a:spLocks xmlns:a="http://schemas.openxmlformats.org/drawingml/2006/main" noGrp="1"/>
+          </p:cNvSpPr>
+          <p:nvPr/>
+        </p:nvSpPr>
+        <p:spPr>
+          <a:xfrm xmlns:a="http://schemas.openxmlformats.org/drawingml/2006/main">
+            <a:off x="685800" y="6400800"/>
+            <a:ext cx="2095500" cy="171450"/>
+          </a:xfrm>
+          <a:prstGeom xmlns:a="http://schemas.openxmlformats.org/drawingml/2006/main" prst="rect">
+            <a:avLst/>
+          </a:prstGeom>
+          <a:noFill xmlns:a="http://schemas.openxmlformats.org/drawingml/2006/main"/>
+          <a:ln xmlns:a="http://schemas.openxmlformats.org/drawingml/2006/main" w="0">
+            <a:noFill/>
+            <a:prstDash val="solid"/>
+          </a:ln>
+        </p:spPr>
+        <p:txBody>
+          <a:bodyPr xmlns:a="http://schemas.openxmlformats.org/drawingml/2006/main"/>
+          <a:lstStyle xmlns:a="http://schemas.openxmlformats.org/drawingml/2006/main"/>
+          <a:p xmlns:a="http://schemas.openxmlformats.org/drawingml/2006/main">
+            <a:pPr algn="l">
+              <a:defRPr sz="825" b="0">
+                <a:solidFill>
+                  <a:srgbClr val="52606B"/>
+                </a:solidFill>
+              </a:defRPr>
+            </a:pPr>
+            <a:r>
+              <a:rPr sz="825" b="0">
+                <a:solidFill>
+                  <a:srgbClr val="52606B"/>
+                </a:solidFill>
+              </a:rPr>
+              <a:t>VLI | Comunicação</a:t>
+            </a:r>
+          </a:p>
+        </p:txBody>
+      </p:sp>
+      <p:sp>
+        <p:nvSpPr>
+          <p:cNvPr id="16" name="">
+            <a:extLst xmlns:a="http://schemas.openxmlformats.org/drawingml/2006/main">
+              <a:ext uri="{FF2B5EF4-FFF2-40B4-BE49-F238E27FC236}">
+                <a16:creationId xmlns:a16="http://schemas.microsoft.com/office/drawing/2014/main" id="{0EBE865E-6B9A-4C20-A430-47549C280700}"/>
+              </a:ext>
+            </a:extLst>
+          </p:cNvPr>
+          <p:cNvSpPr>
+            <a:spLocks xmlns:a="http://schemas.openxmlformats.org/drawingml/2006/main" noGrp="1"/>
+          </p:cNvSpPr>
+          <p:nvPr/>
+        </p:nvSpPr>
+        <p:spPr>
+          <a:xfrm xmlns:a="http://schemas.openxmlformats.org/drawingml/2006/main">
+            <a:off x="11049000" y="6400800"/>
+            <a:ext cx="419100" cy="171450"/>
+          </a:xfrm>
+          <a:prstGeom xmlns:a="http://schemas.openxmlformats.org/drawingml/2006/main" prst="rect">
+            <a:avLst/>
+          </a:prstGeom>
+          <a:noFill xmlns:a="http://schemas.openxmlformats.org/drawingml/2006/main"/>
+          <a:ln xmlns:a="http://schemas.openxmlformats.org/drawingml/2006/main" w="0">
+            <a:noFill/>
+            <a:prstDash val="solid"/>
+          </a:ln>
+        </p:spPr>
+        <p:txBody>
+          <a:bodyPr xmlns:a="http://schemas.openxmlformats.org/drawingml/2006/main"/>
+          <a:lstStyle xmlns:a="http://schemas.openxmlformats.org/drawingml/2006/main"/>
+          <a:p xmlns:a="http://schemas.openxmlformats.org/drawingml/2006/main">
+            <a:pPr algn="l">
+              <a:defRPr sz="825" b="0">
+                <a:solidFill>
+                  <a:srgbClr val="52606B"/>
+                </a:solidFill>
+              </a:defRPr>
+            </a:pPr>
+            <a:r>
+              <a:rPr sz="825" b="0">
+                <a:solidFill>
+                  <a:srgbClr val="52606B"/>
+                </a:solidFill>
+              </a:rPr>
+              <a:t>04</a:t>
+            </a:r>
+          </a:p>
+        </p:txBody>
+      </p:sp>
+    </p:spTree>
+    <p:extLst>
+      <p:ext uri="{BB962C8B-B14F-4D97-AF65-F5344CB8AC3E}">
+        <p14:creationId xmlns:p14="http://schemas.microsoft.com/office/powerpoint/2010/main" val="1322415326"/>
+      </p:ext>
+    </p:extLst>
+  </p:cSld>
+</p:sld>
+</file>
+
+<file path=ppt/slides/slide5.xml><?xml version="1.0" encoding="utf-8"?>
 <p:sld xmlns:p="http://schemas.openxmlformats.org/presentationml/2006/main">
   <p:cSld>
     <p:bg>
@@ -3541,10 +5767,10 @@
       </p:grpSpPr>
       <p:sp>
         <p:nvSpPr>
-          <p:cNvPr id="14" name="">
-            <a:extLst xmlns:a="http://schemas.openxmlformats.org/drawingml/2006/main">
-              <a:ext uri="{FF2B5EF4-FFF2-40B4-BE49-F238E27FC236}">
-                <a16:creationId xmlns:a16="http://schemas.microsoft.com/office/drawing/2014/main" id="{28A70E32-1B20-410C-9AE0-006057299270}"/>
+          <p:cNvPr id="25" name="">
+            <a:extLst xmlns:a="http://schemas.openxmlformats.org/drawingml/2006/main">
+              <a:ext uri="{FF2B5EF4-FFF2-40B4-BE49-F238E27FC236}">
+                <a16:creationId xmlns:a16="http://schemas.microsoft.com/office/drawing/2014/main" id="{998BF529-EF0A-4FAF-99E4-B9DFCBB9943F}"/>
               </a:ext>
             </a:extLst>
           </p:cNvPr>
@@ -3584,7 +5810,7 @@
                   <a:srgbClr val="172026"/>
                 </a:solidFill>
               </a:rPr>
-              <a:t>Segurança e criação</a:t>
+              <a:t>Fluxos prioritários</a:t>
             </a:r>
           </a:p>
         </p:txBody>
@@ -3594,7 +5820,7 @@
           <p:cNvPr id="2" name="">
             <a:extLst xmlns:a="http://schemas.openxmlformats.org/drawingml/2006/main">
               <a:ext uri="{FF2B5EF4-FFF2-40B4-BE49-F238E27FC236}">
-                <a16:creationId xmlns:a16="http://schemas.microsoft.com/office/drawing/2014/main" id="{23974BC3-7C1B-4234-9203-3AEB981558FF}"/>
+                <a16:creationId xmlns:a16="http://schemas.microsoft.com/office/drawing/2014/main" id="{4F2946DE-C949-493E-8160-742827FDF4A5}"/>
               </a:ext>
             </a:extLst>
           </p:cNvPr>
@@ -3634,6 +5860,1140 @@
                   <a:srgbClr val="52606B"/>
                 </a:solidFill>
               </a:rPr>
+              <a:t>A stack deve ser avaliada nos fluxos que concentram custo, prazo e risco de qualidade.</a:t>
+            </a:r>
+          </a:p>
+        </p:txBody>
+      </p:sp>
+      <p:sp>
+        <p:nvSpPr>
+          <p:cNvPr id="3" name="">
+            <a:extLst xmlns:a="http://schemas.openxmlformats.org/drawingml/2006/main">
+              <a:ext uri="{FF2B5EF4-FFF2-40B4-BE49-F238E27FC236}">
+                <a16:creationId xmlns:a16="http://schemas.microsoft.com/office/drawing/2014/main" id="{1AD4794F-5FC7-4A06-A6E4-C05998B37286}"/>
+              </a:ext>
+            </a:extLst>
+          </p:cNvPr>
+          <p:cNvSpPr>
+            <a:spLocks xmlns:a="http://schemas.openxmlformats.org/drawingml/2006/main" noGrp="1"/>
+          </p:cNvSpPr>
+          <p:nvPr/>
+        </p:nvSpPr>
+        <p:spPr>
+          <a:xfrm xmlns:a="http://schemas.openxmlformats.org/drawingml/2006/main">
+            <a:off x="838200" y="1952625"/>
+            <a:ext cx="1809750" cy="266700"/>
+          </a:xfrm>
+          <a:prstGeom xmlns:a="http://schemas.openxmlformats.org/drawingml/2006/main" prst="rect">
+            <a:avLst/>
+          </a:prstGeom>
+          <a:noFill xmlns:a="http://schemas.openxmlformats.org/drawingml/2006/main"/>
+          <a:ln xmlns:a="http://schemas.openxmlformats.org/drawingml/2006/main" w="0">
+            <a:noFill/>
+            <a:prstDash val="solid"/>
+          </a:ln>
+        </p:spPr>
+        <p:txBody>
+          <a:bodyPr xmlns:a="http://schemas.openxmlformats.org/drawingml/2006/main"/>
+          <a:lstStyle xmlns:a="http://schemas.openxmlformats.org/drawingml/2006/main"/>
+          <a:p xmlns:a="http://schemas.openxmlformats.org/drawingml/2006/main">
+            <a:pPr algn="l">
+              <a:defRPr sz="1425" b="1">
+                <a:solidFill>
+                  <a:srgbClr val="172026"/>
+                </a:solidFill>
+              </a:defRPr>
+            </a:pPr>
+            <a:r>
+              <a:rPr sz="1425" b="1">
+                <a:solidFill>
+                  <a:srgbClr val="172026"/>
+                </a:solidFill>
+              </a:rPr>
+              <a:t>Campanha</a:t>
+            </a:r>
+          </a:p>
+        </p:txBody>
+      </p:sp>
+      <p:sp>
+        <p:nvSpPr>
+          <p:cNvPr id="4" name="">
+            <a:extLst xmlns:a="http://schemas.openxmlformats.org/drawingml/2006/main">
+              <a:ext uri="{FF2B5EF4-FFF2-40B4-BE49-F238E27FC236}">
+                <a16:creationId xmlns:a16="http://schemas.microsoft.com/office/drawing/2014/main" id="{268F4C4B-E6AE-4A19-996E-9A2EEA9D98EF}"/>
+              </a:ext>
+            </a:extLst>
+          </p:cNvPr>
+          <p:cNvSpPr>
+            <a:spLocks xmlns:a="http://schemas.openxmlformats.org/drawingml/2006/main" noGrp="1"/>
+          </p:cNvSpPr>
+          <p:nvPr/>
+        </p:nvSpPr>
+        <p:spPr>
+          <a:xfrm xmlns:a="http://schemas.openxmlformats.org/drawingml/2006/main">
+            <a:off x="2952750" y="1952625"/>
+            <a:ext cx="3714750" cy="266700"/>
+          </a:xfrm>
+          <a:prstGeom xmlns:a="http://schemas.openxmlformats.org/drawingml/2006/main" prst="rect">
+            <a:avLst/>
+          </a:prstGeom>
+          <a:noFill xmlns:a="http://schemas.openxmlformats.org/drawingml/2006/main"/>
+          <a:ln xmlns:a="http://schemas.openxmlformats.org/drawingml/2006/main" w="0">
+            <a:noFill/>
+            <a:prstDash val="solid"/>
+          </a:ln>
+        </p:spPr>
+        <p:txBody>
+          <a:bodyPr xmlns:a="http://schemas.openxmlformats.org/drawingml/2006/main"/>
+          <a:lstStyle xmlns:a="http://schemas.openxmlformats.org/drawingml/2006/main"/>
+          <a:p xmlns:a="http://schemas.openxmlformats.org/drawingml/2006/main">
+            <a:pPr algn="l">
+              <a:defRPr sz="1275" b="1">
+                <a:solidFill>
+                  <a:srgbClr val="0E74BA"/>
+                </a:solidFill>
+              </a:defRPr>
+            </a:pPr>
+            <a:r>
+              <a:rPr sz="1275" b="1">
+                <a:solidFill>
+                  <a:srgbClr val="0E74BA"/>
+                </a:solidFill>
+              </a:rPr>
+              <a:t>Perplexity + Claude + Adobe + Microsoft</a:t>
+            </a:r>
+          </a:p>
+        </p:txBody>
+      </p:sp>
+      <p:sp>
+        <p:nvSpPr>
+          <p:cNvPr id="5" name="">
+            <a:extLst xmlns:a="http://schemas.openxmlformats.org/drawingml/2006/main">
+              <a:ext uri="{FF2B5EF4-FFF2-40B4-BE49-F238E27FC236}">
+                <a16:creationId xmlns:a16="http://schemas.microsoft.com/office/drawing/2014/main" id="{73345FF3-1F1D-4DB1-B042-20257BF70E39}"/>
+              </a:ext>
+            </a:extLst>
+          </p:cNvPr>
+          <p:cNvSpPr>
+            <a:spLocks xmlns:a="http://schemas.openxmlformats.org/drawingml/2006/main" noGrp="1"/>
+          </p:cNvSpPr>
+          <p:nvPr/>
+        </p:nvSpPr>
+        <p:spPr>
+          <a:xfrm xmlns:a="http://schemas.openxmlformats.org/drawingml/2006/main">
+            <a:off x="7096125" y="1952625"/>
+            <a:ext cx="3619500" cy="361950"/>
+          </a:xfrm>
+          <a:prstGeom xmlns:a="http://schemas.openxmlformats.org/drawingml/2006/main" prst="rect">
+            <a:avLst/>
+          </a:prstGeom>
+          <a:noFill xmlns:a="http://schemas.openxmlformats.org/drawingml/2006/main"/>
+          <a:ln xmlns:a="http://schemas.openxmlformats.org/drawingml/2006/main" w="0">
+            <a:noFill/>
+            <a:prstDash val="solid"/>
+          </a:ln>
+        </p:spPr>
+        <p:txBody>
+          <a:bodyPr xmlns:a="http://schemas.openxmlformats.org/drawingml/2006/main"/>
+          <a:lstStyle xmlns:a="http://schemas.openxmlformats.org/drawingml/2006/main"/>
+          <a:p xmlns:a="http://schemas.openxmlformats.org/drawingml/2006/main">
+            <a:pPr algn="l">
+              <a:defRPr sz="1275" b="0">
+                <a:solidFill>
+                  <a:srgbClr val="52606B"/>
+                </a:solidFill>
+              </a:defRPr>
+            </a:pPr>
+            <a:r>
+              <a:rPr sz="1275" b="0">
+                <a:solidFill>
+                  <a:srgbClr val="52606B"/>
+                </a:solidFill>
+              </a:rPr>
+              <a:t>conceito, texto, visual, aprovação e distribuição</a:t>
+            </a:r>
+          </a:p>
+        </p:txBody>
+      </p:sp>
+      <p:sp>
+        <p:nvSpPr>
+          <p:cNvPr id="6" name="">
+            <a:extLst xmlns:a="http://schemas.openxmlformats.org/drawingml/2006/main">
+              <a:ext uri="{FF2B5EF4-FFF2-40B4-BE49-F238E27FC236}">
+                <a16:creationId xmlns:a16="http://schemas.microsoft.com/office/drawing/2014/main" id="{573A62AF-48F1-410B-A033-BA36033D55F4}"/>
+              </a:ext>
+            </a:extLst>
+          </p:cNvPr>
+          <p:cNvSpPr>
+            <a:spLocks xmlns:a="http://schemas.openxmlformats.org/drawingml/2006/main" noGrp="1"/>
+          </p:cNvSpPr>
+          <p:nvPr/>
+        </p:nvSpPr>
+        <p:spPr>
+          <a:xfrm xmlns:a="http://schemas.openxmlformats.org/drawingml/2006/main">
+            <a:off x="685800" y="2409825"/>
+            <a:ext cx="9982200" cy="9525"/>
+          </a:xfrm>
+          <a:prstGeom xmlns:a="http://schemas.openxmlformats.org/drawingml/2006/main" prst="rect">
+            <a:avLst/>
+          </a:prstGeom>
+          <a:solidFill xmlns:a="http://schemas.openxmlformats.org/drawingml/2006/main">
+            <a:srgbClr val="D6DDE3"/>
+          </a:solidFill>
+          <a:ln xmlns:a="http://schemas.openxmlformats.org/drawingml/2006/main" w="0">
+            <a:noFill/>
+            <a:prstDash val="solid"/>
+          </a:ln>
+        </p:spPr>
+      </p:sp>
+      <p:sp>
+        <p:nvSpPr>
+          <p:cNvPr id="7" name="">
+            <a:extLst xmlns:a="http://schemas.openxmlformats.org/drawingml/2006/main">
+              <a:ext uri="{FF2B5EF4-FFF2-40B4-BE49-F238E27FC236}">
+                <a16:creationId xmlns:a16="http://schemas.microsoft.com/office/drawing/2014/main" id="{8FE6C6E6-EBDB-47DF-969E-20E363E715B0}"/>
+              </a:ext>
+            </a:extLst>
+          </p:cNvPr>
+          <p:cNvSpPr>
+            <a:spLocks xmlns:a="http://schemas.openxmlformats.org/drawingml/2006/main" noGrp="1"/>
+          </p:cNvSpPr>
+          <p:nvPr/>
+        </p:nvSpPr>
+        <p:spPr>
+          <a:xfrm xmlns:a="http://schemas.openxmlformats.org/drawingml/2006/main">
+            <a:off x="838200" y="2581275"/>
+            <a:ext cx="1809750" cy="266700"/>
+          </a:xfrm>
+          <a:prstGeom xmlns:a="http://schemas.openxmlformats.org/drawingml/2006/main" prst="rect">
+            <a:avLst/>
+          </a:prstGeom>
+          <a:noFill xmlns:a="http://schemas.openxmlformats.org/drawingml/2006/main"/>
+          <a:ln xmlns:a="http://schemas.openxmlformats.org/drawingml/2006/main" w="0">
+            <a:noFill/>
+            <a:prstDash val="solid"/>
+          </a:ln>
+        </p:spPr>
+        <p:txBody>
+          <a:bodyPr xmlns:a="http://schemas.openxmlformats.org/drawingml/2006/main"/>
+          <a:lstStyle xmlns:a="http://schemas.openxmlformats.org/drawingml/2006/main"/>
+          <a:p xmlns:a="http://schemas.openxmlformats.org/drawingml/2006/main">
+            <a:pPr algn="l">
+              <a:defRPr sz="1425" b="1">
+                <a:solidFill>
+                  <a:srgbClr val="172026"/>
+                </a:solidFill>
+              </a:defRPr>
+            </a:pPr>
+            <a:r>
+              <a:rPr sz="1425" b="1">
+                <a:solidFill>
+                  <a:srgbClr val="172026"/>
+                </a:solidFill>
+              </a:rPr>
+              <a:t>Comunicado</a:t>
+            </a:r>
+          </a:p>
+        </p:txBody>
+      </p:sp>
+      <p:sp>
+        <p:nvSpPr>
+          <p:cNvPr id="8" name="">
+            <a:extLst xmlns:a="http://schemas.openxmlformats.org/drawingml/2006/main">
+              <a:ext uri="{FF2B5EF4-FFF2-40B4-BE49-F238E27FC236}">
+                <a16:creationId xmlns:a16="http://schemas.microsoft.com/office/drawing/2014/main" id="{64EECEDC-8028-4EB4-A7D1-3BE05F7C32C2}"/>
+              </a:ext>
+            </a:extLst>
+          </p:cNvPr>
+          <p:cNvSpPr>
+            <a:spLocks xmlns:a="http://schemas.openxmlformats.org/drawingml/2006/main" noGrp="1"/>
+          </p:cNvSpPr>
+          <p:nvPr/>
+        </p:nvSpPr>
+        <p:spPr>
+          <a:xfrm xmlns:a="http://schemas.openxmlformats.org/drawingml/2006/main">
+            <a:off x="2952750" y="2581275"/>
+            <a:ext cx="3714750" cy="266700"/>
+          </a:xfrm>
+          <a:prstGeom xmlns:a="http://schemas.openxmlformats.org/drawingml/2006/main" prst="rect">
+            <a:avLst/>
+          </a:prstGeom>
+          <a:noFill xmlns:a="http://schemas.openxmlformats.org/drawingml/2006/main"/>
+          <a:ln xmlns:a="http://schemas.openxmlformats.org/drawingml/2006/main" w="0">
+            <a:noFill/>
+            <a:prstDash val="solid"/>
+          </a:ln>
+        </p:spPr>
+        <p:txBody>
+          <a:bodyPr xmlns:a="http://schemas.openxmlformats.org/drawingml/2006/main"/>
+          <a:lstStyle xmlns:a="http://schemas.openxmlformats.org/drawingml/2006/main"/>
+          <a:p xmlns:a="http://schemas.openxmlformats.org/drawingml/2006/main">
+            <a:pPr algn="l">
+              <a:defRPr sz="1275" b="1">
+                <a:solidFill>
+                  <a:srgbClr val="0E74BA"/>
+                </a:solidFill>
+              </a:defRPr>
+            </a:pPr>
+            <a:r>
+              <a:rPr sz="1275" b="1">
+                <a:solidFill>
+                  <a:srgbClr val="0E74BA"/>
+                </a:solidFill>
+              </a:rPr>
+              <a:t>Perplexity + Claude + DeepL</a:t>
+            </a:r>
+          </a:p>
+        </p:txBody>
+      </p:sp>
+      <p:sp>
+        <p:nvSpPr>
+          <p:cNvPr id="9" name="">
+            <a:extLst xmlns:a="http://schemas.openxmlformats.org/drawingml/2006/main">
+              <a:ext uri="{FF2B5EF4-FFF2-40B4-BE49-F238E27FC236}">
+                <a16:creationId xmlns:a16="http://schemas.microsoft.com/office/drawing/2014/main" id="{3980E113-93F9-4C82-9A07-C16D02B6A38B}"/>
+              </a:ext>
+            </a:extLst>
+          </p:cNvPr>
+          <p:cNvSpPr>
+            <a:spLocks xmlns:a="http://schemas.openxmlformats.org/drawingml/2006/main" noGrp="1"/>
+          </p:cNvSpPr>
+          <p:nvPr/>
+        </p:nvSpPr>
+        <p:spPr>
+          <a:xfrm xmlns:a="http://schemas.openxmlformats.org/drawingml/2006/main">
+            <a:off x="7096125" y="2581275"/>
+            <a:ext cx="3619500" cy="361950"/>
+          </a:xfrm>
+          <a:prstGeom xmlns:a="http://schemas.openxmlformats.org/drawingml/2006/main" prst="rect">
+            <a:avLst/>
+          </a:prstGeom>
+          <a:noFill xmlns:a="http://schemas.openxmlformats.org/drawingml/2006/main"/>
+          <a:ln xmlns:a="http://schemas.openxmlformats.org/drawingml/2006/main" w="0">
+            <a:noFill/>
+            <a:prstDash val="solid"/>
+          </a:ln>
+        </p:spPr>
+        <p:txBody>
+          <a:bodyPr xmlns:a="http://schemas.openxmlformats.org/drawingml/2006/main"/>
+          <a:lstStyle xmlns:a="http://schemas.openxmlformats.org/drawingml/2006/main"/>
+          <a:p xmlns:a="http://schemas.openxmlformats.org/drawingml/2006/main">
+            <a:pPr algn="l">
+              <a:defRPr sz="1275" b="0">
+                <a:solidFill>
+                  <a:srgbClr val="52606B"/>
+                </a:solidFill>
+              </a:defRPr>
+            </a:pPr>
+            <a:r>
+              <a:rPr sz="1275" b="0">
+                <a:solidFill>
+                  <a:srgbClr val="52606B"/>
+                </a:solidFill>
+              </a:rPr>
+              <a:t>fonte, redação, revisão, tradução e adaptação</a:t>
+            </a:r>
+          </a:p>
+        </p:txBody>
+      </p:sp>
+      <p:sp>
+        <p:nvSpPr>
+          <p:cNvPr id="10" name="">
+            <a:extLst xmlns:a="http://schemas.openxmlformats.org/drawingml/2006/main">
+              <a:ext uri="{FF2B5EF4-FFF2-40B4-BE49-F238E27FC236}">
+                <a16:creationId xmlns:a16="http://schemas.microsoft.com/office/drawing/2014/main" id="{EEC473D0-1211-44D1-9ED1-66753C981601}"/>
+              </a:ext>
+            </a:extLst>
+          </p:cNvPr>
+          <p:cNvSpPr>
+            <a:spLocks xmlns:a="http://schemas.openxmlformats.org/drawingml/2006/main" noGrp="1"/>
+          </p:cNvSpPr>
+          <p:nvPr/>
+        </p:nvSpPr>
+        <p:spPr>
+          <a:xfrm xmlns:a="http://schemas.openxmlformats.org/drawingml/2006/main">
+            <a:off x="685800" y="3038475"/>
+            <a:ext cx="9982200" cy="9525"/>
+          </a:xfrm>
+          <a:prstGeom xmlns:a="http://schemas.openxmlformats.org/drawingml/2006/main" prst="rect">
+            <a:avLst/>
+          </a:prstGeom>
+          <a:solidFill xmlns:a="http://schemas.openxmlformats.org/drawingml/2006/main">
+            <a:srgbClr val="D6DDE3"/>
+          </a:solidFill>
+          <a:ln xmlns:a="http://schemas.openxmlformats.org/drawingml/2006/main" w="0">
+            <a:noFill/>
+            <a:prstDash val="solid"/>
+          </a:ln>
+        </p:spPr>
+      </p:sp>
+      <p:sp>
+        <p:nvSpPr>
+          <p:cNvPr id="11" name="">
+            <a:extLst xmlns:a="http://schemas.openxmlformats.org/drawingml/2006/main">
+              <a:ext uri="{FF2B5EF4-FFF2-40B4-BE49-F238E27FC236}">
+                <a16:creationId xmlns:a16="http://schemas.microsoft.com/office/drawing/2014/main" id="{A29CB954-99A6-4896-AE9D-5277A1931A05}"/>
+              </a:ext>
+            </a:extLst>
+          </p:cNvPr>
+          <p:cNvSpPr>
+            <a:spLocks xmlns:a="http://schemas.openxmlformats.org/drawingml/2006/main" noGrp="1"/>
+          </p:cNvSpPr>
+          <p:nvPr/>
+        </p:nvSpPr>
+        <p:spPr>
+          <a:xfrm xmlns:a="http://schemas.openxmlformats.org/drawingml/2006/main">
+            <a:off x="838200" y="3209925"/>
+            <a:ext cx="1809750" cy="266700"/>
+          </a:xfrm>
+          <a:prstGeom xmlns:a="http://schemas.openxmlformats.org/drawingml/2006/main" prst="rect">
+            <a:avLst/>
+          </a:prstGeom>
+          <a:noFill xmlns:a="http://schemas.openxmlformats.org/drawingml/2006/main"/>
+          <a:ln xmlns:a="http://schemas.openxmlformats.org/drawingml/2006/main" w="0">
+            <a:noFill/>
+            <a:prstDash val="solid"/>
+          </a:ln>
+        </p:spPr>
+        <p:txBody>
+          <a:bodyPr xmlns:a="http://schemas.openxmlformats.org/drawingml/2006/main"/>
+          <a:lstStyle xmlns:a="http://schemas.openxmlformats.org/drawingml/2006/main"/>
+          <a:p xmlns:a="http://schemas.openxmlformats.org/drawingml/2006/main">
+            <a:pPr algn="l">
+              <a:defRPr sz="1425" b="1">
+                <a:solidFill>
+                  <a:srgbClr val="172026"/>
+                </a:solidFill>
+              </a:defRPr>
+            </a:pPr>
+            <a:r>
+              <a:rPr sz="1425" b="1">
+                <a:solidFill>
+                  <a:srgbClr val="172026"/>
+                </a:solidFill>
+              </a:rPr>
+              <a:t>Landing page</a:t>
+            </a:r>
+          </a:p>
+        </p:txBody>
+      </p:sp>
+      <p:sp>
+        <p:nvSpPr>
+          <p:cNvPr id="12" name="">
+            <a:extLst xmlns:a="http://schemas.openxmlformats.org/drawingml/2006/main">
+              <a:ext uri="{FF2B5EF4-FFF2-40B4-BE49-F238E27FC236}">
+                <a16:creationId xmlns:a16="http://schemas.microsoft.com/office/drawing/2014/main" id="{D58A1DB5-11A1-47D0-AA98-0D9FF6AD9259}"/>
+              </a:ext>
+            </a:extLst>
+          </p:cNvPr>
+          <p:cNvSpPr>
+            <a:spLocks xmlns:a="http://schemas.openxmlformats.org/drawingml/2006/main" noGrp="1"/>
+          </p:cNvSpPr>
+          <p:nvPr/>
+        </p:nvSpPr>
+        <p:spPr>
+          <a:xfrm xmlns:a="http://schemas.openxmlformats.org/drawingml/2006/main">
+            <a:off x="2952750" y="3209925"/>
+            <a:ext cx="3714750" cy="266700"/>
+          </a:xfrm>
+          <a:prstGeom xmlns:a="http://schemas.openxmlformats.org/drawingml/2006/main" prst="rect">
+            <a:avLst/>
+          </a:prstGeom>
+          <a:noFill xmlns:a="http://schemas.openxmlformats.org/drawingml/2006/main"/>
+          <a:ln xmlns:a="http://schemas.openxmlformats.org/drawingml/2006/main" w="0">
+            <a:noFill/>
+            <a:prstDash val="solid"/>
+          </a:ln>
+        </p:spPr>
+        <p:txBody>
+          <a:bodyPr xmlns:a="http://schemas.openxmlformats.org/drawingml/2006/main"/>
+          <a:lstStyle xmlns:a="http://schemas.openxmlformats.org/drawingml/2006/main"/>
+          <a:p xmlns:a="http://schemas.openxmlformats.org/drawingml/2006/main">
+            <a:pPr algn="l">
+              <a:defRPr sz="1275" b="1">
+                <a:solidFill>
+                  <a:srgbClr val="0E74BA"/>
+                </a:solidFill>
+              </a:defRPr>
+            </a:pPr>
+            <a:r>
+              <a:rPr sz="1275" b="1">
+                <a:solidFill>
+                  <a:srgbClr val="0E74BA"/>
+                </a:solidFill>
+              </a:rPr>
+              <a:t>Claude + Claude Code + Adobe</a:t>
+            </a:r>
+          </a:p>
+        </p:txBody>
+      </p:sp>
+      <p:sp>
+        <p:nvSpPr>
+          <p:cNvPr id="13" name="">
+            <a:extLst xmlns:a="http://schemas.openxmlformats.org/drawingml/2006/main">
+              <a:ext uri="{FF2B5EF4-FFF2-40B4-BE49-F238E27FC236}">
+                <a16:creationId xmlns:a16="http://schemas.microsoft.com/office/drawing/2014/main" id="{1DB4BA0B-D90F-4DE0-8EBC-E7BD321A6913}"/>
+              </a:ext>
+            </a:extLst>
+          </p:cNvPr>
+          <p:cNvSpPr>
+            <a:spLocks xmlns:a="http://schemas.openxmlformats.org/drawingml/2006/main" noGrp="1"/>
+          </p:cNvSpPr>
+          <p:nvPr/>
+        </p:nvSpPr>
+        <p:spPr>
+          <a:xfrm xmlns:a="http://schemas.openxmlformats.org/drawingml/2006/main">
+            <a:off x="7096125" y="3209925"/>
+            <a:ext cx="3619500" cy="361950"/>
+          </a:xfrm>
+          <a:prstGeom xmlns:a="http://schemas.openxmlformats.org/drawingml/2006/main" prst="rect">
+            <a:avLst/>
+          </a:prstGeom>
+          <a:noFill xmlns:a="http://schemas.openxmlformats.org/drawingml/2006/main"/>
+          <a:ln xmlns:a="http://schemas.openxmlformats.org/drawingml/2006/main" w="0">
+            <a:noFill/>
+            <a:prstDash val="solid"/>
+          </a:ln>
+        </p:spPr>
+        <p:txBody>
+          <a:bodyPr xmlns:a="http://schemas.openxmlformats.org/drawingml/2006/main"/>
+          <a:lstStyle xmlns:a="http://schemas.openxmlformats.org/drawingml/2006/main"/>
+          <a:p xmlns:a="http://schemas.openxmlformats.org/drawingml/2006/main">
+            <a:pPr algn="l">
+              <a:defRPr sz="1275" b="0">
+                <a:solidFill>
+                  <a:srgbClr val="52606B"/>
+                </a:solidFill>
+              </a:defRPr>
+            </a:pPr>
+            <a:r>
+              <a:rPr sz="1275" b="0">
+                <a:solidFill>
+                  <a:srgbClr val="52606B"/>
+                </a:solidFill>
+              </a:rPr>
+              <a:t>copy, protótipo, assets e ajustes rápidos</a:t>
+            </a:r>
+          </a:p>
+        </p:txBody>
+      </p:sp>
+      <p:sp>
+        <p:nvSpPr>
+          <p:cNvPr id="14" name="">
+            <a:extLst xmlns:a="http://schemas.openxmlformats.org/drawingml/2006/main">
+              <a:ext uri="{FF2B5EF4-FFF2-40B4-BE49-F238E27FC236}">
+                <a16:creationId xmlns:a16="http://schemas.microsoft.com/office/drawing/2014/main" id="{76122179-E0C6-424C-B139-84C8FFD8F1F2}"/>
+              </a:ext>
+            </a:extLst>
+          </p:cNvPr>
+          <p:cNvSpPr>
+            <a:spLocks xmlns:a="http://schemas.openxmlformats.org/drawingml/2006/main" noGrp="1"/>
+          </p:cNvSpPr>
+          <p:nvPr/>
+        </p:nvSpPr>
+        <p:spPr>
+          <a:xfrm xmlns:a="http://schemas.openxmlformats.org/drawingml/2006/main">
+            <a:off x="685800" y="3667125"/>
+            <a:ext cx="9982200" cy="9525"/>
+          </a:xfrm>
+          <a:prstGeom xmlns:a="http://schemas.openxmlformats.org/drawingml/2006/main" prst="rect">
+            <a:avLst/>
+          </a:prstGeom>
+          <a:solidFill xmlns:a="http://schemas.openxmlformats.org/drawingml/2006/main">
+            <a:srgbClr val="D6DDE3"/>
+          </a:solidFill>
+          <a:ln xmlns:a="http://schemas.openxmlformats.org/drawingml/2006/main" w="0">
+            <a:noFill/>
+            <a:prstDash val="solid"/>
+          </a:ln>
+        </p:spPr>
+      </p:sp>
+      <p:sp>
+        <p:nvSpPr>
+          <p:cNvPr id="15" name="">
+            <a:extLst xmlns:a="http://schemas.openxmlformats.org/drawingml/2006/main">
+              <a:ext uri="{FF2B5EF4-FFF2-40B4-BE49-F238E27FC236}">
+                <a16:creationId xmlns:a16="http://schemas.microsoft.com/office/drawing/2014/main" id="{071B2CB8-12D6-40B3-B82C-DBB8999A3EFB}"/>
+              </a:ext>
+            </a:extLst>
+          </p:cNvPr>
+          <p:cNvSpPr>
+            <a:spLocks xmlns:a="http://schemas.openxmlformats.org/drawingml/2006/main" noGrp="1"/>
+          </p:cNvSpPr>
+          <p:nvPr/>
+        </p:nvSpPr>
+        <p:spPr>
+          <a:xfrm xmlns:a="http://schemas.openxmlformats.org/drawingml/2006/main">
+            <a:off x="838200" y="3838575"/>
+            <a:ext cx="1809750" cy="266700"/>
+          </a:xfrm>
+          <a:prstGeom xmlns:a="http://schemas.openxmlformats.org/drawingml/2006/main" prst="rect">
+            <a:avLst/>
+          </a:prstGeom>
+          <a:noFill xmlns:a="http://schemas.openxmlformats.org/drawingml/2006/main"/>
+          <a:ln xmlns:a="http://schemas.openxmlformats.org/drawingml/2006/main" w="0">
+            <a:noFill/>
+            <a:prstDash val="solid"/>
+          </a:ln>
+        </p:spPr>
+        <p:txBody>
+          <a:bodyPr xmlns:a="http://schemas.openxmlformats.org/drawingml/2006/main"/>
+          <a:lstStyle xmlns:a="http://schemas.openxmlformats.org/drawingml/2006/main"/>
+          <a:p xmlns:a="http://schemas.openxmlformats.org/drawingml/2006/main">
+            <a:pPr algn="l">
+              <a:defRPr sz="1425" b="1">
+                <a:solidFill>
+                  <a:srgbClr val="172026"/>
+                </a:solidFill>
+              </a:defRPr>
+            </a:pPr>
+            <a:r>
+              <a:rPr sz="1425" b="1">
+                <a:solidFill>
+                  <a:srgbClr val="172026"/>
+                </a:solidFill>
+              </a:rPr>
+              <a:t>Vídeo</a:t>
+            </a:r>
+          </a:p>
+        </p:txBody>
+      </p:sp>
+      <p:sp>
+        <p:nvSpPr>
+          <p:cNvPr id="16" name="">
+            <a:extLst xmlns:a="http://schemas.openxmlformats.org/drawingml/2006/main">
+              <a:ext uri="{FF2B5EF4-FFF2-40B4-BE49-F238E27FC236}">
+                <a16:creationId xmlns:a16="http://schemas.microsoft.com/office/drawing/2014/main" id="{F2C4BFAF-CB55-4894-8E3B-D885902C2805}"/>
+              </a:ext>
+            </a:extLst>
+          </p:cNvPr>
+          <p:cNvSpPr>
+            <a:spLocks xmlns:a="http://schemas.openxmlformats.org/drawingml/2006/main" noGrp="1"/>
+          </p:cNvSpPr>
+          <p:nvPr/>
+        </p:nvSpPr>
+        <p:spPr>
+          <a:xfrm xmlns:a="http://schemas.openxmlformats.org/drawingml/2006/main">
+            <a:off x="2952750" y="3838575"/>
+            <a:ext cx="3714750" cy="266700"/>
+          </a:xfrm>
+          <a:prstGeom xmlns:a="http://schemas.openxmlformats.org/drawingml/2006/main" prst="rect">
+            <a:avLst/>
+          </a:prstGeom>
+          <a:noFill xmlns:a="http://schemas.openxmlformats.org/drawingml/2006/main"/>
+          <a:ln xmlns:a="http://schemas.openxmlformats.org/drawingml/2006/main" w="0">
+            <a:noFill/>
+            <a:prstDash val="solid"/>
+          </a:ln>
+        </p:spPr>
+        <p:txBody>
+          <a:bodyPr xmlns:a="http://schemas.openxmlformats.org/drawingml/2006/main"/>
+          <a:lstStyle xmlns:a="http://schemas.openxmlformats.org/drawingml/2006/main"/>
+          <a:p xmlns:a="http://schemas.openxmlformats.org/drawingml/2006/main">
+            <a:pPr algn="l">
+              <a:defRPr sz="1275" b="1">
+                <a:solidFill>
+                  <a:srgbClr val="0E74BA"/>
+                </a:solidFill>
+              </a:defRPr>
+            </a:pPr>
+            <a:r>
+              <a:rPr sz="1275" b="1">
+                <a:solidFill>
+                  <a:srgbClr val="0E74BA"/>
+                </a:solidFill>
+              </a:rPr>
+              <a:t>Firefly + Runway/Veo + ElevenLabs + Descript</a:t>
+            </a:r>
+          </a:p>
+        </p:txBody>
+      </p:sp>
+      <p:sp>
+        <p:nvSpPr>
+          <p:cNvPr id="17" name="">
+            <a:extLst xmlns:a="http://schemas.openxmlformats.org/drawingml/2006/main">
+              <a:ext uri="{FF2B5EF4-FFF2-40B4-BE49-F238E27FC236}">
+                <a16:creationId xmlns:a16="http://schemas.microsoft.com/office/drawing/2014/main" id="{4E9C367C-BAD5-4B5A-9595-4C11E79B8E6D}"/>
+              </a:ext>
+            </a:extLst>
+          </p:cNvPr>
+          <p:cNvSpPr>
+            <a:spLocks xmlns:a="http://schemas.openxmlformats.org/drawingml/2006/main" noGrp="1"/>
+          </p:cNvSpPr>
+          <p:nvPr/>
+        </p:nvSpPr>
+        <p:spPr>
+          <a:xfrm xmlns:a="http://schemas.openxmlformats.org/drawingml/2006/main">
+            <a:off x="7096125" y="3838575"/>
+            <a:ext cx="3619500" cy="361950"/>
+          </a:xfrm>
+          <a:prstGeom xmlns:a="http://schemas.openxmlformats.org/drawingml/2006/main" prst="rect">
+            <a:avLst/>
+          </a:prstGeom>
+          <a:noFill xmlns:a="http://schemas.openxmlformats.org/drawingml/2006/main"/>
+          <a:ln xmlns:a="http://schemas.openxmlformats.org/drawingml/2006/main" w="0">
+            <a:noFill/>
+            <a:prstDash val="solid"/>
+          </a:ln>
+        </p:spPr>
+        <p:txBody>
+          <a:bodyPr xmlns:a="http://schemas.openxmlformats.org/drawingml/2006/main"/>
+          <a:lstStyle xmlns:a="http://schemas.openxmlformats.org/drawingml/2006/main"/>
+          <a:p xmlns:a="http://schemas.openxmlformats.org/drawingml/2006/main">
+            <a:pPr algn="l">
+              <a:defRPr sz="1275" b="0">
+                <a:solidFill>
+                  <a:srgbClr val="52606B"/>
+                </a:solidFill>
+              </a:defRPr>
+            </a:pPr>
+            <a:r>
+              <a:rPr sz="1275" b="0">
+                <a:solidFill>
+                  <a:srgbClr val="52606B"/>
+                </a:solidFill>
+              </a:rPr>
+              <a:t>b-roll, narração, dublagem, edição e legendas</a:t>
+            </a:r>
+          </a:p>
+        </p:txBody>
+      </p:sp>
+      <p:sp>
+        <p:nvSpPr>
+          <p:cNvPr id="18" name="">
+            <a:extLst xmlns:a="http://schemas.openxmlformats.org/drawingml/2006/main">
+              <a:ext uri="{FF2B5EF4-FFF2-40B4-BE49-F238E27FC236}">
+                <a16:creationId xmlns:a16="http://schemas.microsoft.com/office/drawing/2014/main" id="{CC56F166-C472-4F2E-A419-D514137AB512}"/>
+              </a:ext>
+            </a:extLst>
+          </p:cNvPr>
+          <p:cNvSpPr>
+            <a:spLocks xmlns:a="http://schemas.openxmlformats.org/drawingml/2006/main" noGrp="1"/>
+          </p:cNvSpPr>
+          <p:nvPr/>
+        </p:nvSpPr>
+        <p:spPr>
+          <a:xfrm xmlns:a="http://schemas.openxmlformats.org/drawingml/2006/main">
+            <a:off x="685800" y="4295775"/>
+            <a:ext cx="9982200" cy="9525"/>
+          </a:xfrm>
+          <a:prstGeom xmlns:a="http://schemas.openxmlformats.org/drawingml/2006/main" prst="rect">
+            <a:avLst/>
+          </a:prstGeom>
+          <a:solidFill xmlns:a="http://schemas.openxmlformats.org/drawingml/2006/main">
+            <a:srgbClr val="D6DDE3"/>
+          </a:solidFill>
+          <a:ln xmlns:a="http://schemas.openxmlformats.org/drawingml/2006/main" w="0">
+            <a:noFill/>
+            <a:prstDash val="solid"/>
+          </a:ln>
+        </p:spPr>
+      </p:sp>
+      <p:sp>
+        <p:nvSpPr>
+          <p:cNvPr id="19" name="">
+            <a:extLst xmlns:a="http://schemas.openxmlformats.org/drawingml/2006/main">
+              <a:ext uri="{FF2B5EF4-FFF2-40B4-BE49-F238E27FC236}">
+                <a16:creationId xmlns:a16="http://schemas.microsoft.com/office/drawing/2014/main" id="{B384BE88-F59C-473D-BB7D-E5E45103548B}"/>
+              </a:ext>
+            </a:extLst>
+          </p:cNvPr>
+          <p:cNvSpPr>
+            <a:spLocks xmlns:a="http://schemas.openxmlformats.org/drawingml/2006/main" noGrp="1"/>
+          </p:cNvSpPr>
+          <p:nvPr/>
+        </p:nvSpPr>
+        <p:spPr>
+          <a:xfrm xmlns:a="http://schemas.openxmlformats.org/drawingml/2006/main">
+            <a:off x="838200" y="4467225"/>
+            <a:ext cx="1809750" cy="266700"/>
+          </a:xfrm>
+          <a:prstGeom xmlns:a="http://schemas.openxmlformats.org/drawingml/2006/main" prst="rect">
+            <a:avLst/>
+          </a:prstGeom>
+          <a:noFill xmlns:a="http://schemas.openxmlformats.org/drawingml/2006/main"/>
+          <a:ln xmlns:a="http://schemas.openxmlformats.org/drawingml/2006/main" w="0">
+            <a:noFill/>
+            <a:prstDash val="solid"/>
+          </a:ln>
+        </p:spPr>
+        <p:txBody>
+          <a:bodyPr xmlns:a="http://schemas.openxmlformats.org/drawingml/2006/main"/>
+          <a:lstStyle xmlns:a="http://schemas.openxmlformats.org/drawingml/2006/main"/>
+          <a:p xmlns:a="http://schemas.openxmlformats.org/drawingml/2006/main">
+            <a:pPr algn="l">
+              <a:defRPr sz="1425" b="1">
+                <a:solidFill>
+                  <a:srgbClr val="172026"/>
+                </a:solidFill>
+              </a:defRPr>
+            </a:pPr>
+            <a:r>
+              <a:rPr sz="1425" b="1">
+                <a:solidFill>
+                  <a:srgbClr val="172026"/>
+                </a:solidFill>
+              </a:rPr>
+              <a:t>Reuniões</a:t>
+            </a:r>
+          </a:p>
+        </p:txBody>
+      </p:sp>
+      <p:sp>
+        <p:nvSpPr>
+          <p:cNvPr id="20" name="">
+            <a:extLst xmlns:a="http://schemas.openxmlformats.org/drawingml/2006/main">
+              <a:ext uri="{FF2B5EF4-FFF2-40B4-BE49-F238E27FC236}">
+                <a16:creationId xmlns:a16="http://schemas.microsoft.com/office/drawing/2014/main" id="{D5E25FEA-2BDE-4834-BAFF-FBDF41602843}"/>
+              </a:ext>
+            </a:extLst>
+          </p:cNvPr>
+          <p:cNvSpPr>
+            <a:spLocks xmlns:a="http://schemas.openxmlformats.org/drawingml/2006/main" noGrp="1"/>
+          </p:cNvSpPr>
+          <p:nvPr/>
+        </p:nvSpPr>
+        <p:spPr>
+          <a:xfrm xmlns:a="http://schemas.openxmlformats.org/drawingml/2006/main">
+            <a:off x="2952750" y="4467225"/>
+            <a:ext cx="3714750" cy="266700"/>
+          </a:xfrm>
+          <a:prstGeom xmlns:a="http://schemas.openxmlformats.org/drawingml/2006/main" prst="rect">
+            <a:avLst/>
+          </a:prstGeom>
+          <a:noFill xmlns:a="http://schemas.openxmlformats.org/drawingml/2006/main"/>
+          <a:ln xmlns:a="http://schemas.openxmlformats.org/drawingml/2006/main" w="0">
+            <a:noFill/>
+            <a:prstDash val="solid"/>
+          </a:ln>
+        </p:spPr>
+        <p:txBody>
+          <a:bodyPr xmlns:a="http://schemas.openxmlformats.org/drawingml/2006/main"/>
+          <a:lstStyle xmlns:a="http://schemas.openxmlformats.org/drawingml/2006/main"/>
+          <a:p xmlns:a="http://schemas.openxmlformats.org/drawingml/2006/main">
+            <a:pPr algn="l">
+              <a:defRPr sz="1275" b="1">
+                <a:solidFill>
+                  <a:srgbClr val="0E74BA"/>
+                </a:solidFill>
+              </a:defRPr>
+            </a:pPr>
+            <a:r>
+              <a:rPr sz="1275" b="1">
+                <a:solidFill>
+                  <a:srgbClr val="0E74BA"/>
+                </a:solidFill>
+              </a:rPr>
+              <a:t>Copilot ou Fireflies + Claude</a:t>
+            </a:r>
+          </a:p>
+        </p:txBody>
+      </p:sp>
+      <p:sp>
+        <p:nvSpPr>
+          <p:cNvPr id="21" name="">
+            <a:extLst xmlns:a="http://schemas.openxmlformats.org/drawingml/2006/main">
+              <a:ext uri="{FF2B5EF4-FFF2-40B4-BE49-F238E27FC236}">
+                <a16:creationId xmlns:a16="http://schemas.microsoft.com/office/drawing/2014/main" id="{31D97687-3E6B-41EF-8A87-570F68371C4B}"/>
+              </a:ext>
+            </a:extLst>
+          </p:cNvPr>
+          <p:cNvSpPr>
+            <a:spLocks xmlns:a="http://schemas.openxmlformats.org/drawingml/2006/main" noGrp="1"/>
+          </p:cNvSpPr>
+          <p:nvPr/>
+        </p:nvSpPr>
+        <p:spPr>
+          <a:xfrm xmlns:a="http://schemas.openxmlformats.org/drawingml/2006/main">
+            <a:off x="7096125" y="4467225"/>
+            <a:ext cx="3619500" cy="361950"/>
+          </a:xfrm>
+          <a:prstGeom xmlns:a="http://schemas.openxmlformats.org/drawingml/2006/main" prst="rect">
+            <a:avLst/>
+          </a:prstGeom>
+          <a:noFill xmlns:a="http://schemas.openxmlformats.org/drawingml/2006/main"/>
+          <a:ln xmlns:a="http://schemas.openxmlformats.org/drawingml/2006/main" w="0">
+            <a:noFill/>
+            <a:prstDash val="solid"/>
+          </a:ln>
+        </p:spPr>
+        <p:txBody>
+          <a:bodyPr xmlns:a="http://schemas.openxmlformats.org/drawingml/2006/main"/>
+          <a:lstStyle xmlns:a="http://schemas.openxmlformats.org/drawingml/2006/main"/>
+          <a:p xmlns:a="http://schemas.openxmlformats.org/drawingml/2006/main">
+            <a:pPr algn="l">
+              <a:defRPr sz="1275" b="0">
+                <a:solidFill>
+                  <a:srgbClr val="52606B"/>
+                </a:solidFill>
+              </a:defRPr>
+            </a:pPr>
+            <a:r>
+              <a:rPr sz="1275" b="0">
+                <a:solidFill>
+                  <a:srgbClr val="52606B"/>
+                </a:solidFill>
+              </a:rPr>
+              <a:t>ata, decisões, ações e briefing executivo</a:t>
+            </a:r>
+          </a:p>
+        </p:txBody>
+      </p:sp>
+      <p:sp>
+        <p:nvSpPr>
+          <p:cNvPr id="22" name="">
+            <a:extLst xmlns:a="http://schemas.openxmlformats.org/drawingml/2006/main">
+              <a:ext uri="{FF2B5EF4-FFF2-40B4-BE49-F238E27FC236}">
+                <a16:creationId xmlns:a16="http://schemas.microsoft.com/office/drawing/2014/main" id="{9A529B26-4FD2-42D4-95C8-78CACB13D81E}"/>
+              </a:ext>
+            </a:extLst>
+          </p:cNvPr>
+          <p:cNvSpPr>
+            <a:spLocks xmlns:a="http://schemas.openxmlformats.org/drawingml/2006/main" noGrp="1"/>
+          </p:cNvSpPr>
+          <p:nvPr/>
+        </p:nvSpPr>
+        <p:spPr>
+          <a:xfrm xmlns:a="http://schemas.openxmlformats.org/drawingml/2006/main">
+            <a:off x="685800" y="4924425"/>
+            <a:ext cx="9982200" cy="9525"/>
+          </a:xfrm>
+          <a:prstGeom xmlns:a="http://schemas.openxmlformats.org/drawingml/2006/main" prst="rect">
+            <a:avLst/>
+          </a:prstGeom>
+          <a:solidFill xmlns:a="http://schemas.openxmlformats.org/drawingml/2006/main">
+            <a:srgbClr val="D6DDE3"/>
+          </a:solidFill>
+          <a:ln xmlns:a="http://schemas.openxmlformats.org/drawingml/2006/main" w="0">
+            <a:noFill/>
+            <a:prstDash val="solid"/>
+          </a:ln>
+        </p:spPr>
+      </p:sp>
+      <p:sp>
+        <p:nvSpPr>
+          <p:cNvPr id="23" name="">
+            <a:extLst xmlns:a="http://schemas.openxmlformats.org/drawingml/2006/main">
+              <a:ext uri="{FF2B5EF4-FFF2-40B4-BE49-F238E27FC236}">
+                <a16:creationId xmlns:a16="http://schemas.microsoft.com/office/drawing/2014/main" id="{C4414FE2-95A0-43E5-9765-839EE424E0C1}"/>
+              </a:ext>
+            </a:extLst>
+          </p:cNvPr>
+          <p:cNvSpPr>
+            <a:spLocks xmlns:a="http://schemas.openxmlformats.org/drawingml/2006/main" noGrp="1"/>
+          </p:cNvSpPr>
+          <p:nvPr/>
+        </p:nvSpPr>
+        <p:spPr>
+          <a:xfrm xmlns:a="http://schemas.openxmlformats.org/drawingml/2006/main">
+            <a:off x="685800" y="6400800"/>
+            <a:ext cx="2095500" cy="171450"/>
+          </a:xfrm>
+          <a:prstGeom xmlns:a="http://schemas.openxmlformats.org/drawingml/2006/main" prst="rect">
+            <a:avLst/>
+          </a:prstGeom>
+          <a:noFill xmlns:a="http://schemas.openxmlformats.org/drawingml/2006/main"/>
+          <a:ln xmlns:a="http://schemas.openxmlformats.org/drawingml/2006/main" w="0">
+            <a:noFill/>
+            <a:prstDash val="solid"/>
+          </a:ln>
+        </p:spPr>
+        <p:txBody>
+          <a:bodyPr xmlns:a="http://schemas.openxmlformats.org/drawingml/2006/main"/>
+          <a:lstStyle xmlns:a="http://schemas.openxmlformats.org/drawingml/2006/main"/>
+          <a:p xmlns:a="http://schemas.openxmlformats.org/drawingml/2006/main">
+            <a:pPr algn="l">
+              <a:defRPr sz="825" b="0">
+                <a:solidFill>
+                  <a:srgbClr val="52606B"/>
+                </a:solidFill>
+              </a:defRPr>
+            </a:pPr>
+            <a:r>
+              <a:rPr sz="825" b="0">
+                <a:solidFill>
+                  <a:srgbClr val="52606B"/>
+                </a:solidFill>
+              </a:rPr>
+              <a:t>VLI | Comunicação</a:t>
+            </a:r>
+          </a:p>
+        </p:txBody>
+      </p:sp>
+      <p:sp>
+        <p:nvSpPr>
+          <p:cNvPr id="24" name="">
+            <a:extLst xmlns:a="http://schemas.openxmlformats.org/drawingml/2006/main">
+              <a:ext uri="{FF2B5EF4-FFF2-40B4-BE49-F238E27FC236}">
+                <a16:creationId xmlns:a16="http://schemas.microsoft.com/office/drawing/2014/main" id="{381BF309-E96C-4A32-9C20-9A2C4949F5CC}"/>
+              </a:ext>
+            </a:extLst>
+          </p:cNvPr>
+          <p:cNvSpPr>
+            <a:spLocks xmlns:a="http://schemas.openxmlformats.org/drawingml/2006/main" noGrp="1"/>
+          </p:cNvSpPr>
+          <p:nvPr/>
+        </p:nvSpPr>
+        <p:spPr>
+          <a:xfrm xmlns:a="http://schemas.openxmlformats.org/drawingml/2006/main">
+            <a:off x="11049000" y="6400800"/>
+            <a:ext cx="419100" cy="171450"/>
+          </a:xfrm>
+          <a:prstGeom xmlns:a="http://schemas.openxmlformats.org/drawingml/2006/main" prst="rect">
+            <a:avLst/>
+          </a:prstGeom>
+          <a:noFill xmlns:a="http://schemas.openxmlformats.org/drawingml/2006/main"/>
+          <a:ln xmlns:a="http://schemas.openxmlformats.org/drawingml/2006/main" w="0">
+            <a:noFill/>
+            <a:prstDash val="solid"/>
+          </a:ln>
+        </p:spPr>
+        <p:txBody>
+          <a:bodyPr xmlns:a="http://schemas.openxmlformats.org/drawingml/2006/main"/>
+          <a:lstStyle xmlns:a="http://schemas.openxmlformats.org/drawingml/2006/main"/>
+          <a:p xmlns:a="http://schemas.openxmlformats.org/drawingml/2006/main">
+            <a:pPr algn="l">
+              <a:defRPr sz="825" b="0">
+                <a:solidFill>
+                  <a:srgbClr val="52606B"/>
+                </a:solidFill>
+              </a:defRPr>
+            </a:pPr>
+            <a:r>
+              <a:rPr sz="825" b="0">
+                <a:solidFill>
+                  <a:srgbClr val="52606B"/>
+                </a:solidFill>
+              </a:rPr>
+              <a:t>05</a:t>
+            </a:r>
+          </a:p>
+        </p:txBody>
+      </p:sp>
+    </p:spTree>
+    <p:extLst>
+      <p:ext uri="{BB962C8B-B14F-4D97-AF65-F5344CB8AC3E}">
+        <p14:creationId xmlns:p14="http://schemas.microsoft.com/office/powerpoint/2010/main" val="447726996"/>
+      </p:ext>
+    </p:extLst>
+  </p:cSld>
+</p:sld>
+</file>
+
+<file path=ppt/slides/slide6.xml><?xml version="1.0" encoding="utf-8"?>
+<p:sld xmlns:p="http://schemas.openxmlformats.org/presentationml/2006/main">
+  <p:cSld>
+    <p:bg>
+      <p:bgPr>
+        <a:solidFill xmlns:a="http://schemas.openxmlformats.org/drawingml/2006/main">
+          <a:srgbClr val="F5F7F8"/>
+        </a:solidFill>
+      </p:bgPr>
+    </p:bg>
+    <p:spTree>
+      <p:nvGrpSpPr>
+        <p:cNvPr id="1" name=""/>
+        <p:cNvGrpSpPr/>
+        <p:nvPr/>
+      </p:nvGrpSpPr>
+      <p:grpSpPr>
+        <a:xfrm xmlns:a="http://schemas.openxmlformats.org/drawingml/2006/main"/>
+      </p:grpSpPr>
+      <p:sp>
+        <p:nvSpPr>
+          <p:cNvPr id="14" name="">
+            <a:extLst xmlns:a="http://schemas.openxmlformats.org/drawingml/2006/main">
+              <a:ext uri="{FF2B5EF4-FFF2-40B4-BE49-F238E27FC236}">
+                <a16:creationId xmlns:a16="http://schemas.microsoft.com/office/drawing/2014/main" id="{4B1A0BA8-0637-4A24-8734-DE3243905D45}"/>
+              </a:ext>
+            </a:extLst>
+          </p:cNvPr>
+          <p:cNvSpPr>
+            <a:spLocks xmlns:a="http://schemas.openxmlformats.org/drawingml/2006/main" noGrp="1"/>
+          </p:cNvSpPr>
+          <p:nvPr/>
+        </p:nvSpPr>
+        <p:spPr>
+          <a:xfrm xmlns:a="http://schemas.openxmlformats.org/drawingml/2006/main">
+            <a:off x="685800" y="514350"/>
+            <a:ext cx="8191500" cy="457200"/>
+          </a:xfrm>
+          <a:prstGeom xmlns:a="http://schemas.openxmlformats.org/drawingml/2006/main" prst="rect">
+            <a:avLst/>
+          </a:prstGeom>
+          <a:noFill xmlns:a="http://schemas.openxmlformats.org/drawingml/2006/main"/>
+          <a:ln xmlns:a="http://schemas.openxmlformats.org/drawingml/2006/main" w="0">
+            <a:noFill/>
+            <a:prstDash val="solid"/>
+          </a:ln>
+        </p:spPr>
+        <p:txBody>
+          <a:bodyPr xmlns:a="http://schemas.openxmlformats.org/drawingml/2006/main"/>
+          <a:lstStyle xmlns:a="http://schemas.openxmlformats.org/drawingml/2006/main"/>
+          <a:p xmlns:a="http://schemas.openxmlformats.org/drawingml/2006/main">
+            <a:pPr algn="l">
+              <a:defRPr sz="2550" b="1">
+                <a:solidFill>
+                  <a:srgbClr val="172026"/>
+                </a:solidFill>
+              </a:defRPr>
+            </a:pPr>
+            <a:r>
+              <a:rPr sz="2550" b="1">
+                <a:solidFill>
+                  <a:srgbClr val="172026"/>
+                </a:solidFill>
+              </a:rPr>
+              <a:t>Segurança e criação</a:t>
+            </a:r>
+          </a:p>
+        </p:txBody>
+      </p:sp>
+      <p:sp>
+        <p:nvSpPr>
+          <p:cNvPr id="2" name="">
+            <a:extLst xmlns:a="http://schemas.openxmlformats.org/drawingml/2006/main">
+              <a:ext uri="{FF2B5EF4-FFF2-40B4-BE49-F238E27FC236}">
+                <a16:creationId xmlns:a16="http://schemas.microsoft.com/office/drawing/2014/main" id="{4194B192-6D95-423A-9F04-31692A384DC7}"/>
+              </a:ext>
+            </a:extLst>
+          </p:cNvPr>
+          <p:cNvSpPr>
+            <a:spLocks xmlns:a="http://schemas.openxmlformats.org/drawingml/2006/main" noGrp="1"/>
+          </p:cNvSpPr>
+          <p:nvPr/>
+        </p:nvSpPr>
+        <p:spPr>
+          <a:xfrm xmlns:a="http://schemas.openxmlformats.org/drawingml/2006/main">
+            <a:off x="685800" y="1066800"/>
+            <a:ext cx="8763000" cy="495300"/>
+          </a:xfrm>
+          <a:prstGeom xmlns:a="http://schemas.openxmlformats.org/drawingml/2006/main" prst="rect">
+            <a:avLst/>
+          </a:prstGeom>
+          <a:noFill xmlns:a="http://schemas.openxmlformats.org/drawingml/2006/main"/>
+          <a:ln xmlns:a="http://schemas.openxmlformats.org/drawingml/2006/main" w="0">
+            <a:noFill/>
+            <a:prstDash val="solid"/>
+          </a:ln>
+        </p:spPr>
+        <p:txBody>
+          <a:bodyPr xmlns:a="http://schemas.openxmlformats.org/drawingml/2006/main"/>
+          <a:lstStyle xmlns:a="http://schemas.openxmlformats.org/drawingml/2006/main"/>
+          <a:p xmlns:a="http://schemas.openxmlformats.org/drawingml/2006/main">
+            <a:pPr algn="l">
+              <a:defRPr sz="1425" b="0">
+                <a:solidFill>
+                  <a:srgbClr val="52606B"/>
+                </a:solidFill>
+              </a:defRPr>
+            </a:pPr>
+            <a:r>
+              <a:rPr sz="1425" b="0">
+                <a:solidFill>
+                  <a:srgbClr val="52606B"/>
+                </a:solidFill>
+              </a:rPr>
               <a:t>A recomendação precisa ser defensável para Comunicação, TI e Jurídico.</a:t>
             </a:r>
           </a:p>
@@ -3644,7 +7004,7 @@
           <p:cNvPr id="3" name="">
             <a:extLst xmlns:a="http://schemas.openxmlformats.org/drawingml/2006/main">
               <a:ext uri="{FF2B5EF4-FFF2-40B4-BE49-F238E27FC236}">
-                <a16:creationId xmlns:a16="http://schemas.microsoft.com/office/drawing/2014/main" id="{4DADC606-CE84-453A-AAC2-F0EA318D4601}"/>
+                <a16:creationId xmlns:a16="http://schemas.microsoft.com/office/drawing/2014/main" id="{2323A94C-11C6-45CE-820B-10555F42414A}"/>
               </a:ext>
             </a:extLst>
           </p:cNvPr>
@@ -3677,7 +7037,7 @@
           <p:cNvPr id="4" name="">
             <a:extLst xmlns:a="http://schemas.openxmlformats.org/drawingml/2006/main">
               <a:ext uri="{FF2B5EF4-FFF2-40B4-BE49-F238E27FC236}">
-                <a16:creationId xmlns:a16="http://schemas.microsoft.com/office/drawing/2014/main" id="{B2AA95A5-9AF4-4222-9479-4F1CCB5DBA52}"/>
+                <a16:creationId xmlns:a16="http://schemas.microsoft.com/office/drawing/2014/main" id="{77C92B01-DF28-4992-8C99-54D696125346}"/>
               </a:ext>
             </a:extLst>
           </p:cNvPr>
@@ -3710,7 +7070,7 @@
           <p:cNvPr id="5" name="">
             <a:extLst xmlns:a="http://schemas.openxmlformats.org/drawingml/2006/main">
               <a:ext uri="{FF2B5EF4-FFF2-40B4-BE49-F238E27FC236}">
-                <a16:creationId xmlns:a16="http://schemas.microsoft.com/office/drawing/2014/main" id="{B0BB5A46-BC53-475B-BD01-695208FB111D}"/>
+                <a16:creationId xmlns:a16="http://schemas.microsoft.com/office/drawing/2014/main" id="{511DFE43-ECF9-4403-9070-62F8F07A5FA8}"/>
               </a:ext>
             </a:extLst>
           </p:cNvPr>
@@ -3760,7 +7120,7 @@
           <p:cNvPr id="6" name="">
             <a:extLst xmlns:a="http://schemas.openxmlformats.org/drawingml/2006/main">
               <a:ext uri="{FF2B5EF4-FFF2-40B4-BE49-F238E27FC236}">
-                <a16:creationId xmlns:a16="http://schemas.microsoft.com/office/drawing/2014/main" id="{035577A1-CAAB-4139-9A60-C2DE7C610C50}"/>
+                <a16:creationId xmlns:a16="http://schemas.microsoft.com/office/drawing/2014/main" id="{21750675-70AB-4EE9-8364-C31E1DCDB07B}"/>
               </a:ext>
             </a:extLst>
           </p:cNvPr>
@@ -3810,7 +7170,7 @@
           <p:cNvPr id="7" name="">
             <a:extLst xmlns:a="http://schemas.openxmlformats.org/drawingml/2006/main">
               <a:ext uri="{FF2B5EF4-FFF2-40B4-BE49-F238E27FC236}">
-                <a16:creationId xmlns:a16="http://schemas.microsoft.com/office/drawing/2014/main" id="{DB1131CC-660E-4B62-8CE5-01697E738964}"/>
+                <a16:creationId xmlns:a16="http://schemas.microsoft.com/office/drawing/2014/main" id="{574F1DFA-BA17-44F4-9AF1-068825CF9F92}"/>
               </a:ext>
             </a:extLst>
           </p:cNvPr>
@@ -3860,7 +7220,7 @@
           <p:cNvPr id="8" name="">
             <a:extLst xmlns:a="http://schemas.openxmlformats.org/drawingml/2006/main">
               <a:ext uri="{FF2B5EF4-FFF2-40B4-BE49-F238E27FC236}">
-                <a16:creationId xmlns:a16="http://schemas.microsoft.com/office/drawing/2014/main" id="{6CED5388-28BC-4A41-9A0A-6DF2E74986D7}"/>
+                <a16:creationId xmlns:a16="http://schemas.microsoft.com/office/drawing/2014/main" id="{2BB69C5D-38D3-4C2F-A4E1-C206456F6ED2}"/>
               </a:ext>
             </a:extLst>
           </p:cNvPr>
@@ -3910,7 +7270,7 @@
           <p:cNvPr id="9" name="">
             <a:extLst xmlns:a="http://schemas.openxmlformats.org/drawingml/2006/main">
               <a:ext uri="{FF2B5EF4-FFF2-40B4-BE49-F238E27FC236}">
-                <a16:creationId xmlns:a16="http://schemas.microsoft.com/office/drawing/2014/main" id="{F0D0B81D-60D9-47B1-B073-CD00D729C3D4}"/>
+                <a16:creationId xmlns:a16="http://schemas.microsoft.com/office/drawing/2014/main" id="{D18D1C50-46E0-4FF2-BB73-D74D1A6AEB7B}"/>
               </a:ext>
             </a:extLst>
           </p:cNvPr>
@@ -3941,7 +7301,7 @@
           <p:cNvPr id="10" name="">
             <a:extLst xmlns:a="http://schemas.openxmlformats.org/drawingml/2006/main">
               <a:ext uri="{FF2B5EF4-FFF2-40B4-BE49-F238E27FC236}">
-                <a16:creationId xmlns:a16="http://schemas.microsoft.com/office/drawing/2014/main" id="{8F13AA7D-89FA-44B9-8577-3ED1DA880FD4}"/>
+                <a16:creationId xmlns:a16="http://schemas.microsoft.com/office/drawing/2014/main" id="{4667E305-85C5-4FFB-B188-C56C31F4E979}"/>
               </a:ext>
             </a:extLst>
           </p:cNvPr>
@@ -3991,7 +7351,7 @@
           <p:cNvPr id="11" name="">
             <a:extLst xmlns:a="http://schemas.openxmlformats.org/drawingml/2006/main">
               <a:ext uri="{FF2B5EF4-FFF2-40B4-BE49-F238E27FC236}">
-                <a16:creationId xmlns:a16="http://schemas.microsoft.com/office/drawing/2014/main" id="{48F4A9FF-09C0-4B96-A5D7-FA265ADE7FB2}"/>
+                <a16:creationId xmlns:a16="http://schemas.microsoft.com/office/drawing/2014/main" id="{79C5C951-2ED7-4CF2-A6F5-7647F8BEDB4D}"/>
               </a:ext>
             </a:extLst>
           </p:cNvPr>
@@ -4041,7 +7401,7 @@
           <p:cNvPr id="12" name="">
             <a:extLst xmlns:a="http://schemas.openxmlformats.org/drawingml/2006/main">
               <a:ext uri="{FF2B5EF4-FFF2-40B4-BE49-F238E27FC236}">
-                <a16:creationId xmlns:a16="http://schemas.microsoft.com/office/drawing/2014/main" id="{B851BCB9-00FC-4EC7-8B33-239BAAAE4DFC}"/>
+                <a16:creationId xmlns:a16="http://schemas.microsoft.com/office/drawing/2014/main" id="{490547C6-4794-4CFD-8AB1-D939F838EECB}"/>
               </a:ext>
             </a:extLst>
           </p:cNvPr>
@@ -4091,7 +7451,7 @@
           <p:cNvPr id="13" name="">
             <a:extLst xmlns:a="http://schemas.openxmlformats.org/drawingml/2006/main">
               <a:ext uri="{FF2B5EF4-FFF2-40B4-BE49-F238E27FC236}">
-                <a16:creationId xmlns:a16="http://schemas.microsoft.com/office/drawing/2014/main" id="{22C06F2F-C351-47F0-A507-8129E7485DAE}"/>
+                <a16:creationId xmlns:a16="http://schemas.microsoft.com/office/drawing/2014/main" id="{D9BBA3F5-6DDE-4DF4-BBF4-FA6282CA95A8}"/>
               </a:ext>
             </a:extLst>
           </p:cNvPr>
@@ -4131,7 +7491,7 @@
                   <a:srgbClr val="52606B"/>
                 </a:solidFill>
               </a:rPr>
-              <a:t>04</a:t>
+              <a:t>06</a:t>
             </a:r>
           </a:p>
         </p:txBody>
@@ -4139,14 +7499,14 @@
     </p:spTree>
     <p:extLst>
       <p:ext uri="{BB962C8B-B14F-4D97-AF65-F5344CB8AC3E}">
-        <p14:creationId xmlns:p14="http://schemas.microsoft.com/office/powerpoint/2010/main" val="885361411"/>
+        <p14:creationId xmlns:p14="http://schemas.microsoft.com/office/powerpoint/2010/main" val="232438707"/>
       </p:ext>
     </p:extLst>
   </p:cSld>
 </p:sld>
 </file>
 
-<file path=ppt/slides/slide5.xml><?xml version="1.0" encoding="utf-8"?>
+<file path=ppt/slides/slide7.xml><?xml version="1.0" encoding="utf-8"?>
 <p:sld xmlns:p="http://schemas.openxmlformats.org/presentationml/2006/main">
   <p:cSld>
     <p:bg>
@@ -4170,7 +7530,7 @@
           <p:cNvPr id="32" name="">
             <a:extLst xmlns:a="http://schemas.openxmlformats.org/drawingml/2006/main">
               <a:ext uri="{FF2B5EF4-FFF2-40B4-BE49-F238E27FC236}">
-                <a16:creationId xmlns:a16="http://schemas.microsoft.com/office/drawing/2014/main" id="{73DABF6D-C609-4CE2-BB24-4C254EEDA268}"/>
+                <a16:creationId xmlns:a16="http://schemas.microsoft.com/office/drawing/2014/main" id="{967B4E1E-7216-4949-B0FF-14A6F99F18FD}"/>
               </a:ext>
             </a:extLst>
           </p:cNvPr>
@@ -4220,7 +7580,7 @@
           <p:cNvPr id="2" name="">
             <a:extLst xmlns:a="http://schemas.openxmlformats.org/drawingml/2006/main">
               <a:ext uri="{FF2B5EF4-FFF2-40B4-BE49-F238E27FC236}">
-                <a16:creationId xmlns:a16="http://schemas.microsoft.com/office/drawing/2014/main" id="{DEA2CFFA-6084-4789-A8C3-5D85C52CA4DE}"/>
+                <a16:creationId xmlns:a16="http://schemas.microsoft.com/office/drawing/2014/main" id="{838313B0-774B-4F02-B912-27FC648E10ED}"/>
               </a:ext>
             </a:extLst>
           </p:cNvPr>
@@ -4270,7 +7630,7 @@
           <p:cNvPr id="3" name="">
             <a:extLst xmlns:a="http://schemas.openxmlformats.org/drawingml/2006/main">
               <a:ext uri="{FF2B5EF4-FFF2-40B4-BE49-F238E27FC236}">
-                <a16:creationId xmlns:a16="http://schemas.microsoft.com/office/drawing/2014/main" id="{BA707B55-59AA-4AC3-8655-FD1237F43E6B}"/>
+                <a16:creationId xmlns:a16="http://schemas.microsoft.com/office/drawing/2014/main" id="{00594BCD-497B-42F9-A4CD-B4A12DBC30CF}"/>
               </a:ext>
             </a:extLst>
           </p:cNvPr>
@@ -4320,7 +7680,7 @@
           <p:cNvPr id="4" name="">
             <a:extLst xmlns:a="http://schemas.openxmlformats.org/drawingml/2006/main">
               <a:ext uri="{FF2B5EF4-FFF2-40B4-BE49-F238E27FC236}">
-                <a16:creationId xmlns:a16="http://schemas.microsoft.com/office/drawing/2014/main" id="{BB0CF19B-BC2A-4AD4-B766-20A87C1BB355}"/>
+                <a16:creationId xmlns:a16="http://schemas.microsoft.com/office/drawing/2014/main" id="{39AF52A7-15CB-4F28-BF11-0CF8229E06BE}"/>
               </a:ext>
             </a:extLst>
           </p:cNvPr>
@@ -4370,7 +7730,7 @@
           <p:cNvPr id="5" name="">
             <a:extLst xmlns:a="http://schemas.openxmlformats.org/drawingml/2006/main">
               <a:ext uri="{FF2B5EF4-FFF2-40B4-BE49-F238E27FC236}">
-                <a16:creationId xmlns:a16="http://schemas.microsoft.com/office/drawing/2014/main" id="{D6C1BE86-BFB5-4ECC-B57D-79BAF743A8DA}"/>
+                <a16:creationId xmlns:a16="http://schemas.microsoft.com/office/drawing/2014/main" id="{27BD7776-A666-4180-BD09-79093572E474}"/>
               </a:ext>
             </a:extLst>
           </p:cNvPr>
@@ -4420,7 +7780,7 @@
           <p:cNvPr id="6" name="">
             <a:extLst xmlns:a="http://schemas.openxmlformats.org/drawingml/2006/main">
               <a:ext uri="{FF2B5EF4-FFF2-40B4-BE49-F238E27FC236}">
-                <a16:creationId xmlns:a16="http://schemas.microsoft.com/office/drawing/2014/main" id="{33B1CD11-2F9C-4DB3-857B-0FE62787860A}"/>
+                <a16:creationId xmlns:a16="http://schemas.microsoft.com/office/drawing/2014/main" id="{947A33F8-D4F7-4D26-9FC1-9216983EBB96}"/>
               </a:ext>
             </a:extLst>
           </p:cNvPr>
@@ -4451,7 +7811,7 @@
           <p:cNvPr id="7" name="">
             <a:extLst xmlns:a="http://schemas.openxmlformats.org/drawingml/2006/main">
               <a:ext uri="{FF2B5EF4-FFF2-40B4-BE49-F238E27FC236}">
-                <a16:creationId xmlns:a16="http://schemas.microsoft.com/office/drawing/2014/main" id="{0FBA1AF7-582E-4878-B63A-7793E2185ED4}"/>
+                <a16:creationId xmlns:a16="http://schemas.microsoft.com/office/drawing/2014/main" id="{11D1DBA5-2AB4-449B-9A53-3235E5797009}"/>
               </a:ext>
             </a:extLst>
           </p:cNvPr>
@@ -4501,7 +7861,7 @@
           <p:cNvPr id="8" name="">
             <a:extLst xmlns:a="http://schemas.openxmlformats.org/drawingml/2006/main">
               <a:ext uri="{FF2B5EF4-FFF2-40B4-BE49-F238E27FC236}">
-                <a16:creationId xmlns:a16="http://schemas.microsoft.com/office/drawing/2014/main" id="{B94F8E66-EE18-4299-8E48-BB8EA1A5063C}"/>
+                <a16:creationId xmlns:a16="http://schemas.microsoft.com/office/drawing/2014/main" id="{F35A63C5-B3A5-4941-8D04-5080E1551C8E}"/>
               </a:ext>
             </a:extLst>
           </p:cNvPr>
@@ -4551,7 +7911,7 @@
           <p:cNvPr id="9" name="">
             <a:extLst xmlns:a="http://schemas.openxmlformats.org/drawingml/2006/main">
               <a:ext uri="{FF2B5EF4-FFF2-40B4-BE49-F238E27FC236}">
-                <a16:creationId xmlns:a16="http://schemas.microsoft.com/office/drawing/2014/main" id="{F0390B7F-60D2-4E8A-99C0-0CB568E7CD32}"/>
+                <a16:creationId xmlns:a16="http://schemas.microsoft.com/office/drawing/2014/main" id="{A467A857-5F02-41DC-BC50-BA9FA2D1ED87}"/>
               </a:ext>
             </a:extLst>
           </p:cNvPr>
@@ -4601,7 +7961,7 @@
           <p:cNvPr id="10" name="">
             <a:extLst xmlns:a="http://schemas.openxmlformats.org/drawingml/2006/main">
               <a:ext uri="{FF2B5EF4-FFF2-40B4-BE49-F238E27FC236}">
-                <a16:creationId xmlns:a16="http://schemas.microsoft.com/office/drawing/2014/main" id="{457DBD70-763D-4A6B-A2D3-4B30403D6A1F}"/>
+                <a16:creationId xmlns:a16="http://schemas.microsoft.com/office/drawing/2014/main" id="{EC83055F-5AD4-4FCC-93B4-0943085B709E}"/>
               </a:ext>
             </a:extLst>
           </p:cNvPr>
@@ -4632,7 +7992,7 @@
           <p:cNvPr id="11" name="">
             <a:extLst xmlns:a="http://schemas.openxmlformats.org/drawingml/2006/main">
               <a:ext uri="{FF2B5EF4-FFF2-40B4-BE49-F238E27FC236}">
-                <a16:creationId xmlns:a16="http://schemas.microsoft.com/office/drawing/2014/main" id="{20A73483-3F3B-449C-9F7D-C7A3289E7698}"/>
+                <a16:creationId xmlns:a16="http://schemas.microsoft.com/office/drawing/2014/main" id="{A8B086B1-AF93-4FA1-9F5C-6D5C8E022D9F}"/>
               </a:ext>
             </a:extLst>
           </p:cNvPr>
@@ -4682,7 +8042,7 @@
           <p:cNvPr id="12" name="">
             <a:extLst xmlns:a="http://schemas.openxmlformats.org/drawingml/2006/main">
               <a:ext uri="{FF2B5EF4-FFF2-40B4-BE49-F238E27FC236}">
-                <a16:creationId xmlns:a16="http://schemas.microsoft.com/office/drawing/2014/main" id="{1D29D5BF-0ACC-4F83-A774-6CBEA6FD6B60}"/>
+                <a16:creationId xmlns:a16="http://schemas.microsoft.com/office/drawing/2014/main" id="{EF4B4B6B-6A4E-4E9E-B4E3-05915BCEE327}"/>
               </a:ext>
             </a:extLst>
           </p:cNvPr>
@@ -4732,7 +8092,7 @@
           <p:cNvPr id="13" name="">
             <a:extLst xmlns:a="http://schemas.openxmlformats.org/drawingml/2006/main">
               <a:ext uri="{FF2B5EF4-FFF2-40B4-BE49-F238E27FC236}">
-                <a16:creationId xmlns:a16="http://schemas.microsoft.com/office/drawing/2014/main" id="{7C2D6D4C-2823-4456-AFF4-1AD13D1A166B}"/>
+                <a16:creationId xmlns:a16="http://schemas.microsoft.com/office/drawing/2014/main" id="{F63CD831-72C5-4500-9D2E-646093E22BE9}"/>
               </a:ext>
             </a:extLst>
           </p:cNvPr>
@@ -4782,7 +8142,7 @@
           <p:cNvPr id="14" name="">
             <a:extLst xmlns:a="http://schemas.openxmlformats.org/drawingml/2006/main">
               <a:ext uri="{FF2B5EF4-FFF2-40B4-BE49-F238E27FC236}">
-                <a16:creationId xmlns:a16="http://schemas.microsoft.com/office/drawing/2014/main" id="{4E9AD3F5-C103-44D9-8B4E-CFBE0E8CFCC4}"/>
+                <a16:creationId xmlns:a16="http://schemas.microsoft.com/office/drawing/2014/main" id="{37C18D1C-6956-44BD-82A5-68C5E0AC2DC6}"/>
               </a:ext>
             </a:extLst>
           </p:cNvPr>
@@ -4813,7 +8173,7 @@
           <p:cNvPr id="15" name="">
             <a:extLst xmlns:a="http://schemas.openxmlformats.org/drawingml/2006/main">
               <a:ext uri="{FF2B5EF4-FFF2-40B4-BE49-F238E27FC236}">
-                <a16:creationId xmlns:a16="http://schemas.microsoft.com/office/drawing/2014/main" id="{DA00EAB9-B738-46FB-9F1C-B0EDDEE77FC6}"/>
+                <a16:creationId xmlns:a16="http://schemas.microsoft.com/office/drawing/2014/main" id="{9A54F842-9FE9-4334-A1EF-B94195B47B59}"/>
               </a:ext>
             </a:extLst>
           </p:cNvPr>
@@ -4863,7 +8223,7 @@
           <p:cNvPr id="16" name="">
             <a:extLst xmlns:a="http://schemas.openxmlformats.org/drawingml/2006/main">
               <a:ext uri="{FF2B5EF4-FFF2-40B4-BE49-F238E27FC236}">
-                <a16:creationId xmlns:a16="http://schemas.microsoft.com/office/drawing/2014/main" id="{B7E6897C-3029-49E8-B9A4-4A085C3C4421}"/>
+                <a16:creationId xmlns:a16="http://schemas.microsoft.com/office/drawing/2014/main" id="{6B9767B3-82B6-483A-99DE-76476361477C}"/>
               </a:ext>
             </a:extLst>
           </p:cNvPr>
@@ -4913,7 +8273,7 @@
           <p:cNvPr id="17" name="">
             <a:extLst xmlns:a="http://schemas.openxmlformats.org/drawingml/2006/main">
               <a:ext uri="{FF2B5EF4-FFF2-40B4-BE49-F238E27FC236}">
-                <a16:creationId xmlns:a16="http://schemas.microsoft.com/office/drawing/2014/main" id="{7952381A-3BFF-477D-A72A-6014DA52E47B}"/>
+                <a16:creationId xmlns:a16="http://schemas.microsoft.com/office/drawing/2014/main" id="{4828939B-A83F-4C53-A630-4C677DC1CF1F}"/>
               </a:ext>
             </a:extLst>
           </p:cNvPr>
@@ -4963,7 +8323,7 @@
           <p:cNvPr id="18" name="">
             <a:extLst xmlns:a="http://schemas.openxmlformats.org/drawingml/2006/main">
               <a:ext uri="{FF2B5EF4-FFF2-40B4-BE49-F238E27FC236}">
-                <a16:creationId xmlns:a16="http://schemas.microsoft.com/office/drawing/2014/main" id="{DE22906A-3C2C-48E5-B4FF-F58AF77D28F1}"/>
+                <a16:creationId xmlns:a16="http://schemas.microsoft.com/office/drawing/2014/main" id="{81CA3CF8-0B55-4F32-AE9A-0F20C4924F55}"/>
               </a:ext>
             </a:extLst>
           </p:cNvPr>
@@ -4994,7 +8354,7 @@
           <p:cNvPr id="19" name="">
             <a:extLst xmlns:a="http://schemas.openxmlformats.org/drawingml/2006/main">
               <a:ext uri="{FF2B5EF4-FFF2-40B4-BE49-F238E27FC236}">
-                <a16:creationId xmlns:a16="http://schemas.microsoft.com/office/drawing/2014/main" id="{5F2E5232-1256-4B5E-A533-3685ADF7A7AB}"/>
+                <a16:creationId xmlns:a16="http://schemas.microsoft.com/office/drawing/2014/main" id="{F23E82AD-7FFA-4D36-960B-26CABF3F056B}"/>
               </a:ext>
             </a:extLst>
           </p:cNvPr>
@@ -5044,7 +8404,7 @@
           <p:cNvPr id="20" name="">
             <a:extLst xmlns:a="http://schemas.openxmlformats.org/drawingml/2006/main">
               <a:ext uri="{FF2B5EF4-FFF2-40B4-BE49-F238E27FC236}">
-                <a16:creationId xmlns:a16="http://schemas.microsoft.com/office/drawing/2014/main" id="{F28E9464-C109-40DA-96E0-96F94C8B1797}"/>
+                <a16:creationId xmlns:a16="http://schemas.microsoft.com/office/drawing/2014/main" id="{642822A2-BDF8-428B-911C-6C27561FA309}"/>
               </a:ext>
             </a:extLst>
           </p:cNvPr>
@@ -5094,7 +8454,7 @@
           <p:cNvPr id="21" name="">
             <a:extLst xmlns:a="http://schemas.openxmlformats.org/drawingml/2006/main">
               <a:ext uri="{FF2B5EF4-FFF2-40B4-BE49-F238E27FC236}">
-                <a16:creationId xmlns:a16="http://schemas.microsoft.com/office/drawing/2014/main" id="{2C9EA41D-3C38-4546-BB7F-54471597D633}"/>
+                <a16:creationId xmlns:a16="http://schemas.microsoft.com/office/drawing/2014/main" id="{121ED2A1-217A-495B-83AC-1CAFEBC5E58D}"/>
               </a:ext>
             </a:extLst>
           </p:cNvPr>
@@ -5144,7 +8504,7 @@
           <p:cNvPr id="22" name="">
             <a:extLst xmlns:a="http://schemas.openxmlformats.org/drawingml/2006/main">
               <a:ext uri="{FF2B5EF4-FFF2-40B4-BE49-F238E27FC236}">
-                <a16:creationId xmlns:a16="http://schemas.microsoft.com/office/drawing/2014/main" id="{DD75EB79-0D2D-478D-AEBD-9D4E659B96C2}"/>
+                <a16:creationId xmlns:a16="http://schemas.microsoft.com/office/drawing/2014/main" id="{9E94C2FE-BBBF-4E0D-BF32-2AC7EB76FD6B}"/>
               </a:ext>
             </a:extLst>
           </p:cNvPr>
@@ -5175,7 +8535,7 @@
           <p:cNvPr id="23" name="">
             <a:extLst xmlns:a="http://schemas.openxmlformats.org/drawingml/2006/main">
               <a:ext uri="{FF2B5EF4-FFF2-40B4-BE49-F238E27FC236}">
-                <a16:creationId xmlns:a16="http://schemas.microsoft.com/office/drawing/2014/main" id="{A783FA6B-30E2-4139-95EC-9D80483B868C}"/>
+                <a16:creationId xmlns:a16="http://schemas.microsoft.com/office/drawing/2014/main" id="{7B0AC96C-0BD4-44DE-A695-3B94648539EE}"/>
               </a:ext>
             </a:extLst>
           </p:cNvPr>
@@ -5225,7 +8585,7 @@
           <p:cNvPr id="24" name="">
             <a:extLst xmlns:a="http://schemas.openxmlformats.org/drawingml/2006/main">
               <a:ext uri="{FF2B5EF4-FFF2-40B4-BE49-F238E27FC236}">
-                <a16:creationId xmlns:a16="http://schemas.microsoft.com/office/drawing/2014/main" id="{6A64F436-7D91-47A4-8183-74159E570FDD}"/>
+                <a16:creationId xmlns:a16="http://schemas.microsoft.com/office/drawing/2014/main" id="{3BF5F4D8-7D7B-4D62-B769-97B78AF89A14}"/>
               </a:ext>
             </a:extLst>
           </p:cNvPr>
@@ -5275,7 +8635,7 @@
           <p:cNvPr id="25" name="">
             <a:extLst xmlns:a="http://schemas.openxmlformats.org/drawingml/2006/main">
               <a:ext uri="{FF2B5EF4-FFF2-40B4-BE49-F238E27FC236}">
-                <a16:creationId xmlns:a16="http://schemas.microsoft.com/office/drawing/2014/main" id="{C6797DA7-4B4F-4687-82D4-CC5D86F7EC9D}"/>
+                <a16:creationId xmlns:a16="http://schemas.microsoft.com/office/drawing/2014/main" id="{6B16C821-84F1-4F8A-B00A-571781A7B206}"/>
               </a:ext>
             </a:extLst>
           </p:cNvPr>
@@ -5325,7 +8685,7 @@
           <p:cNvPr id="26" name="">
             <a:extLst xmlns:a="http://schemas.openxmlformats.org/drawingml/2006/main">
               <a:ext uri="{FF2B5EF4-FFF2-40B4-BE49-F238E27FC236}">
-                <a16:creationId xmlns:a16="http://schemas.microsoft.com/office/drawing/2014/main" id="{238FEA16-3C92-45E5-8482-B4389D8811B7}"/>
+                <a16:creationId xmlns:a16="http://schemas.microsoft.com/office/drawing/2014/main" id="{37E8E70C-7356-45BE-B386-0B780CFE76FB}"/>
               </a:ext>
             </a:extLst>
           </p:cNvPr>
@@ -5356,7 +8716,7 @@
           <p:cNvPr id="27" name="">
             <a:extLst xmlns:a="http://schemas.openxmlformats.org/drawingml/2006/main">
               <a:ext uri="{FF2B5EF4-FFF2-40B4-BE49-F238E27FC236}">
-                <a16:creationId xmlns:a16="http://schemas.microsoft.com/office/drawing/2014/main" id="{97D5EEC0-AAE0-488E-A098-3E350966E24E}"/>
+                <a16:creationId xmlns:a16="http://schemas.microsoft.com/office/drawing/2014/main" id="{0FD2AF4B-1EB5-4012-B508-0A81F2D5980F}"/>
               </a:ext>
             </a:extLst>
           </p:cNvPr>
@@ -5387,7 +8747,7 @@
           <p:cNvPr id="28" name="">
             <a:extLst xmlns:a="http://schemas.openxmlformats.org/drawingml/2006/main">
               <a:ext uri="{FF2B5EF4-FFF2-40B4-BE49-F238E27FC236}">
-                <a16:creationId xmlns:a16="http://schemas.microsoft.com/office/drawing/2014/main" id="{6018BCEE-B17D-49C8-8FB6-E478240F41DD}"/>
+                <a16:creationId xmlns:a16="http://schemas.microsoft.com/office/drawing/2014/main" id="{2C01EBF1-19E3-4D0D-BF74-95ED511BCD25}"/>
               </a:ext>
             </a:extLst>
           </p:cNvPr>
@@ -5437,7 +8797,7 @@
           <p:cNvPr id="29" name="">
             <a:extLst xmlns:a="http://schemas.openxmlformats.org/drawingml/2006/main">
               <a:ext uri="{FF2B5EF4-FFF2-40B4-BE49-F238E27FC236}">
-                <a16:creationId xmlns:a16="http://schemas.microsoft.com/office/drawing/2014/main" id="{CC4D4C49-C0E5-4299-A116-D667F442DF14}"/>
+                <a16:creationId xmlns:a16="http://schemas.microsoft.com/office/drawing/2014/main" id="{BF464A08-8020-42DE-8347-2721A1455E2A}"/>
               </a:ext>
             </a:extLst>
           </p:cNvPr>
@@ -5487,7 +8847,7 @@
           <p:cNvPr id="30" name="">
             <a:extLst xmlns:a="http://schemas.openxmlformats.org/drawingml/2006/main">
               <a:ext uri="{FF2B5EF4-FFF2-40B4-BE49-F238E27FC236}">
-                <a16:creationId xmlns:a16="http://schemas.microsoft.com/office/drawing/2014/main" id="{86360DCE-ED58-4DE4-B601-515C0EE33E19}"/>
+                <a16:creationId xmlns:a16="http://schemas.microsoft.com/office/drawing/2014/main" id="{935F3AA3-B506-4BA3-BD83-66548A2AE30F}"/>
               </a:ext>
             </a:extLst>
           </p:cNvPr>
@@ -5537,7 +8897,7 @@
           <p:cNvPr id="31" name="">
             <a:extLst xmlns:a="http://schemas.openxmlformats.org/drawingml/2006/main">
               <a:ext uri="{FF2B5EF4-FFF2-40B4-BE49-F238E27FC236}">
-                <a16:creationId xmlns:a16="http://schemas.microsoft.com/office/drawing/2014/main" id="{707ADDC6-7B96-42F2-A5DC-F8AC059FF16B}"/>
+                <a16:creationId xmlns:a16="http://schemas.microsoft.com/office/drawing/2014/main" id="{CA6A16A8-A781-4009-9B1C-BC7EDA0C6A91}"/>
               </a:ext>
             </a:extLst>
           </p:cNvPr>
@@ -5577,7 +8937,7 @@
                   <a:srgbClr val="52606B"/>
                 </a:solidFill>
               </a:rPr>
-              <a:t>05</a:t>
+              <a:t>07</a:t>
             </a:r>
           </a:p>
         </p:txBody>
@@ -5585,7 +8945,7 @@
     </p:spTree>
     <p:extLst>
       <p:ext uri="{BB962C8B-B14F-4D97-AF65-F5344CB8AC3E}">
-        <p14:creationId xmlns:p14="http://schemas.microsoft.com/office/powerpoint/2010/main" val="1860052952"/>
+        <p14:creationId xmlns:p14="http://schemas.microsoft.com/office/powerpoint/2010/main" val="135628606"/>
       </p:ext>
     </p:extLst>
   </p:cSld>
